--- a/lectures/lecture-02/output/L2-sensor-specifications-and-selection.pptx
+++ b/lectures/lecture-02/output/L2-sensor-specifications-and-selection.pptx
@@ -37,6 +37,7 @@
     <p:sldId id="285" r:id="rId37"/>
     <p:sldId id="286" r:id="rId38"/>
     <p:sldId id="287" r:id="rId39"/>
+    <p:sldId id="288" r:id="rId40"/>
   </p:sldIdLst>
   <p:sldSz cx="12191695" cy="6858000" type="screen4x3"/>
   <p:notesSz cx="6858000" cy="9144000"/>
@@ -2072,7 +2073,7 @@
           </a:p>
           <a:p>
             <a:r>
-              <a:t>LARGEST term dominates completely. 10 and 0.7 combine to 10.03 — the noise</a:t>
+              <a:t>LARGEST term dominates completely. 10 and 0.7 combine to 10.02 — the noise</a:t>
             </a:r>
           </a:p>
           <a:p>
@@ -2164,44 +2165,108 @@
           <a:lstStyle/>
           <a:p>
             <a:r>
-              <a:t>TIMING: 1:06–1:08. Show the minute-7 distribution next to this. The shift is the</a:t>
-            </a:r>
-          </a:p>
-          <a:p>
-            <a:r>
-              <a:t>lecture's evidence that it worked.</a:t>
+              <a:t>TIMING: insert at 1:06–1:09 (push the reveal and the decision table back by three</a:t>
+            </a:r>
+          </a:p>
+          <a:p>
+            <a:r>
+              <a:t>minutes; if short of time, cut Part C from the team table instead).</a:t>
             </a:r>
           </a:p>
           <a:p/>
           <a:p>
             <a:r>
-              <a:t>Say both halves explicitly — this is the professional habit, not a trick:</a:t>
+              <a:t>THIS IS THE STRONGEST SLIDE IN THE LECTURE. Parts A and B were teaching devices. This</a:t>
+            </a:r>
+          </a:p>
+          <a:p>
+            <a:r>
+              <a:t>is the actual component in their kit, and its own two published columns straddle the</a:t>
+            </a:r>
+          </a:p>
+          <a:p>
+            <a:r>
+              <a:t>pass/fail line.</a:t>
             </a:r>
           </a:p>
           <a:p/>
           <a:p>
             <a:r>
-              <a:t>"If you chose C at minute seven, you were right, and you were right for the best</a:t>
-            </a:r>
-          </a:p>
-          <a:p>
-            <a:r>
-              <a:t>possible reason: you knew you could not decide. If you chose A, you were doing</a:t>
-            </a:r>
-          </a:p>
-          <a:p>
-            <a:r>
-              <a:t>what most engineers do — reading the headline. And if you now choose B, you can</a:t>
-            </a:r>
-          </a:p>
-          <a:p>
-            <a:r>
-              <a:t>defend it with a number, which is the only defence that survives a design</a:t>
-            </a:r>
-          </a:p>
-          <a:p>
-            <a:r>
-              <a:t>review."</a:t>
+              <a:t>Say it plainly: "A typical ISM330DHCX meets our requirement with fourfold margin. A part</a:t>
+            </a:r>
+          </a:p>
+          <a:p>
+            <a:r>
+              <a:t>at the limit of its own specification misses it. Both are in spec. Both ship in the same</a:t>
+            </a:r>
+          </a:p>
+          <a:p>
+            <a:r>
+              <a:t>reel. Nobody is cheating."</a:t>
+            </a:r>
+          </a:p>
+          <a:p/>
+          <a:p>
+            <a:r>
+              <a:t>Then the engineering question, and take answers:</a:t>
+            </a:r>
+          </a:p>
+          <a:p>
+            <a:r>
+              <a:t>  "So which column do you design with?"</a:t>
+            </a:r>
+          </a:p>
+          <a:p/>
+          <a:p>
+            <a:r>
+              <a:t>  - Guaranteeing the spec  -&gt; the MAX column, and this design does not close. You must</a:t>
+            </a:r>
+          </a:p>
+          <a:p>
+            <a:r>
+              <a:t>    narrow the temperature range, compensate offset against temperature (Lecture 14),</a:t>
+            </a:r>
+          </a:p>
+          <a:p>
+            <a:r>
+              <a:t>    or renegotiate the 0.5 degrees.</a:t>
+            </a:r>
+          </a:p>
+          <a:p>
+            <a:r>
+              <a:t>  - Ten units you can each measure -&gt; typ plus per-unit calibration is defensible,</a:t>
+            </a:r>
+          </a:p>
+          <a:p>
+            <a:r>
+              <a:t>    PROVIDED you write down that you made that choice.</a:t>
+            </a:r>
+          </a:p>
+          <a:p>
+            <a:r>
+              <a:t>  - Never: budget with typ and call the result a guarantee.</a:t>
+            </a:r>
+          </a:p>
+          <a:p/>
+          <a:p>
+            <a:r>
+              <a:t>Close on: "A datasheet does not describe your device. It describes the population your</a:t>
+            </a:r>
+          </a:p>
+          <a:p>
+            <a:r>
+              <a:t>device was drawn from."</a:t>
+            </a:r>
+          </a:p>
+          <a:p/>
+          <a:p>
+            <a:r>
+              <a:t>Note for you: Part A's numbers were essentially this part's worst case, Part B's its</a:t>
+            </a:r>
+          </a:p>
+          <a:p>
+            <a:r>
+              <a:t>typical case. If a student spots that, they have understood the whole lecture.</a:t>
             </a:r>
           </a:p>
         </p:txBody>
@@ -2271,18 +2336,44 @@
           <a:lstStyle/>
           <a:p>
             <a:r>
-              <a:t>TIMING: 1:08–1:09. Silence, then read once.</a:t>
+              <a:t>TIMING: 1:06–1:08. Show the minute-7 distribution next to this. The shift is the</a:t>
+            </a:r>
+          </a:p>
+          <a:p>
+            <a:r>
+              <a:t>lecture's evidence that it worked.</a:t>
             </a:r>
           </a:p>
           <a:p/>
           <a:p>
             <a:r>
-              <a:t>Optional, if the room is with you: "And Part A was cheaper, and had a library.</a:t>
-            </a:r>
-          </a:p>
-          <a:p>
-            <a:r>
-              <a:t>Every incentive pointed at the wrong part."</a:t>
+              <a:t>Say both halves explicitly — this is the professional habit, not a trick:</a:t>
+            </a:r>
+          </a:p>
+          <a:p/>
+          <a:p>
+            <a:r>
+              <a:t>"If you chose C at minute seven, you were right, and you were right for the best</a:t>
+            </a:r>
+          </a:p>
+          <a:p>
+            <a:r>
+              <a:t>possible reason: you knew you could not decide. If you chose A, you were doing</a:t>
+            </a:r>
+          </a:p>
+          <a:p>
+            <a:r>
+              <a:t>what most engineers do — reading the headline. And if you now choose B, you can</a:t>
+            </a:r>
+          </a:p>
+          <a:p>
+            <a:r>
+              <a:t>defend it with a number, which is the only defence that survives a design</a:t>
+            </a:r>
+          </a:p>
+          <a:p>
+            <a:r>
+              <a:t>review."</a:t>
             </a:r>
           </a:p>
         </p:txBody>
@@ -2352,45 +2443,18 @@
           <a:lstStyle/>
           <a:p>
             <a:r>
-              <a:t>TIMING: 1:09–1:15. Teams of three, 8 minutes, one sheet. Circulate.</a:t>
+              <a:t>TIMING: 1:08–1:09. Silence, then read once.</a:t>
             </a:r>
           </a:p>
           <a:p/>
           <a:p>
             <a:r>
-              <a:t>Two teams read their sentence aloud. Insist on the form: Part, then the dominant</a:t>
-            </a:r>
-          </a:p>
-          <a:p>
-            <a:r>
-              <a:t>term. "Because it is better" is not an answer.</a:t>
-            </a:r>
-          </a:p>
-          <a:p/>
-          <a:p>
-            <a:r>
-              <a:t>IF A TEAM CHOOSES C: do not correct it — ask "what did the customer get for the</a:t>
-            </a:r>
-          </a:p>
-          <a:p>
-            <a:r>
-              <a:t>extra €4,850?" (500 units × €9.70.) Let them find it. Over-specification is a</a:t>
-            </a:r>
-          </a:p>
-          <a:p>
-            <a:r>
-              <a:t>real failure mode and this is the only place in the pilot that teaches it.</a:t>
-            </a:r>
-          </a:p>
-          <a:p/>
-          <a:p>
-            <a:r>
-              <a:t>IF SHORT OF TIME: drop Part C, run it with two candidates in 5 minutes, set the</a:t>
-            </a:r>
-          </a:p>
-          <a:p>
-            <a:r>
-              <a:t>third as homework.</a:t>
+              <a:t>Optional, if the room is with you: "And Part A was cheaper, and had a library.</a:t>
+            </a:r>
+          </a:p>
+          <a:p>
+            <a:r>
+              <a:t>Every incentive pointed at the wrong part."</a:t>
             </a:r>
           </a:p>
         </p:txBody>
@@ -2460,61 +2524,45 @@
           <a:lstStyle/>
           <a:p>
             <a:r>
-              <a:t>TIMING: 1:15–1:18. TRANSFER — deliberately a new measurand so it tests the</a:t>
-            </a:r>
-          </a:p>
-          <a:p>
-            <a:r>
-              <a:t>principle, not memory of the tilt case. Target 55–75 %.</a:t>
+              <a:t>TIMING: 1:09–1:15. Teams of three, 8 minutes, one sheet. Circulate.</a:t>
             </a:r>
           </a:p>
           <a:p/>
           <a:p>
             <a:r>
-              <a:t>60 seconds, quick vote, short discussion.</a:t>
+              <a:t>Two teams read their sentence aloud. Insist on the form: Part, then the dominant</a:t>
+            </a:r>
+          </a:p>
+          <a:p>
+            <a:r>
+              <a:t>term. "Because it is better" is not an answer.</a:t>
             </a:r>
           </a:p>
           <a:p/>
           <a:p>
             <a:r>
-              <a:t>THE POINT: P's ±0.25 % FS over the full range is 50 Pa ≈ 5 mm — comfortably</a:t>
-            </a:r>
-          </a:p>
-          <a:p>
-            <a:r>
-              <a:t>inside ±20 mm, and GUARANTEED across the operating temperature. Q's ±0.05 % FS</a:t>
-            </a:r>
-          </a:p>
-          <a:p>
-            <a:r>
-              <a:t>is 10 Pa ≈ 1 mm at 25 °C and UNKNOWN at 5 °C, because the temperature</a:t>
-            </a:r>
-          </a:p>
-          <a:p>
-            <a:r>
-              <a:t>coefficient is not specified at all.</a:t>
+              <a:t>IF A TEAM CHOOSES C: do not correct it — ask "what did the customer get for the</a:t>
+            </a:r>
+          </a:p>
+          <a:p>
+            <a:r>
+              <a:t>extra €3,650?" (500 units × €7.30 over Part B.) Let them find it. Over-specification is a</a:t>
+            </a:r>
+          </a:p>
+          <a:p>
+            <a:r>
+              <a:t>real failure mode and this is the only place in the pilot that teaches it.</a:t>
             </a:r>
           </a:p>
           <a:p/>
           <a:p>
             <a:r>
-              <a:t>You cannot write a defensible error budget for Q. That is the whole answer.</a:t>
-            </a:r>
-          </a:p>
-          <a:p/>
-          <a:p>
-            <a:r>
-              <a:t>C and D are the "calibration fixes everything" misconception, now in a second</a:t>
-            </a:r>
-          </a:p>
-          <a:p>
-            <a:r>
-              <a:t>context. If students still pick them here after the drift lesson, note it — that</a:t>
-            </a:r>
-          </a:p>
-          <a:p>
-            <a:r>
-              <a:t>is a genuine finding for next year.</a:t>
+              <a:t>IF SHORT OF TIME: drop Part C, run it with two candidates in 5 minutes, set the</a:t>
+            </a:r>
+          </a:p>
+          <a:p>
+            <a:r>
+              <a:t>third as homework.</a:t>
             </a:r>
           </a:p>
         </p:txBody>
@@ -2584,29 +2632,61 @@
           <a:lstStyle/>
           <a:p>
             <a:r>
-              <a:t>Reveal. The sentence to land:</a:t>
+              <a:t>TIMING: 1:15–1:18. TRANSFER — deliberately a new measurand so it tests the</a:t>
+            </a:r>
+          </a:p>
+          <a:p>
+            <a:r>
+              <a:t>principle, not memory of the tilt case. Target 55–75 %.</a:t>
             </a:r>
           </a:p>
           <a:p/>
           <a:p>
             <a:r>
-              <a:t>"An unspecified number is not a good number. It is an unknown number, and you</a:t>
-            </a:r>
-          </a:p>
-          <a:p>
-            <a:r>
-              <a:t>cannot put an unknown into a budget you have to sign."</a:t>
+              <a:t>60 seconds, quick vote, short discussion.</a:t>
             </a:r>
           </a:p>
           <a:p/>
           <a:p>
             <a:r>
-              <a:t>Note the deliberate echo: in the tilt case the killer term was drift you could</a:t>
-            </a:r>
-          </a:p>
-          <a:p>
-            <a:r>
-              <a:t>compute. Here it is drift you cannot even compute. Same lesson, harder version.</a:t>
+              <a:t>THE POINT: P's ±0.25 % FS over the full range is 50 Pa ≈ 5 mm — comfortably</a:t>
+            </a:r>
+          </a:p>
+          <a:p>
+            <a:r>
+              <a:t>inside ±20 mm, and GUARANTEED across the operating temperature. Q's ±0.05 % FS</a:t>
+            </a:r>
+          </a:p>
+          <a:p>
+            <a:r>
+              <a:t>is 10 Pa ≈ 1 mm at 25 °C and UNKNOWN at 5 °C, because the temperature</a:t>
+            </a:r>
+          </a:p>
+          <a:p>
+            <a:r>
+              <a:t>coefficient is not specified at all.</a:t>
+            </a:r>
+          </a:p>
+          <a:p/>
+          <a:p>
+            <a:r>
+              <a:t>You cannot write a defensible error budget for Q. That is the whole answer.</a:t>
+            </a:r>
+          </a:p>
+          <a:p/>
+          <a:p>
+            <a:r>
+              <a:t>C and D are the "calibration fixes everything" misconception, now in a second</a:t>
+            </a:r>
+          </a:p>
+          <a:p>
+            <a:r>
+              <a:t>context. If students still pick them here after the drift lesson, note it — that</a:t>
+            </a:r>
+          </a:p>
+          <a:p>
+            <a:r>
+              <a:t>is a genuine finding for next year.</a:t>
             </a:r>
           </a:p>
         </p:txBody>
@@ -2676,34 +2756,29 @@
           <a:lstStyle/>
           <a:p>
             <a:r>
-              <a:t>TIMING: 1:18–1:19. Ninety seconds.</a:t>
+              <a:t>Reveal. The sentence to land:</a:t>
             </a:r>
           </a:p>
           <a:p/>
           <a:p>
             <a:r>
-              <a:t>Be honest about why the rule exists: "A library is a real asset and it will save</a:t>
-            </a:r>
-          </a:p>
-          <a:p>
-            <a:r>
-              <a:t>you a week. It is just not a specification. Rank it last, not zero."</a:t>
+              <a:t>"An unspecified number is not a good number. It is an unknown number, and you</a:t>
+            </a:r>
+          </a:p>
+          <a:p>
+            <a:r>
+              <a:t>cannot put an unknown into a budget you have to sign."</a:t>
             </a:r>
           </a:p>
           <a:p/>
           <a:p>
             <a:r>
-              <a:t>The seven boxes are the plan's own component-selection criteria. Tell them these</a:t>
-            </a:r>
-          </a:p>
-          <a:p>
-            <a:r>
-              <a:t>are the features the lab kit was chosen to expose — which is why they will be</a:t>
-            </a:r>
-          </a:p>
-          <a:p>
-            <a:r>
-              <a:t>writing register values rather than calling someone's begin() function.</a:t>
+              <a:t>Note the deliberate echo: in the tilt case the killer term was drift you could</a:t>
+            </a:r>
+          </a:p>
+          <a:p>
+            <a:r>
+              <a:t>compute. Here it is drift you cannot even compute. Same lesson, harder version.</a:t>
             </a:r>
           </a:p>
         </p:txBody>
@@ -2870,7 +2945,34 @@
           <a:lstStyle/>
           <a:p>
             <a:r>
-              <a:t>TIMING: 1:19. Read the four bold lines only. Sixty seconds.</a:t>
+              <a:t>TIMING: 1:18–1:19. Ninety seconds.</a:t>
+            </a:r>
+          </a:p>
+          <a:p/>
+          <a:p>
+            <a:r>
+              <a:t>Be honest about why the rule exists: "A library is a real asset and it will save</a:t>
+            </a:r>
+          </a:p>
+          <a:p>
+            <a:r>
+              <a:t>you a week. It is just not a specification. Rank it last, not zero."</a:t>
+            </a:r>
+          </a:p>
+          <a:p/>
+          <a:p>
+            <a:r>
+              <a:t>The seven boxes are the plan's own component-selection criteria. Tell them these</a:t>
+            </a:r>
+          </a:p>
+          <a:p>
+            <a:r>
+              <a:t>are the features the lab kit was chosen to expose — which is why they will be</a:t>
+            </a:r>
+          </a:p>
+          <a:p>
+            <a:r>
+              <a:t>writing register values rather than calling someone's begin() function.</a:t>
             </a:r>
           </a:p>
         </p:txBody>
@@ -2940,35 +3042,7 @@
           <a:lstStyle/>
           <a:p>
             <a:r>
-              <a:t>TIMING: 1:19–1:20.</a:t>
-            </a:r>
-          </a:p>
-          <a:p/>
-          <a:p>
-            <a:r>
-              <a:t>Q1 key: 200 × √100 = 2000 µg = 2 mg. This is the independent check on L2.3 —</a:t>
-            </a:r>
-          </a:p>
-          <a:p>
-            <a:r>
-              <a:t>group work can hide an individual who cannot do it.</a:t>
-            </a:r>
-          </a:p>
-          <a:p/>
-          <a:p>
-            <a:r>
-              <a:t>Q2 accepts either "the conditions block" or "offset drift / temperature</a:t>
-            </a:r>
-          </a:p>
-          <a:p>
-            <a:r>
-              <a:t>coefficient". Both are the right instinct.</a:t>
-            </a:r>
-          </a:p>
-          <a:p/>
-          <a:p>
-            <a:r>
-              <a:t>Say the bottom line out loud. It is true, and it buys honest tickets.</a:t>
+              <a:t>TIMING: 1:19. Read the four bold lines only. Sixty seconds.</a:t>
             </a:r>
           </a:p>
         </p:txBody>
@@ -2994,6 +3068,104 @@
 </file>
 
 <file path=ppt/notesSlides/notesSlide32.xml><?xml version="1.0" encoding="utf-8"?>
+<p:notes xmlns:a="http://schemas.openxmlformats.org/drawingml/2006/main" xmlns:p="http://schemas.openxmlformats.org/presentationml/2006/main" xmlns:r="http://schemas.openxmlformats.org/officeDocument/2006/relationships">
+  <p:cSld>
+    <p:spTree>
+      <p:nvGrpSpPr>
+        <p:cNvPr id="1" name=""/>
+        <p:cNvGrpSpPr/>
+        <p:nvPr/>
+      </p:nvGrpSpPr>
+      <p:grpSpPr>
+        <a:xfrm>
+          <a:off x="0" y="0"/>
+          <a:ext cx="0" cy="0"/>
+          <a:chOff x="0" y="0"/>
+          <a:chExt cx="0" cy="0"/>
+        </a:xfrm>
+      </p:grpSpPr>
+      <p:sp>
+        <p:nvSpPr>
+          <p:cNvPr id="2" name="Slide Image Placeholder 1"/>
+          <p:cNvSpPr>
+            <a:spLocks noGrp="1"/>
+          </p:cNvSpPr>
+          <p:nvPr>
+            <p:ph type="sldImg" idx="2"/>
+          </p:nvPr>
+        </p:nvSpPr>
+        <p:spPr/>
+      </p:sp>
+      <p:sp>
+        <p:nvSpPr>
+          <p:cNvPr id="3" name="Notes Placeholder 2"/>
+          <p:cNvSpPr>
+            <a:spLocks noGrp="1"/>
+          </p:cNvSpPr>
+          <p:nvPr>
+            <p:ph type="body" idx="3" sz="quarter"/>
+          </p:nvPr>
+        </p:nvSpPr>
+        <p:spPr/>
+        <p:txBody>
+          <a:bodyPr/>
+          <a:lstStyle/>
+          <a:p>
+            <a:r>
+              <a:t>TIMING: 1:19–1:20.</a:t>
+            </a:r>
+          </a:p>
+          <a:p/>
+          <a:p>
+            <a:r>
+              <a:t>Q1 key: 200 × √100 = 2000 µg = 2 mg. This is the independent check on L2.3 —</a:t>
+            </a:r>
+          </a:p>
+          <a:p>
+            <a:r>
+              <a:t>group work can hide an individual who cannot do it.</a:t>
+            </a:r>
+          </a:p>
+          <a:p/>
+          <a:p>
+            <a:r>
+              <a:t>Q2 accepts either "the conditions block" or "offset drift / temperature</a:t>
+            </a:r>
+          </a:p>
+          <a:p>
+            <a:r>
+              <a:t>coefficient". Both are the right instinct.</a:t>
+            </a:r>
+          </a:p>
+          <a:p/>
+          <a:p>
+            <a:r>
+              <a:t>Say the bottom line out loud. It is true, and it buys honest tickets.</a:t>
+            </a:r>
+          </a:p>
+        </p:txBody>
+      </p:sp>
+      <p:sp>
+        <p:nvSpPr>
+          <p:cNvPr id="4" name="Slide Number Placeholder 3"/>
+          <p:cNvSpPr>
+            <a:spLocks noGrp="1"/>
+          </p:cNvSpPr>
+          <p:nvPr>
+            <p:ph type="sldNum" idx="5" sz="quarter"/>
+          </p:nvPr>
+        </p:nvSpPr>
+        <p:spPr/>
+      </p:sp>
+    </p:spTree>
+  </p:cSld>
+  <p:clrMapOvr>
+    <a:masterClrMapping/>
+  </p:clrMapOvr>
+</p:notes>
+</file>
+
+<file path=ppt/notesSlides/notesSlide33.xml><?xml version="1.0" encoding="utf-8"?>
 <p:notes xmlns:a="http://schemas.openxmlformats.org/drawingml/2006/main" xmlns:p="http://schemas.openxmlformats.org/presentationml/2006/main" xmlns:r="http://schemas.openxmlformats.org/officeDocument/2006/relationships">
   <p:cSld>
     <p:spTree>
@@ -11555,7 +11727,7 @@
                 </a:solidFill>
                 <a:latin typeface="Arial"/>
               </a:rPr>
-              <a:t>Pairs · 8 minutes · write the page number next to every answer</a:t>
+              <a:t>ISM330DHCX datasheet · pairs · 8 minutes · write the page number beside every answer</a:t>
             </a:r>
           </a:p>
         </p:txBody>
@@ -17504,7 +17676,7 @@
                           </a:solidFill>
                           <a:latin typeface="Courier New"/>
                         </a:rPr>
-                        <a:t>10.03</a:t>
+                        <a:t>10.02</a:t>
                       </a:r>
                     </a:p>
                   </a:txBody>
@@ -17985,8 +18157,8 @@
         </p:nvSpPr>
         <p:spPr>
           <a:xfrm>
-            <a:off x="658368" y="274320"/>
-            <a:ext cx="10874959" cy="274320"/>
+            <a:off x="658368" y="475488"/>
+            <a:ext cx="10874959" cy="777240"/>
           </a:xfrm>
           <a:prstGeom prst="rect">
             <a:avLst/>
@@ -18001,79 +18173,36 @@
           <a:p>
             <a:pPr algn="l"/>
             <a:r>
-              <a:rPr sz="1200" b="1" i="0">
-                <a:solidFill>
-                  <a:srgbClr val="0E7C86"/>
-                </a:solidFill>
-                <a:latin typeface="Arial"/>
-              </a:rPr>
-              <a:t>POLL 1   ·   MINUTE 70   ·   ANSWER</a:t>
-            </a:r>
-          </a:p>
-        </p:txBody>
-      </p:sp>
-      <p:sp>
-        <p:nvSpPr>
-          <p:cNvPr id="6" name="TextBox 5"/>
-          <p:cNvSpPr txBox="1"/>
-          <p:nvPr/>
-        </p:nvSpPr>
-        <p:spPr>
-          <a:xfrm>
-            <a:off x="658368" y="658368"/>
-            <a:ext cx="10874959" cy="1325880"/>
-          </a:xfrm>
-          <a:prstGeom prst="rect">
-            <a:avLst/>
-          </a:prstGeom>
-          <a:noFill/>
-        </p:spPr>
-        <p:txBody>
-          <a:bodyPr wrap="square" lIns="0" rIns="0" tIns="0" bIns="0" anchor="t">
-            <a:spAutoFit/>
-          </a:bodyPr>
-          <a:lstStyle/>
-          <a:p>
-            <a:pPr algn="l">
-              <a:lnSpc>
-                <a:spcPct val="120000"/>
-              </a:lnSpc>
-            </a:pPr>
-            <a:r>
-              <a:rPr sz="2600" b="1" i="0">
+              <a:rPr sz="3400" b="1" i="0">
                 <a:solidFill>
                   <a:srgbClr val="1A1F24"/>
                 </a:solidFill>
                 <a:latin typeface="Arial"/>
               </a:rPr>
-              <a:t>Which part do you specify for a ±0.5° tilt measurement?</a:t>
-            </a:r>
-          </a:p>
-        </p:txBody>
-      </p:sp>
-      <p:sp>
-        <p:nvSpPr>
-          <p:cNvPr id="7" name="Rounded Rectangle 6"/>
+              <a:t>Now the part on your bench</a:t>
+            </a:r>
+          </a:p>
+        </p:txBody>
+      </p:sp>
+      <p:sp>
+        <p:nvSpPr>
+          <p:cNvPr id="6" name="Rectangle 5"/>
           <p:cNvSpPr/>
           <p:nvPr/>
         </p:nvSpPr>
         <p:spPr>
           <a:xfrm>
-            <a:off x="658368" y="2057400"/>
-            <a:ext cx="10874959" cy="658368"/>
-          </a:xfrm>
-          <a:prstGeom prst="roundRect">
-            <a:avLst>
-              <a:gd name="adj" fmla="val 10000"/>
-            </a:avLst>
+            <a:off x="658368" y="1188720"/>
+            <a:ext cx="1371600" cy="57150"/>
+          </a:xfrm>
+          <a:prstGeom prst="rect">
+            <a:avLst/>
           </a:prstGeom>
           <a:solidFill>
-            <a:srgbClr val="FFFFFF"/>
+            <a:srgbClr val="0E7C86"/>
           </a:solidFill>
-          <a:ln w="15875">
-            <a:solidFill>
-              <a:srgbClr val="E4E2DE"/>
-            </a:solidFill>
+          <a:ln>
+            <a:noFill/>
           </a:ln>
           <a:effectLst/>
         </p:spPr>
@@ -18092,32 +18221,23 @@
           </a:fontRef>
         </p:style>
         <p:txBody>
-          <a:bodyPr rtlCol="0" anchor="ctr" wrap="square" lIns="54864" rIns="54864" tIns="27432" bIns="27432"/>
+          <a:bodyPr rtlCol="0" anchor="ctr"/>
           <a:lstStyle/>
           <a:p>
             <a:pPr algn="ctr"/>
-            <a:r>
-              <a:rPr sz="1500" b="0">
-                <a:solidFill>
-                  <a:srgbClr val="1A1F24"/>
-                </a:solidFill>
-                <a:latin typeface="Arial"/>
-              </a:rPr>
-              <a:t/>
-            </a:r>
-          </a:p>
-        </p:txBody>
-      </p:sp>
-      <p:sp>
-        <p:nvSpPr>
-          <p:cNvPr id="8" name="TextBox 7"/>
+          </a:p>
+        </p:txBody>
+      </p:sp>
+      <p:sp>
+        <p:nvSpPr>
+          <p:cNvPr id="7" name="TextBox 6"/>
           <p:cNvSpPr txBox="1"/>
           <p:nvPr/>
         </p:nvSpPr>
         <p:spPr>
           <a:xfrm>
-            <a:off x="859536" y="2176272"/>
-            <a:ext cx="457200" cy="658368"/>
+            <a:off x="658368" y="1353312"/>
+            <a:ext cx="10874959" cy="365760"/>
           </a:xfrm>
           <a:prstGeom prst="rect">
             <a:avLst/>
@@ -18132,62 +18252,901 @@
           <a:p>
             <a:pPr algn="l"/>
             <a:r>
-              <a:rPr sz="2000" b="1" i="0">
+              <a:rPr sz="1700" b="0" i="1">
                 <a:solidFill>
                   <a:srgbClr val="6B7680"/>
                 </a:solidFill>
                 <a:latin typeface="Arial"/>
               </a:rPr>
-              <a:t>A</a:t>
-            </a:r>
-          </a:p>
-        </p:txBody>
-      </p:sp>
-      <p:sp>
-        <p:nvSpPr>
-          <p:cNvPr id="9" name="TextBox 8"/>
-          <p:cNvSpPr txBox="1"/>
-          <p:nvPr/>
-        </p:nvSpPr>
-        <p:spPr>
-          <a:xfrm>
-            <a:off x="1371600" y="2185416"/>
-            <a:ext cx="9869119" cy="658368"/>
-          </a:xfrm>
-          <a:prstGeom prst="rect">
-            <a:avLst/>
-          </a:prstGeom>
-          <a:noFill/>
-        </p:spPr>
-        <p:txBody>
-          <a:bodyPr wrap="square" lIns="0" rIns="0" tIns="0" bIns="0" anchor="t">
-            <a:spAutoFit/>
-          </a:bodyPr>
-          <a:lstStyle/>
-          <a:p>
-            <a:pPr algn="l"/>
-            <a:r>
-              <a:rPr sz="1800" b="0" i="0">
-                <a:solidFill>
-                  <a:srgbClr val="1A1F24"/>
-                </a:solidFill>
-                <a:latin typeface="Arial"/>
-              </a:rPr>
-              <a:t>Part A — eight times finer resolution, and cheaper</a:t>
-            </a:r>
-          </a:p>
-        </p:txBody>
-      </p:sp>
-      <p:sp>
-        <p:nvSpPr>
-          <p:cNvPr id="10" name="Rounded Rectangle 9"/>
+              <a:t>ISM330DHCX · the same budget, run twice from its own datasheet</a:t>
+            </a:r>
+          </a:p>
+        </p:txBody>
+      </p:sp>
+      <p:graphicFrame>
+        <p:nvGraphicFramePr>
+          <p:cNvPr id="8" name="Table 7"/>
+          <p:cNvGraphicFramePr>
+            <a:graphicFrameLocks noGrp="1"/>
+          </p:cNvGraphicFramePr>
+          <p:nvPr/>
+        </p:nvGraphicFramePr>
+        <p:xfrm>
+          <a:off x="658368" y="1847088"/>
+          <a:ext cx="10874957" cy="3456432"/>
+        </p:xfrm>
+        <a:graphic>
+          <a:graphicData uri="http://schemas.openxmlformats.org/drawingml/2006/table">
+            <a:tbl>
+              <a:tblPr firstRow="1" bandRow="1">
+                <a:tableStyleId>{5C22544A-7EE6-4342-B048-85BDC9FD1C3A}</a:tableStyleId>
+              </a:tblPr>
+              <a:tblGrid>
+                <a:gridCol w="2827489"/>
+                <a:gridCol w="2174991"/>
+                <a:gridCol w="2174991"/>
+                <a:gridCol w="3697486"/>
+              </a:tblGrid>
+              <a:tr h="384048">
+                <a:tc>
+                  <a:txBody>
+                    <a:bodyPr wrap="square"/>
+                    <a:lstStyle/>
+                    <a:p>
+                      <a:pPr algn="l"/>
+                      <a:r>
+                        <a:rPr sz="1400" b="1">
+                          <a:solidFill>
+                            <a:srgbClr val="F7F5F1"/>
+                          </a:solidFill>
+                          <a:latin typeface="Arial"/>
+                        </a:rPr>
+                        <a:t>Term</a:t>
+                      </a:r>
+                    </a:p>
+                  </a:txBody>
+                  <a:tcPr marL="91440" marR="91440" marT="27432" marB="27432" anchor="ctr">
+                    <a:solidFill>
+                      <a:srgbClr val="1A1F24"/>
+                    </a:solidFill>
+                  </a:tcPr>
+                </a:tc>
+                <a:tc>
+                  <a:txBody>
+                    <a:bodyPr wrap="square"/>
+                    <a:lstStyle/>
+                    <a:p>
+                      <a:pPr algn="ctr"/>
+                      <a:r>
+                        <a:rPr sz="1400" b="1">
+                          <a:solidFill>
+                            <a:srgbClr val="F7F5F1"/>
+                          </a:solidFill>
+                          <a:latin typeface="Arial"/>
+                        </a:rPr>
+                        <a:t>using TYP</a:t>
+                      </a:r>
+                    </a:p>
+                  </a:txBody>
+                  <a:tcPr marL="91440" marR="91440" marT="27432" marB="27432" anchor="ctr">
+                    <a:solidFill>
+                      <a:srgbClr val="1A1F24"/>
+                    </a:solidFill>
+                  </a:tcPr>
+                </a:tc>
+                <a:tc>
+                  <a:txBody>
+                    <a:bodyPr wrap="square"/>
+                    <a:lstStyle/>
+                    <a:p>
+                      <a:pPr algn="ctr"/>
+                      <a:r>
+                        <a:rPr sz="1400" b="1">
+                          <a:solidFill>
+                            <a:srgbClr val="F7F5F1"/>
+                          </a:solidFill>
+                          <a:latin typeface="Arial"/>
+                        </a:rPr>
+                        <a:t>using MAX</a:t>
+                      </a:r>
+                    </a:p>
+                  </a:txBody>
+                  <a:tcPr marL="91440" marR="91440" marT="27432" marB="27432" anchor="ctr">
+                    <a:solidFill>
+                      <a:srgbClr val="1A1F24"/>
+                    </a:solidFill>
+                  </a:tcPr>
+                </a:tc>
+                <a:tc>
+                  <a:txBody>
+                    <a:bodyPr wrap="square"/>
+                    <a:lstStyle/>
+                    <a:p>
+                      <a:pPr algn="ctr"/>
+                      <a:r>
+                        <a:rPr sz="1400" b="1">
+                          <a:solidFill>
+                            <a:srgbClr val="F7F5F1"/>
+                          </a:solidFill>
+                          <a:latin typeface="Arial"/>
+                        </a:rPr>
+                        <a:t>from DS13012 Rev 6</a:t>
+                      </a:r>
+                    </a:p>
+                  </a:txBody>
+                  <a:tcPr marL="91440" marR="91440" marT="27432" marB="27432" anchor="ctr">
+                    <a:solidFill>
+                      <a:srgbClr val="1A1F24"/>
+                    </a:solidFill>
+                  </a:tcPr>
+                </a:tc>
+              </a:tr>
+              <a:tr h="384048">
+                <a:tc>
+                  <a:txBody>
+                    <a:bodyPr wrap="square"/>
+                    <a:lstStyle/>
+                    <a:p>
+                      <a:pPr algn="l"/>
+                      <a:r>
+                        <a:rPr sz="1400" b="1">
+                          <a:solidFill>
+                            <a:srgbClr val="1A1F24"/>
+                          </a:solidFill>
+                          <a:latin typeface="Arial"/>
+                        </a:rPr>
+                        <a:t>Noise density</a:t>
+                      </a:r>
+                    </a:p>
+                  </a:txBody>
+                  <a:tcPr marL="91440" marR="91440" marT="27432" marB="27432" anchor="ctr">
+                    <a:solidFill>
+                      <a:srgbClr val="FFFFFF"/>
+                    </a:solidFill>
+                  </a:tcPr>
+                </a:tc>
+                <a:tc>
+                  <a:txBody>
+                    <a:bodyPr wrap="square"/>
+                    <a:lstStyle/>
+                    <a:p>
+                      <a:pPr algn="ctr"/>
+                      <a:r>
+                        <a:rPr sz="1400" b="0">
+                          <a:solidFill>
+                            <a:srgbClr val="1A1F24"/>
+                          </a:solidFill>
+                          <a:latin typeface="Courier New"/>
+                        </a:rPr>
+                        <a:t>60 µg/√Hz</a:t>
+                      </a:r>
+                    </a:p>
+                  </a:txBody>
+                  <a:tcPr marL="91440" marR="91440" marT="27432" marB="27432" anchor="ctr">
+                    <a:solidFill>
+                      <a:srgbClr val="FFFFFF"/>
+                    </a:solidFill>
+                  </a:tcPr>
+                </a:tc>
+                <a:tc>
+                  <a:txBody>
+                    <a:bodyPr wrap="square"/>
+                    <a:lstStyle/>
+                    <a:p>
+                      <a:pPr algn="ctr"/>
+                      <a:r>
+                        <a:rPr sz="1400" b="0">
+                          <a:solidFill>
+                            <a:srgbClr val="1A1F24"/>
+                          </a:solidFill>
+                          <a:latin typeface="Courier New"/>
+                        </a:rPr>
+                        <a:t>100 µg/√Hz</a:t>
+                      </a:r>
+                    </a:p>
+                  </a:txBody>
+                  <a:tcPr marL="91440" marR="91440" marT="27432" marB="27432" anchor="ctr">
+                    <a:solidFill>
+                      <a:srgbClr val="FFFFFF"/>
+                    </a:solidFill>
+                  </a:tcPr>
+                </a:tc>
+                <a:tc>
+                  <a:txBody>
+                    <a:bodyPr wrap="square"/>
+                    <a:lstStyle/>
+                    <a:p>
+                      <a:pPr algn="ctr"/>
+                      <a:r>
+                        <a:rPr sz="1400" b="0">
+                          <a:solidFill>
+                            <a:srgbClr val="1A1F24"/>
+                          </a:solidFill>
+                          <a:latin typeface="Arial"/>
+                        </a:rPr>
+                        <a:t>both printed, same row</a:t>
+                      </a:r>
+                    </a:p>
+                  </a:txBody>
+                  <a:tcPr marL="91440" marR="91440" marT="27432" marB="27432" anchor="ctr">
+                    <a:solidFill>
+                      <a:srgbClr val="FFFFFF"/>
+                    </a:solidFill>
+                  </a:tcPr>
+                </a:tc>
+              </a:tr>
+              <a:tr h="384048">
+                <a:tc>
+                  <a:txBody>
+                    <a:bodyPr wrap="square"/>
+                    <a:lstStyle/>
+                    <a:p>
+                      <a:pPr algn="l"/>
+                      <a:r>
+                        <a:rPr sz="1400" b="1">
+                          <a:solidFill>
+                            <a:srgbClr val="1A1F24"/>
+                          </a:solidFill>
+                          <a:latin typeface="Arial"/>
+                        </a:rPr>
+                        <a:t>Noise, × √50 Hz</a:t>
+                      </a:r>
+                    </a:p>
+                  </a:txBody>
+                  <a:tcPr marL="91440" marR="91440" marT="27432" marB="27432" anchor="ctr">
+                    <a:solidFill>
+                      <a:srgbClr val="F7F5F1"/>
+                    </a:solidFill>
+                  </a:tcPr>
+                </a:tc>
+                <a:tc>
+                  <a:txBody>
+                    <a:bodyPr wrap="square"/>
+                    <a:lstStyle/>
+                    <a:p>
+                      <a:pPr algn="ctr"/>
+                      <a:r>
+                        <a:rPr sz="1400" b="0">
+                          <a:solidFill>
+                            <a:srgbClr val="1A1F24"/>
+                          </a:solidFill>
+                          <a:latin typeface="Courier New"/>
+                        </a:rPr>
+                        <a:t>0.424</a:t>
+                      </a:r>
+                    </a:p>
+                  </a:txBody>
+                  <a:tcPr marL="91440" marR="91440" marT="27432" marB="27432" anchor="ctr">
+                    <a:solidFill>
+                      <a:srgbClr val="F7F5F1"/>
+                    </a:solidFill>
+                  </a:tcPr>
+                </a:tc>
+                <a:tc>
+                  <a:txBody>
+                    <a:bodyPr wrap="square"/>
+                    <a:lstStyle/>
+                    <a:p>
+                      <a:pPr algn="ctr"/>
+                      <a:r>
+                        <a:rPr sz="1400" b="0">
+                          <a:solidFill>
+                            <a:srgbClr val="1A1F24"/>
+                          </a:solidFill>
+                          <a:latin typeface="Courier New"/>
+                        </a:rPr>
+                        <a:t>0.707</a:t>
+                      </a:r>
+                    </a:p>
+                  </a:txBody>
+                  <a:tcPr marL="91440" marR="91440" marT="27432" marB="27432" anchor="ctr">
+                    <a:solidFill>
+                      <a:srgbClr val="F7F5F1"/>
+                    </a:solidFill>
+                  </a:tcPr>
+                </a:tc>
+                <a:tc>
+                  <a:txBody>
+                    <a:bodyPr wrap="square"/>
+                    <a:lstStyle/>
+                    <a:p>
+                      <a:pPr algn="ctr"/>
+                      <a:r>
+                        <a:rPr sz="1400" b="0">
+                          <a:solidFill>
+                            <a:srgbClr val="1A1F24"/>
+                          </a:solidFill>
+                          <a:latin typeface="Arial"/>
+                        </a:rPr>
+                        <a:t>your bandwidth</a:t>
+                      </a:r>
+                    </a:p>
+                  </a:txBody>
+                  <a:tcPr marL="91440" marR="91440" marT="27432" marB="27432" anchor="ctr">
+                    <a:solidFill>
+                      <a:srgbClr val="F7F5F1"/>
+                    </a:solidFill>
+                  </a:tcPr>
+                </a:tc>
+              </a:tr>
+              <a:tr h="384048">
+                <a:tc>
+                  <a:txBody>
+                    <a:bodyPr wrap="square"/>
+                    <a:lstStyle/>
+                    <a:p>
+                      <a:pPr algn="l"/>
+                      <a:r>
+                        <a:rPr sz="1400" b="1">
+                          <a:solidFill>
+                            <a:srgbClr val="1A1F24"/>
+                          </a:solidFill>
+                          <a:latin typeface="Arial"/>
+                        </a:rPr>
+                        <a:t>Quantisation, LSB/√12</a:t>
+                      </a:r>
+                    </a:p>
+                  </a:txBody>
+                  <a:tcPr marL="91440" marR="91440" marT="27432" marB="27432" anchor="ctr">
+                    <a:solidFill>
+                      <a:srgbClr val="FFFFFF"/>
+                    </a:solidFill>
+                  </a:tcPr>
+                </a:tc>
+                <a:tc>
+                  <a:txBody>
+                    <a:bodyPr wrap="square"/>
+                    <a:lstStyle/>
+                    <a:p>
+                      <a:pPr algn="ctr"/>
+                      <a:r>
+                        <a:rPr sz="1400" b="0">
+                          <a:solidFill>
+                            <a:srgbClr val="1A1F24"/>
+                          </a:solidFill>
+                          <a:latin typeface="Courier New"/>
+                        </a:rPr>
+                        <a:t>0.018</a:t>
+                      </a:r>
+                    </a:p>
+                  </a:txBody>
+                  <a:tcPr marL="91440" marR="91440" marT="27432" marB="27432" anchor="ctr">
+                    <a:solidFill>
+                      <a:srgbClr val="FFFFFF"/>
+                    </a:solidFill>
+                  </a:tcPr>
+                </a:tc>
+                <a:tc>
+                  <a:txBody>
+                    <a:bodyPr wrap="square"/>
+                    <a:lstStyle/>
+                    <a:p>
+                      <a:pPr algn="ctr"/>
+                      <a:r>
+                        <a:rPr sz="1400" b="0">
+                          <a:solidFill>
+                            <a:srgbClr val="1A1F24"/>
+                          </a:solidFill>
+                          <a:latin typeface="Courier New"/>
+                        </a:rPr>
+                        <a:t>0.018</a:t>
+                      </a:r>
+                    </a:p>
+                  </a:txBody>
+                  <a:tcPr marL="91440" marR="91440" marT="27432" marB="27432" anchor="ctr">
+                    <a:solidFill>
+                      <a:srgbClr val="FFFFFF"/>
+                    </a:solidFill>
+                  </a:tcPr>
+                </a:tc>
+                <a:tc>
+                  <a:txBody>
+                    <a:bodyPr wrap="square"/>
+                    <a:lstStyle/>
+                    <a:p>
+                      <a:pPr algn="ctr"/>
+                      <a:r>
+                        <a:rPr sz="1400" b="0">
+                          <a:solidFill>
+                            <a:srgbClr val="1A1F24"/>
+                          </a:solidFill>
+                          <a:latin typeface="Arial"/>
+                        </a:rPr>
+                        <a:t>16-bit, ±2 g</a:t>
+                      </a:r>
+                    </a:p>
+                  </a:txBody>
+                  <a:tcPr marL="91440" marR="91440" marT="27432" marB="27432" anchor="ctr">
+                    <a:solidFill>
+                      <a:srgbClr val="FFFFFF"/>
+                    </a:solidFill>
+                  </a:tcPr>
+                </a:tc>
+              </a:tr>
+              <a:tr h="384048">
+                <a:tc>
+                  <a:txBody>
+                    <a:bodyPr wrap="square"/>
+                    <a:lstStyle/>
+                    <a:p>
+                      <a:pPr algn="l"/>
+                      <a:r>
+                        <a:rPr sz="1400" b="1">
+                          <a:solidFill>
+                            <a:srgbClr val="1A1F24"/>
+                          </a:solidFill>
+                          <a:latin typeface="Arial"/>
+                        </a:rPr>
+                        <a:t>Offset drift TC</a:t>
+                      </a:r>
+                    </a:p>
+                  </a:txBody>
+                  <a:tcPr marL="91440" marR="91440" marT="27432" marB="27432" anchor="ctr">
+                    <a:solidFill>
+                      <a:srgbClr val="F7F5F1"/>
+                    </a:solidFill>
+                  </a:tcPr>
+                </a:tc>
+                <a:tc>
+                  <a:txBody>
+                    <a:bodyPr wrap="square"/>
+                    <a:lstStyle/>
+                    <a:p>
+                      <a:pPr algn="ctr"/>
+                      <a:r>
+                        <a:rPr sz="1400" b="0">
+                          <a:solidFill>
+                            <a:srgbClr val="1A1F24"/>
+                          </a:solidFill>
+                          <a:latin typeface="Courier New"/>
+                        </a:rPr>
+                        <a:t>±0.1 mg/°C</a:t>
+                      </a:r>
+                    </a:p>
+                  </a:txBody>
+                  <a:tcPr marL="91440" marR="91440" marT="27432" marB="27432" anchor="ctr">
+                    <a:solidFill>
+                      <a:srgbClr val="F7F5F1"/>
+                    </a:solidFill>
+                  </a:tcPr>
+                </a:tc>
+                <a:tc>
+                  <a:txBody>
+                    <a:bodyPr wrap="square"/>
+                    <a:lstStyle/>
+                    <a:p>
+                      <a:pPr algn="ctr"/>
+                      <a:r>
+                        <a:rPr sz="1400" b="0">
+                          <a:solidFill>
+                            <a:srgbClr val="1A1F24"/>
+                          </a:solidFill>
+                          <a:latin typeface="Courier New"/>
+                        </a:rPr>
+                        <a:t>±0.5 mg/°C</a:t>
+                      </a:r>
+                    </a:p>
+                  </a:txBody>
+                  <a:tcPr marL="91440" marR="91440" marT="27432" marB="27432" anchor="ctr">
+                    <a:solidFill>
+                      <a:srgbClr val="F7F5F1"/>
+                    </a:solidFill>
+                  </a:tcPr>
+                </a:tc>
+                <a:tc>
+                  <a:txBody>
+                    <a:bodyPr wrap="square"/>
+                    <a:lstStyle/>
+                    <a:p>
+                      <a:pPr algn="ctr"/>
+                      <a:r>
+                        <a:rPr sz="1400" b="0">
+                          <a:solidFill>
+                            <a:srgbClr val="1A1F24"/>
+                          </a:solidFill>
+                          <a:latin typeface="Arial"/>
+                        </a:rPr>
+                        <a:t>both printed, same row</a:t>
+                      </a:r>
+                    </a:p>
+                  </a:txBody>
+                  <a:tcPr marL="91440" marR="91440" marT="27432" marB="27432" anchor="ctr">
+                    <a:solidFill>
+                      <a:srgbClr val="F7F5F1"/>
+                    </a:solidFill>
+                  </a:tcPr>
+                </a:tc>
+              </a:tr>
+              <a:tr h="384048">
+                <a:tc>
+                  <a:txBody>
+                    <a:bodyPr wrap="square"/>
+                    <a:lstStyle/>
+                    <a:p>
+                      <a:pPr algn="l"/>
+                      <a:r>
+                        <a:rPr sz="1400" b="1">
+                          <a:solidFill>
+                            <a:srgbClr val="1A1F24"/>
+                          </a:solidFill>
+                          <a:latin typeface="Arial"/>
+                        </a:rPr>
+                        <a:t>Drift, × 20 °C</a:t>
+                      </a:r>
+                    </a:p>
+                  </a:txBody>
+                  <a:tcPr marL="91440" marR="91440" marT="27432" marB="27432" anchor="ctr">
+                    <a:solidFill>
+                      <a:srgbClr val="FFFFFF"/>
+                    </a:solidFill>
+                  </a:tcPr>
+                </a:tc>
+                <a:tc>
+                  <a:txBody>
+                    <a:bodyPr wrap="square"/>
+                    <a:lstStyle/>
+                    <a:p>
+                      <a:pPr algn="ctr"/>
+                      <a:r>
+                        <a:rPr sz="1400" b="0">
+                          <a:solidFill>
+                            <a:srgbClr val="1A1F24"/>
+                          </a:solidFill>
+                          <a:latin typeface="Courier New"/>
+                        </a:rPr>
+                        <a:t>2.000</a:t>
+                      </a:r>
+                    </a:p>
+                  </a:txBody>
+                  <a:tcPr marL="91440" marR="91440" marT="27432" marB="27432" anchor="ctr">
+                    <a:solidFill>
+                      <a:srgbClr val="FFFFFF"/>
+                    </a:solidFill>
+                  </a:tcPr>
+                </a:tc>
+                <a:tc>
+                  <a:txBody>
+                    <a:bodyPr wrap="square"/>
+                    <a:lstStyle/>
+                    <a:p>
+                      <a:pPr algn="ctr"/>
+                      <a:r>
+                        <a:rPr sz="1400" b="0">
+                          <a:solidFill>
+                            <a:srgbClr val="1A1F24"/>
+                          </a:solidFill>
+                          <a:latin typeface="Courier New"/>
+                        </a:rPr>
+                        <a:t>10.000</a:t>
+                      </a:r>
+                    </a:p>
+                  </a:txBody>
+                  <a:tcPr marL="91440" marR="91440" marT="27432" marB="27432" anchor="ctr">
+                    <a:solidFill>
+                      <a:srgbClr val="FFFFFF"/>
+                    </a:solidFill>
+                  </a:tcPr>
+                </a:tc>
+                <a:tc>
+                  <a:txBody>
+                    <a:bodyPr wrap="square"/>
+                    <a:lstStyle/>
+                    <a:p>
+                      <a:pPr algn="ctr"/>
+                      <a:r>
+                        <a:rPr sz="1400" b="0">
+                          <a:solidFill>
+                            <a:srgbClr val="1A1F24"/>
+                          </a:solidFill>
+                          <a:latin typeface="Arial"/>
+                        </a:rPr>
+                        <a:t>0–40 °C, cal at 20 °C</a:t>
+                      </a:r>
+                    </a:p>
+                  </a:txBody>
+                  <a:tcPr marL="91440" marR="91440" marT="27432" marB="27432" anchor="ctr">
+                    <a:solidFill>
+                      <a:srgbClr val="FFFFFF"/>
+                    </a:solidFill>
+                  </a:tcPr>
+                </a:tc>
+              </a:tr>
+              <a:tr h="384048">
+                <a:tc>
+                  <a:txBody>
+                    <a:bodyPr wrap="square"/>
+                    <a:lstStyle/>
+                    <a:p>
+                      <a:pPr algn="l"/>
+                      <a:r>
+                        <a:rPr sz="1400" b="1">
+                          <a:solidFill>
+                            <a:srgbClr val="1A1F24"/>
+                          </a:solidFill>
+                          <a:latin typeface="Arial"/>
+                        </a:rPr>
+                        <a:t>TOTAL (RSS)</a:t>
+                      </a:r>
+                    </a:p>
+                  </a:txBody>
+                  <a:tcPr marL="91440" marR="91440" marT="27432" marB="27432" anchor="ctr">
+                    <a:solidFill>
+                      <a:srgbClr val="F7F5F1"/>
+                    </a:solidFill>
+                  </a:tcPr>
+                </a:tc>
+                <a:tc>
+                  <a:txBody>
+                    <a:bodyPr wrap="square"/>
+                    <a:lstStyle/>
+                    <a:p>
+                      <a:pPr algn="ctr"/>
+                      <a:r>
+                        <a:rPr sz="1400" b="1">
+                          <a:solidFill>
+                            <a:srgbClr val="1A1F24"/>
+                          </a:solidFill>
+                          <a:latin typeface="Courier New"/>
+                        </a:rPr>
+                        <a:t>2.05</a:t>
+                      </a:r>
+                    </a:p>
+                  </a:txBody>
+                  <a:tcPr marL="91440" marR="91440" marT="27432" marB="27432" anchor="ctr">
+                    <a:solidFill>
+                      <a:srgbClr val="DCEDEF"/>
+                    </a:solidFill>
+                  </a:tcPr>
+                </a:tc>
+                <a:tc>
+                  <a:txBody>
+                    <a:bodyPr wrap="square"/>
+                    <a:lstStyle/>
+                    <a:p>
+                      <a:pPr algn="ctr"/>
+                      <a:r>
+                        <a:rPr sz="1400" b="1">
+                          <a:solidFill>
+                            <a:srgbClr val="1A1F24"/>
+                          </a:solidFill>
+                          <a:latin typeface="Courier New"/>
+                        </a:rPr>
+                        <a:t>10.02</a:t>
+                      </a:r>
+                    </a:p>
+                  </a:txBody>
+                  <a:tcPr marL="91440" marR="91440" marT="27432" marB="27432" anchor="ctr">
+                    <a:solidFill>
+                      <a:srgbClr val="F7DFDC"/>
+                    </a:solidFill>
+                  </a:tcPr>
+                </a:tc>
+                <a:tc>
+                  <a:txBody>
+                    <a:bodyPr wrap="square"/>
+                    <a:lstStyle/>
+                    <a:p>
+                      <a:pPr algn="ctr"/>
+                      <a:r>
+                        <a:rPr sz="1400" b="0">
+                          <a:solidFill>
+                            <a:srgbClr val="1A1F24"/>
+                          </a:solidFill>
+                          <a:latin typeface="Arial"/>
+                        </a:rPr>
+                        <a:t>√(sum of squares)</a:t>
+                      </a:r>
+                    </a:p>
+                  </a:txBody>
+                  <a:tcPr marL="91440" marR="91440" marT="27432" marB="27432" anchor="ctr">
+                    <a:solidFill>
+                      <a:srgbClr val="F7F5F1"/>
+                    </a:solidFill>
+                  </a:tcPr>
+                </a:tc>
+              </a:tr>
+              <a:tr h="384048">
+                <a:tc>
+                  <a:txBody>
+                    <a:bodyPr wrap="square"/>
+                    <a:lstStyle/>
+                    <a:p>
+                      <a:pPr algn="l"/>
+                      <a:r>
+                        <a:rPr sz="1400" b="1">
+                          <a:solidFill>
+                            <a:srgbClr val="1A1F24"/>
+                          </a:solidFill>
+                          <a:latin typeface="Arial"/>
+                        </a:rPr>
+                        <a:t>AS A TILT ANGLE</a:t>
+                      </a:r>
+                    </a:p>
+                  </a:txBody>
+                  <a:tcPr marL="91440" marR="91440" marT="27432" marB="27432" anchor="ctr">
+                    <a:solidFill>
+                      <a:srgbClr val="FFFFFF"/>
+                    </a:solidFill>
+                  </a:tcPr>
+                </a:tc>
+                <a:tc>
+                  <a:txBody>
+                    <a:bodyPr wrap="square"/>
+                    <a:lstStyle/>
+                    <a:p>
+                      <a:pPr algn="ctr"/>
+                      <a:r>
+                        <a:rPr sz="1400" b="1">
+                          <a:solidFill>
+                            <a:srgbClr val="1A1F24"/>
+                          </a:solidFill>
+                          <a:latin typeface="Courier New"/>
+                        </a:rPr>
+                        <a:t>0.117°</a:t>
+                      </a:r>
+                    </a:p>
+                  </a:txBody>
+                  <a:tcPr marL="91440" marR="91440" marT="27432" marB="27432" anchor="ctr">
+                    <a:solidFill>
+                      <a:srgbClr val="DCEDEF"/>
+                    </a:solidFill>
+                  </a:tcPr>
+                </a:tc>
+                <a:tc>
+                  <a:txBody>
+                    <a:bodyPr wrap="square"/>
+                    <a:lstStyle/>
+                    <a:p>
+                      <a:pPr algn="ctr"/>
+                      <a:r>
+                        <a:rPr sz="1400" b="1">
+                          <a:solidFill>
+                            <a:srgbClr val="1A1F24"/>
+                          </a:solidFill>
+                          <a:latin typeface="Courier New"/>
+                        </a:rPr>
+                        <a:t>0.574°</a:t>
+                      </a:r>
+                    </a:p>
+                  </a:txBody>
+                  <a:tcPr marL="91440" marR="91440" marT="27432" marB="27432" anchor="ctr">
+                    <a:solidFill>
+                      <a:srgbClr val="F7DFDC"/>
+                    </a:solidFill>
+                  </a:tcPr>
+                </a:tc>
+                <a:tc>
+                  <a:txBody>
+                    <a:bodyPr wrap="square"/>
+                    <a:lstStyle/>
+                    <a:p>
+                      <a:pPr algn="ctr"/>
+                      <a:r>
+                        <a:rPr sz="1400" b="0">
+                          <a:solidFill>
+                            <a:srgbClr val="1A1F24"/>
+                          </a:solidFill>
+                          <a:latin typeface="Arial"/>
+                        </a:rPr>
+                        <a:t>asin(mg/1000)</a:t>
+                      </a:r>
+                    </a:p>
+                  </a:txBody>
+                  <a:tcPr marL="91440" marR="91440" marT="27432" marB="27432" anchor="ctr">
+                    <a:solidFill>
+                      <a:srgbClr val="FFFFFF"/>
+                    </a:solidFill>
+                  </a:tcPr>
+                </a:tc>
+              </a:tr>
+              <a:tr h="384048">
+                <a:tc>
+                  <a:txBody>
+                    <a:bodyPr wrap="square"/>
+                    <a:lstStyle/>
+                    <a:p>
+                      <a:pPr algn="l"/>
+                      <a:r>
+                        <a:rPr sz="1400" b="1">
+                          <a:solidFill>
+                            <a:srgbClr val="1A1F24"/>
+                          </a:solidFill>
+                          <a:latin typeface="Arial"/>
+                        </a:rPr>
+                        <a:t>AGAINST ±0.5°</a:t>
+                      </a:r>
+                    </a:p>
+                  </a:txBody>
+                  <a:tcPr marL="91440" marR="91440" marT="27432" marB="27432" anchor="ctr">
+                    <a:solidFill>
+                      <a:srgbClr val="F7F5F1"/>
+                    </a:solidFill>
+                  </a:tcPr>
+                </a:tc>
+                <a:tc>
+                  <a:txBody>
+                    <a:bodyPr wrap="square"/>
+                    <a:lstStyle/>
+                    <a:p>
+                      <a:pPr algn="ctr"/>
+                      <a:r>
+                        <a:rPr sz="1400" b="1">
+                          <a:solidFill>
+                            <a:srgbClr val="1A1F24"/>
+                          </a:solidFill>
+                          <a:latin typeface="Courier New"/>
+                        </a:rPr>
+                        <a:t>passes, 4× margin</a:t>
+                      </a:r>
+                    </a:p>
+                  </a:txBody>
+                  <a:tcPr marL="91440" marR="91440" marT="27432" marB="27432" anchor="ctr">
+                    <a:solidFill>
+                      <a:srgbClr val="DCEDEF"/>
+                    </a:solidFill>
+                  </a:tcPr>
+                </a:tc>
+                <a:tc>
+                  <a:txBody>
+                    <a:bodyPr wrap="square"/>
+                    <a:lstStyle/>
+                    <a:p>
+                      <a:pPr algn="ctr"/>
+                      <a:r>
+                        <a:rPr sz="1400" b="1">
+                          <a:solidFill>
+                            <a:srgbClr val="1A1F24"/>
+                          </a:solidFill>
+                          <a:latin typeface="Courier New"/>
+                        </a:rPr>
+                        <a:t>FAILS</a:t>
+                      </a:r>
+                    </a:p>
+                  </a:txBody>
+                  <a:tcPr marL="91440" marR="91440" marT="27432" marB="27432" anchor="ctr">
+                    <a:solidFill>
+                      <a:srgbClr val="F7DFDC"/>
+                    </a:solidFill>
+                  </a:tcPr>
+                </a:tc>
+                <a:tc>
+                  <a:txBody>
+                    <a:bodyPr wrap="square"/>
+                    <a:lstStyle/>
+                    <a:p>
+                      <a:pPr algn="ctr"/>
+                      <a:r>
+                        <a:rPr sz="1400" b="0">
+                          <a:solidFill>
+                            <a:srgbClr val="1A1F24"/>
+                          </a:solidFill>
+                          <a:latin typeface="Arial"/>
+                        </a:rPr>
+                        <a:t>the requirement</a:t>
+                      </a:r>
+                    </a:p>
+                  </a:txBody>
+                  <a:tcPr marL="91440" marR="91440" marT="27432" marB="27432" anchor="ctr">
+                    <a:solidFill>
+                      <a:srgbClr val="F7F5F1"/>
+                    </a:solidFill>
+                  </a:tcPr>
+                </a:tc>
+              </a:tr>
+            </a:tbl>
+          </a:graphicData>
+        </a:graphic>
+      </p:graphicFrame>
+      <p:sp>
+        <p:nvSpPr>
+          <p:cNvPr id="9" name="Rounded Rectangle 8"/>
           <p:cNvSpPr/>
           <p:nvPr/>
         </p:nvSpPr>
         <p:spPr>
           <a:xfrm>
-            <a:off x="658368" y="2862072"/>
-            <a:ext cx="10874959" cy="658368"/>
+            <a:off x="658368" y="5504688"/>
+            <a:ext cx="10874959" cy="713232"/>
           </a:xfrm>
           <a:prstGeom prst="roundRect">
             <a:avLst>
@@ -18195,11 +19154,11 @@
             </a:avLst>
           </a:prstGeom>
           <a:solidFill>
-            <a:srgbClr val="DCEDEF"/>
+            <a:srgbClr val="1A1F24"/>
           </a:solidFill>
-          <a:ln w="31750">
+          <a:ln w="15875">
             <a:solidFill>
-              <a:srgbClr val="0E7C86"/>
+              <a:srgbClr val="1A1F24"/>
             </a:solidFill>
           </a:ln>
           <a:effectLst/>
@@ -18224,249 +19183,13 @@
           <a:p>
             <a:pPr algn="ctr"/>
             <a:r>
-              <a:rPr sz="1500" b="0">
-                <a:solidFill>
-                  <a:srgbClr val="1A1F24"/>
-                </a:solidFill>
-                <a:latin typeface="Arial"/>
-              </a:rPr>
-              <a:t/>
-            </a:r>
-          </a:p>
-        </p:txBody>
-      </p:sp>
-      <p:sp>
-        <p:nvSpPr>
-          <p:cNvPr id="11" name="TextBox 10"/>
-          <p:cNvSpPr txBox="1"/>
-          <p:nvPr/>
-        </p:nvSpPr>
-        <p:spPr>
-          <a:xfrm>
-            <a:off x="859536" y="2980944"/>
-            <a:ext cx="457200" cy="658368"/>
-          </a:xfrm>
-          <a:prstGeom prst="rect">
-            <a:avLst/>
-          </a:prstGeom>
-          <a:noFill/>
-        </p:spPr>
-        <p:txBody>
-          <a:bodyPr wrap="square" lIns="0" rIns="0" tIns="0" bIns="0" anchor="t">
-            <a:spAutoFit/>
-          </a:bodyPr>
-          <a:lstStyle/>
-          <a:p>
-            <a:pPr algn="l"/>
-            <a:r>
-              <a:rPr sz="2000" b="1" i="0">
-                <a:solidFill>
-                  <a:srgbClr val="0E7C86"/>
-                </a:solidFill>
-                <a:latin typeface="Arial"/>
-              </a:rPr>
-              <a:t>B</a:t>
-            </a:r>
-          </a:p>
-        </p:txBody>
-      </p:sp>
-      <p:sp>
-        <p:nvSpPr>
-          <p:cNvPr id="12" name="TextBox 11"/>
-          <p:cNvSpPr txBox="1"/>
-          <p:nvPr/>
-        </p:nvSpPr>
-        <p:spPr>
-          <a:xfrm>
-            <a:off x="1371600" y="2990088"/>
-            <a:ext cx="9869119" cy="658368"/>
-          </a:xfrm>
-          <a:prstGeom prst="rect">
-            <a:avLst/>
-          </a:prstGeom>
-          <a:noFill/>
-        </p:spPr>
-        <p:txBody>
-          <a:bodyPr wrap="square" lIns="0" rIns="0" tIns="0" bIns="0" anchor="t">
-            <a:spAutoFit/>
-          </a:bodyPr>
-          <a:lstStyle/>
-          <a:p>
-            <a:pPr algn="l"/>
-            <a:r>
-              <a:rPr sz="1800" b="1" i="0">
-                <a:solidFill>
-                  <a:srgbClr val="1A1F24"/>
-                </a:solidFill>
-                <a:latin typeface="Arial"/>
-              </a:rPr>
-              <a:t>Part B</a:t>
-            </a:r>
-          </a:p>
-        </p:txBody>
-      </p:sp>
-      <p:sp>
-        <p:nvSpPr>
-          <p:cNvPr id="13" name="Rounded Rectangle 12"/>
-          <p:cNvSpPr/>
-          <p:nvPr/>
-        </p:nvSpPr>
-        <p:spPr>
-          <a:xfrm>
-            <a:off x="658368" y="3666744"/>
-            <a:ext cx="10874959" cy="658368"/>
-          </a:xfrm>
-          <a:prstGeom prst="roundRect">
-            <a:avLst>
-              <a:gd name="adj" fmla="val 10000"/>
-            </a:avLst>
-          </a:prstGeom>
-          <a:solidFill>
-            <a:srgbClr val="FFFFFF"/>
-          </a:solidFill>
-          <a:ln w="15875">
-            <a:solidFill>
-              <a:srgbClr val="E4E2DE"/>
-            </a:solidFill>
-          </a:ln>
-          <a:effectLst/>
-        </p:spPr>
-        <p:style>
-          <a:lnRef idx="1">
-            <a:schemeClr val="accent1"/>
-          </a:lnRef>
-          <a:fillRef idx="3">
-            <a:schemeClr val="accent1"/>
-          </a:fillRef>
-          <a:effectRef idx="2">
-            <a:schemeClr val="accent1"/>
-          </a:effectRef>
-          <a:fontRef idx="minor">
-            <a:schemeClr val="lt1"/>
-          </a:fontRef>
-        </p:style>
-        <p:txBody>
-          <a:bodyPr rtlCol="0" anchor="ctr" wrap="square" lIns="54864" rIns="54864" tIns="27432" bIns="27432"/>
-          <a:lstStyle/>
-          <a:p>
-            <a:pPr algn="ctr"/>
-            <a:r>
-              <a:rPr sz="1500" b="0">
-                <a:solidFill>
-                  <a:srgbClr val="1A1F24"/>
-                </a:solidFill>
-                <a:latin typeface="Arial"/>
-              </a:rPr>
-              <a:t/>
-            </a:r>
-          </a:p>
-        </p:txBody>
-      </p:sp>
-      <p:sp>
-        <p:nvSpPr>
-          <p:cNvPr id="14" name="TextBox 13"/>
-          <p:cNvSpPr txBox="1"/>
-          <p:nvPr/>
-        </p:nvSpPr>
-        <p:spPr>
-          <a:xfrm>
-            <a:off x="859536" y="3785616"/>
-            <a:ext cx="457200" cy="658368"/>
-          </a:xfrm>
-          <a:prstGeom prst="rect">
-            <a:avLst/>
-          </a:prstGeom>
-          <a:noFill/>
-        </p:spPr>
-        <p:txBody>
-          <a:bodyPr wrap="square" lIns="0" rIns="0" tIns="0" bIns="0" anchor="t">
-            <a:spAutoFit/>
-          </a:bodyPr>
-          <a:lstStyle/>
-          <a:p>
-            <a:pPr algn="l"/>
-            <a:r>
-              <a:rPr sz="2000" b="1" i="0">
-                <a:solidFill>
-                  <a:srgbClr val="6B7680"/>
-                </a:solidFill>
-                <a:latin typeface="Arial"/>
-              </a:rPr>
-              <a:t>C</a:t>
-            </a:r>
-          </a:p>
-        </p:txBody>
-      </p:sp>
-      <p:sp>
-        <p:nvSpPr>
-          <p:cNvPr id="15" name="TextBox 14"/>
-          <p:cNvSpPr txBox="1"/>
-          <p:nvPr/>
-        </p:nvSpPr>
-        <p:spPr>
-          <a:xfrm>
-            <a:off x="1371600" y="3794760"/>
-            <a:ext cx="9869119" cy="658368"/>
-          </a:xfrm>
-          <a:prstGeom prst="rect">
-            <a:avLst/>
-          </a:prstGeom>
-          <a:noFill/>
-        </p:spPr>
-        <p:txBody>
-          <a:bodyPr wrap="square" lIns="0" rIns="0" tIns="0" bIns="0" anchor="t">
-            <a:spAutoFit/>
-          </a:bodyPr>
-          <a:lstStyle/>
-          <a:p>
-            <a:pPr algn="l"/>
-            <a:r>
-              <a:rPr sz="1800" b="0" i="0">
-                <a:solidFill>
-                  <a:srgbClr val="1A1F24"/>
-                </a:solidFill>
-                <a:latin typeface="Arial"/>
-              </a:rPr>
-              <a:t>This cannot be decided from front pages alone</a:t>
-            </a:r>
-          </a:p>
-        </p:txBody>
-      </p:sp>
-      <p:sp>
-        <p:nvSpPr>
-          <p:cNvPr id="16" name="TextBox 15"/>
-          <p:cNvSpPr txBox="1"/>
-          <p:nvPr/>
-        </p:nvSpPr>
-        <p:spPr>
-          <a:xfrm>
-            <a:off x="658368" y="5541264"/>
-            <a:ext cx="10874959" cy="713232"/>
-          </a:xfrm>
-          <a:prstGeom prst="rect">
-            <a:avLst/>
-          </a:prstGeom>
-          <a:noFill/>
-        </p:spPr>
-        <p:txBody>
-          <a:bodyPr wrap="square" lIns="0" rIns="0" tIns="0" bIns="0" anchor="t">
-            <a:spAutoFit/>
-          </a:bodyPr>
-          <a:lstStyle/>
-          <a:p>
-            <a:pPr algn="l">
-              <a:lnSpc>
-                <a:spcPct val="125000"/>
-              </a:lnSpc>
-            </a:pPr>
-            <a:r>
-              <a:rPr sz="1500" b="0" i="1">
-                <a:solidFill>
-                  <a:srgbClr val="0E7C86"/>
-                </a:solidFill>
-                <a:latin typeface="Arial"/>
-              </a:rPr>
-              <a:t>The right FIRST answer was C — you did not have enough information. The right SECOND answer, after twelve minutes of arithmetic, is B.</a:t>
+              <a:rPr sz="2100" b="1">
+                <a:solidFill>
+                  <a:srgbClr val="F7F5F1"/>
+                </a:solidFill>
+                <a:latin typeface="Arial"/>
+              </a:rPr>
+              <a:t>One part number. One datasheet. Two columns — and the requirement sits between them.</a:t>
             </a:r>
           </a:p>
         </p:txBody>
@@ -18504,7 +19227,7 @@
             <a:avLst/>
           </a:prstGeom>
           <a:solidFill>
-            <a:srgbClr val="1A1F24"/>
+            <a:srgbClr val="F7F5F1"/>
           </a:solidFill>
           <a:ln>
             <a:noFill/>
@@ -18559,7 +19282,7 @@
             <a:r>
               <a:rPr sz="1100" b="0" i="0">
                 <a:solidFill>
-                  <a:srgbClr val="7A848C"/>
+                  <a:srgbClr val="6B7680"/>
                 </a:solidFill>
                 <a:latin typeface="Arial"/>
               </a:rPr>
@@ -18594,7 +19317,7 @@
             <a:r>
               <a:rPr sz="1100" b="0" i="0">
                 <a:solidFill>
-                  <a:srgbClr val="7A848C"/>
+                  <a:srgbClr val="6B7680"/>
                 </a:solidFill>
                 <a:latin typeface="Arial"/>
               </a:rPr>
@@ -18629,11 +19352,11 @@
             <a:r>
               <a:rPr sz="1200" b="1" i="0">
                 <a:solidFill>
-                  <a:srgbClr val="C0392B"/>
-                </a:solidFill>
-                <a:latin typeface="Arial"/>
-              </a:rPr>
-              <a:t>THE VERDICT</a:t>
+                  <a:srgbClr val="0E7C86"/>
+                </a:solidFill>
+                <a:latin typeface="Arial"/>
+              </a:rPr>
+              <a:t>POLL 1   ·   MINUTE 70   ·   ANSWER</a:t>
             </a:r>
           </a:p>
         </p:txBody>
@@ -18646,8 +19369,8 @@
         </p:nvSpPr>
         <p:spPr>
           <a:xfrm>
-            <a:off x="658368" y="1965960"/>
-            <a:ext cx="10874959" cy="2377440"/>
+            <a:off x="658368" y="658368"/>
+            <a:ext cx="10874959" cy="1325880"/>
           </a:xfrm>
           <a:prstGeom prst="rect">
             <a:avLst/>
@@ -18662,56 +19385,44 @@
           <a:p>
             <a:pPr algn="l">
               <a:lnSpc>
-                <a:spcPct val="118000"/>
+                <a:spcPct val="120000"/>
               </a:lnSpc>
             </a:pPr>
             <a:r>
-              <a:rPr sz="3400" b="1" i="0">
-                <a:solidFill>
-                  <a:srgbClr val="F7F5F1"/>
-                </a:solidFill>
-                <a:latin typeface="Arial"/>
-              </a:rPr>
-              <a:t>Part A resolves eight times finer</a:t>
-            </a:r>
-          </a:p>
-          <a:p>
-            <a:pPr algn="l">
-              <a:lnSpc>
-                <a:spcPct val="118000"/>
-              </a:lnSpc>
-            </a:pPr>
-            <a:r>
-              <a:rPr sz="3400" b="1" i="0">
-                <a:solidFill>
-                  <a:srgbClr val="F7F5F1"/>
-                </a:solidFill>
-                <a:latin typeface="Arial"/>
-              </a:rPr>
-              <a:t>than Part B — and cannot do the job.</a:t>
-            </a:r>
-          </a:p>
-        </p:txBody>
-      </p:sp>
-      <p:sp>
-        <p:nvSpPr>
-          <p:cNvPr id="7" name="Rectangle 6"/>
+              <a:rPr sz="2600" b="1" i="0">
+                <a:solidFill>
+                  <a:srgbClr val="1A1F24"/>
+                </a:solidFill>
+                <a:latin typeface="Arial"/>
+              </a:rPr>
+              <a:t>Which part do you specify for a ±0.5° tilt measurement?</a:t>
+            </a:r>
+          </a:p>
+        </p:txBody>
+      </p:sp>
+      <p:sp>
+        <p:nvSpPr>
+          <p:cNvPr id="7" name="Rounded Rectangle 6"/>
           <p:cNvSpPr/>
           <p:nvPr/>
         </p:nvSpPr>
         <p:spPr>
           <a:xfrm>
-            <a:off x="658368" y="4617720"/>
-            <a:ext cx="1371600" cy="50800"/>
-          </a:xfrm>
-          <a:prstGeom prst="rect">
-            <a:avLst/>
+            <a:off x="658368" y="2057400"/>
+            <a:ext cx="10874959" cy="658368"/>
+          </a:xfrm>
+          <a:prstGeom prst="roundRect">
+            <a:avLst>
+              <a:gd name="adj" fmla="val 10000"/>
+            </a:avLst>
           </a:prstGeom>
           <a:solidFill>
-            <a:srgbClr val="C0392B"/>
+            <a:srgbClr val="FFFFFF"/>
           </a:solidFill>
-          <a:ln>
-            <a:noFill/>
+          <a:ln w="15875">
+            <a:solidFill>
+              <a:srgbClr val="E4E2DE"/>
+            </a:solidFill>
           </a:ln>
           <a:effectLst/>
         </p:spPr>
@@ -18730,10 +19441,19 @@
           </a:fontRef>
         </p:style>
         <p:txBody>
-          <a:bodyPr rtlCol="0" anchor="ctr"/>
+          <a:bodyPr rtlCol="0" anchor="ctr" wrap="square" lIns="54864" rIns="54864" tIns="27432" bIns="27432"/>
           <a:lstStyle/>
           <a:p>
             <a:pPr algn="ctr"/>
+            <a:r>
+              <a:rPr sz="1500" b="0">
+                <a:solidFill>
+                  <a:srgbClr val="1A1F24"/>
+                </a:solidFill>
+                <a:latin typeface="Arial"/>
+              </a:rPr>
+              <a:t/>
+            </a:r>
           </a:p>
         </p:txBody>
       </p:sp>
@@ -18745,8 +19465,8 @@
         </p:nvSpPr>
         <p:spPr>
           <a:xfrm>
-            <a:off x="658368" y="4892040"/>
-            <a:ext cx="9960559" cy="1097280"/>
+            <a:off x="859536" y="2176272"/>
+            <a:ext cx="457200" cy="658368"/>
           </a:xfrm>
           <a:prstGeom prst="rect">
             <a:avLst/>
@@ -18759,19 +19479,343 @@
           </a:bodyPr>
           <a:lstStyle/>
           <a:p>
+            <a:pPr algn="l"/>
+            <a:r>
+              <a:rPr sz="2000" b="1" i="0">
+                <a:solidFill>
+                  <a:srgbClr val="6B7680"/>
+                </a:solidFill>
+                <a:latin typeface="Arial"/>
+              </a:rPr>
+              <a:t>A</a:t>
+            </a:r>
+          </a:p>
+        </p:txBody>
+      </p:sp>
+      <p:sp>
+        <p:nvSpPr>
+          <p:cNvPr id="9" name="TextBox 8"/>
+          <p:cNvSpPr txBox="1"/>
+          <p:nvPr/>
+        </p:nvSpPr>
+        <p:spPr>
+          <a:xfrm>
+            <a:off x="1371600" y="2185416"/>
+            <a:ext cx="9869119" cy="658368"/>
+          </a:xfrm>
+          <a:prstGeom prst="rect">
+            <a:avLst/>
+          </a:prstGeom>
+          <a:noFill/>
+        </p:spPr>
+        <p:txBody>
+          <a:bodyPr wrap="square" lIns="0" rIns="0" tIns="0" bIns="0" anchor="t">
+            <a:spAutoFit/>
+          </a:bodyPr>
+          <a:lstStyle/>
+          <a:p>
+            <a:pPr algn="l"/>
+            <a:r>
+              <a:rPr sz="1800" b="0" i="0">
+                <a:solidFill>
+                  <a:srgbClr val="1A1F24"/>
+                </a:solidFill>
+                <a:latin typeface="Arial"/>
+              </a:rPr>
+              <a:t>Part A — eight times finer resolution, and cheaper</a:t>
+            </a:r>
+          </a:p>
+        </p:txBody>
+      </p:sp>
+      <p:sp>
+        <p:nvSpPr>
+          <p:cNvPr id="10" name="Rounded Rectangle 9"/>
+          <p:cNvSpPr/>
+          <p:nvPr/>
+        </p:nvSpPr>
+        <p:spPr>
+          <a:xfrm>
+            <a:off x="658368" y="2862072"/>
+            <a:ext cx="10874959" cy="658368"/>
+          </a:xfrm>
+          <a:prstGeom prst="roundRect">
+            <a:avLst>
+              <a:gd name="adj" fmla="val 10000"/>
+            </a:avLst>
+          </a:prstGeom>
+          <a:solidFill>
+            <a:srgbClr val="DCEDEF"/>
+          </a:solidFill>
+          <a:ln w="31750">
+            <a:solidFill>
+              <a:srgbClr val="0E7C86"/>
+            </a:solidFill>
+          </a:ln>
+          <a:effectLst/>
+        </p:spPr>
+        <p:style>
+          <a:lnRef idx="1">
+            <a:schemeClr val="accent1"/>
+          </a:lnRef>
+          <a:fillRef idx="3">
+            <a:schemeClr val="accent1"/>
+          </a:fillRef>
+          <a:effectRef idx="2">
+            <a:schemeClr val="accent1"/>
+          </a:effectRef>
+          <a:fontRef idx="minor">
+            <a:schemeClr val="lt1"/>
+          </a:fontRef>
+        </p:style>
+        <p:txBody>
+          <a:bodyPr rtlCol="0" anchor="ctr" wrap="square" lIns="54864" rIns="54864" tIns="27432" bIns="27432"/>
+          <a:lstStyle/>
+          <a:p>
+            <a:pPr algn="ctr"/>
+            <a:r>
+              <a:rPr sz="1500" b="0">
+                <a:solidFill>
+                  <a:srgbClr val="1A1F24"/>
+                </a:solidFill>
+                <a:latin typeface="Arial"/>
+              </a:rPr>
+              <a:t/>
+            </a:r>
+          </a:p>
+        </p:txBody>
+      </p:sp>
+      <p:sp>
+        <p:nvSpPr>
+          <p:cNvPr id="11" name="TextBox 10"/>
+          <p:cNvSpPr txBox="1"/>
+          <p:nvPr/>
+        </p:nvSpPr>
+        <p:spPr>
+          <a:xfrm>
+            <a:off x="859536" y="2980944"/>
+            <a:ext cx="457200" cy="658368"/>
+          </a:xfrm>
+          <a:prstGeom prst="rect">
+            <a:avLst/>
+          </a:prstGeom>
+          <a:noFill/>
+        </p:spPr>
+        <p:txBody>
+          <a:bodyPr wrap="square" lIns="0" rIns="0" tIns="0" bIns="0" anchor="t">
+            <a:spAutoFit/>
+          </a:bodyPr>
+          <a:lstStyle/>
+          <a:p>
+            <a:pPr algn="l"/>
+            <a:r>
+              <a:rPr sz="2000" b="1" i="0">
+                <a:solidFill>
+                  <a:srgbClr val="0E7C86"/>
+                </a:solidFill>
+                <a:latin typeface="Arial"/>
+              </a:rPr>
+              <a:t>B</a:t>
+            </a:r>
+          </a:p>
+        </p:txBody>
+      </p:sp>
+      <p:sp>
+        <p:nvSpPr>
+          <p:cNvPr id="12" name="TextBox 11"/>
+          <p:cNvSpPr txBox="1"/>
+          <p:nvPr/>
+        </p:nvSpPr>
+        <p:spPr>
+          <a:xfrm>
+            <a:off x="1371600" y="2990088"/>
+            <a:ext cx="9869119" cy="658368"/>
+          </a:xfrm>
+          <a:prstGeom prst="rect">
+            <a:avLst/>
+          </a:prstGeom>
+          <a:noFill/>
+        </p:spPr>
+        <p:txBody>
+          <a:bodyPr wrap="square" lIns="0" rIns="0" tIns="0" bIns="0" anchor="t">
+            <a:spAutoFit/>
+          </a:bodyPr>
+          <a:lstStyle/>
+          <a:p>
+            <a:pPr algn="l"/>
+            <a:r>
+              <a:rPr sz="1800" b="1" i="0">
+                <a:solidFill>
+                  <a:srgbClr val="1A1F24"/>
+                </a:solidFill>
+                <a:latin typeface="Arial"/>
+              </a:rPr>
+              <a:t>Part B</a:t>
+            </a:r>
+          </a:p>
+        </p:txBody>
+      </p:sp>
+      <p:sp>
+        <p:nvSpPr>
+          <p:cNvPr id="13" name="Rounded Rectangle 12"/>
+          <p:cNvSpPr/>
+          <p:nvPr/>
+        </p:nvSpPr>
+        <p:spPr>
+          <a:xfrm>
+            <a:off x="658368" y="3666744"/>
+            <a:ext cx="10874959" cy="658368"/>
+          </a:xfrm>
+          <a:prstGeom prst="roundRect">
+            <a:avLst>
+              <a:gd name="adj" fmla="val 10000"/>
+            </a:avLst>
+          </a:prstGeom>
+          <a:solidFill>
+            <a:srgbClr val="FFFFFF"/>
+          </a:solidFill>
+          <a:ln w="15875">
+            <a:solidFill>
+              <a:srgbClr val="E4E2DE"/>
+            </a:solidFill>
+          </a:ln>
+          <a:effectLst/>
+        </p:spPr>
+        <p:style>
+          <a:lnRef idx="1">
+            <a:schemeClr val="accent1"/>
+          </a:lnRef>
+          <a:fillRef idx="3">
+            <a:schemeClr val="accent1"/>
+          </a:fillRef>
+          <a:effectRef idx="2">
+            <a:schemeClr val="accent1"/>
+          </a:effectRef>
+          <a:fontRef idx="minor">
+            <a:schemeClr val="lt1"/>
+          </a:fontRef>
+        </p:style>
+        <p:txBody>
+          <a:bodyPr rtlCol="0" anchor="ctr" wrap="square" lIns="54864" rIns="54864" tIns="27432" bIns="27432"/>
+          <a:lstStyle/>
+          <a:p>
+            <a:pPr algn="ctr"/>
+            <a:r>
+              <a:rPr sz="1500" b="0">
+                <a:solidFill>
+                  <a:srgbClr val="1A1F24"/>
+                </a:solidFill>
+                <a:latin typeface="Arial"/>
+              </a:rPr>
+              <a:t/>
+            </a:r>
+          </a:p>
+        </p:txBody>
+      </p:sp>
+      <p:sp>
+        <p:nvSpPr>
+          <p:cNvPr id="14" name="TextBox 13"/>
+          <p:cNvSpPr txBox="1"/>
+          <p:nvPr/>
+        </p:nvSpPr>
+        <p:spPr>
+          <a:xfrm>
+            <a:off x="859536" y="3785616"/>
+            <a:ext cx="457200" cy="658368"/>
+          </a:xfrm>
+          <a:prstGeom prst="rect">
+            <a:avLst/>
+          </a:prstGeom>
+          <a:noFill/>
+        </p:spPr>
+        <p:txBody>
+          <a:bodyPr wrap="square" lIns="0" rIns="0" tIns="0" bIns="0" anchor="t">
+            <a:spAutoFit/>
+          </a:bodyPr>
+          <a:lstStyle/>
+          <a:p>
+            <a:pPr algn="l"/>
+            <a:r>
+              <a:rPr sz="2000" b="1" i="0">
+                <a:solidFill>
+                  <a:srgbClr val="6B7680"/>
+                </a:solidFill>
+                <a:latin typeface="Arial"/>
+              </a:rPr>
+              <a:t>C</a:t>
+            </a:r>
+          </a:p>
+        </p:txBody>
+      </p:sp>
+      <p:sp>
+        <p:nvSpPr>
+          <p:cNvPr id="15" name="TextBox 14"/>
+          <p:cNvSpPr txBox="1"/>
+          <p:nvPr/>
+        </p:nvSpPr>
+        <p:spPr>
+          <a:xfrm>
+            <a:off x="1371600" y="3794760"/>
+            <a:ext cx="9869119" cy="658368"/>
+          </a:xfrm>
+          <a:prstGeom prst="rect">
+            <a:avLst/>
+          </a:prstGeom>
+          <a:noFill/>
+        </p:spPr>
+        <p:txBody>
+          <a:bodyPr wrap="square" lIns="0" rIns="0" tIns="0" bIns="0" anchor="t">
+            <a:spAutoFit/>
+          </a:bodyPr>
+          <a:lstStyle/>
+          <a:p>
+            <a:pPr algn="l"/>
+            <a:r>
+              <a:rPr sz="1800" b="0" i="0">
+                <a:solidFill>
+                  <a:srgbClr val="1A1F24"/>
+                </a:solidFill>
+                <a:latin typeface="Arial"/>
+              </a:rPr>
+              <a:t>This cannot be decided from front pages alone</a:t>
+            </a:r>
+          </a:p>
+        </p:txBody>
+      </p:sp>
+      <p:sp>
+        <p:nvSpPr>
+          <p:cNvPr id="16" name="TextBox 15"/>
+          <p:cNvSpPr txBox="1"/>
+          <p:nvPr/>
+        </p:nvSpPr>
+        <p:spPr>
+          <a:xfrm>
+            <a:off x="658368" y="5541264"/>
+            <a:ext cx="10874959" cy="713232"/>
+          </a:xfrm>
+          <a:prstGeom prst="rect">
+            <a:avLst/>
+          </a:prstGeom>
+          <a:noFill/>
+        </p:spPr>
+        <p:txBody>
+          <a:bodyPr wrap="square" lIns="0" rIns="0" tIns="0" bIns="0" anchor="t">
+            <a:spAutoFit/>
+          </a:bodyPr>
+          <a:lstStyle/>
+          <a:p>
             <a:pPr algn="l">
               <a:lnSpc>
-                <a:spcPct val="130000"/>
+                <a:spcPct val="125000"/>
               </a:lnSpc>
             </a:pPr>
             <a:r>
-              <a:rPr sz="1900" b="0" i="0">
-                <a:solidFill>
-                  <a:srgbClr val="B8C0C6"/>
-                </a:solidFill>
-                <a:latin typeface="Arial"/>
-              </a:rPr>
-              <a:t>Part B resolves 0.028° of tilt: eighteen times finer than the ±0.5° we need. Resolution was never the deciding variable. It only looked like it was, because it was the number on the front page.</a:t>
+              <a:rPr sz="1500" b="0" i="1">
+                <a:solidFill>
+                  <a:srgbClr val="0E7C86"/>
+                </a:solidFill>
+                <a:latin typeface="Arial"/>
+              </a:rPr>
+              <a:t>The right FIRST answer was C — you did not have enough information. The right SECOND answer, after twelve minutes of arithmetic, is B.</a:t>
             </a:r>
           </a:p>
         </p:txBody>
@@ -18809,6 +19853,311 @@
             <a:avLst/>
           </a:prstGeom>
           <a:solidFill>
+            <a:srgbClr val="1A1F24"/>
+          </a:solidFill>
+          <a:ln>
+            <a:noFill/>
+          </a:ln>
+          <a:effectLst/>
+        </p:spPr>
+        <p:style>
+          <a:lnRef idx="1">
+            <a:schemeClr val="accent1"/>
+          </a:lnRef>
+          <a:fillRef idx="3">
+            <a:schemeClr val="accent1"/>
+          </a:fillRef>
+          <a:effectRef idx="2">
+            <a:schemeClr val="accent1"/>
+          </a:effectRef>
+          <a:fontRef idx="minor">
+            <a:schemeClr val="lt1"/>
+          </a:fontRef>
+        </p:style>
+        <p:txBody>
+          <a:bodyPr rtlCol="0" anchor="ctr"/>
+          <a:lstStyle/>
+          <a:p>
+            <a:pPr algn="ctr"/>
+          </a:p>
+        </p:txBody>
+      </p:sp>
+      <p:sp>
+        <p:nvSpPr>
+          <p:cNvPr id="3" name="TextBox 2"/>
+          <p:cNvSpPr txBox="1"/>
+          <p:nvPr/>
+        </p:nvSpPr>
+        <p:spPr>
+          <a:xfrm>
+            <a:off x="658368" y="6400800"/>
+            <a:ext cx="5486400" cy="274320"/>
+          </a:xfrm>
+          <a:prstGeom prst="rect">
+            <a:avLst/>
+          </a:prstGeom>
+          <a:noFill/>
+        </p:spPr>
+        <p:txBody>
+          <a:bodyPr wrap="square" lIns="0" rIns="0" tIns="0" bIns="0" anchor="t">
+            <a:spAutoFit/>
+          </a:bodyPr>
+          <a:lstStyle/>
+          <a:p>
+            <a:pPr algn="l"/>
+            <a:r>
+              <a:rPr sz="1100" b="0" i="0">
+                <a:solidFill>
+                  <a:srgbClr val="7A848C"/>
+                </a:solidFill>
+                <a:latin typeface="Arial"/>
+              </a:rPr>
+              <a:t>MEMS &amp; Sensors  ·  Lecture 2  ·  Specifications and datasheet-based selection</a:t>
+            </a:r>
+          </a:p>
+        </p:txBody>
+      </p:sp>
+      <p:sp>
+        <p:nvSpPr>
+          <p:cNvPr id="4" name="TextBox 3"/>
+          <p:cNvSpPr txBox="1"/>
+          <p:nvPr/>
+        </p:nvSpPr>
+        <p:spPr>
+          <a:xfrm>
+            <a:off x="10618927" y="6400800"/>
+            <a:ext cx="914400" cy="274320"/>
+          </a:xfrm>
+          <a:prstGeom prst="rect">
+            <a:avLst/>
+          </a:prstGeom>
+          <a:noFill/>
+        </p:spPr>
+        <p:txBody>
+          <a:bodyPr wrap="square" lIns="0" rIns="0" tIns="0" bIns="0" anchor="t">
+            <a:spAutoFit/>
+          </a:bodyPr>
+          <a:lstStyle/>
+          <a:p>
+            <a:pPr algn="r"/>
+            <a:r>
+              <a:rPr sz="1100" b="0" i="0">
+                <a:solidFill>
+                  <a:srgbClr val="7A848C"/>
+                </a:solidFill>
+                <a:latin typeface="Arial"/>
+              </a:rPr>
+              <a:t>26</a:t>
+            </a:r>
+          </a:p>
+        </p:txBody>
+      </p:sp>
+      <p:sp>
+        <p:nvSpPr>
+          <p:cNvPr id="5" name="TextBox 4"/>
+          <p:cNvSpPr txBox="1"/>
+          <p:nvPr/>
+        </p:nvSpPr>
+        <p:spPr>
+          <a:xfrm>
+            <a:off x="658368" y="274320"/>
+            <a:ext cx="10874959" cy="274320"/>
+          </a:xfrm>
+          <a:prstGeom prst="rect">
+            <a:avLst/>
+          </a:prstGeom>
+          <a:noFill/>
+        </p:spPr>
+        <p:txBody>
+          <a:bodyPr wrap="square" lIns="0" rIns="0" tIns="0" bIns="0" anchor="t">
+            <a:spAutoFit/>
+          </a:bodyPr>
+          <a:lstStyle/>
+          <a:p>
+            <a:pPr algn="l"/>
+            <a:r>
+              <a:rPr sz="1200" b="1" i="0">
+                <a:solidFill>
+                  <a:srgbClr val="C0392B"/>
+                </a:solidFill>
+                <a:latin typeface="Arial"/>
+              </a:rPr>
+              <a:t>THE VERDICT</a:t>
+            </a:r>
+          </a:p>
+        </p:txBody>
+      </p:sp>
+      <p:sp>
+        <p:nvSpPr>
+          <p:cNvPr id="6" name="TextBox 5"/>
+          <p:cNvSpPr txBox="1"/>
+          <p:nvPr/>
+        </p:nvSpPr>
+        <p:spPr>
+          <a:xfrm>
+            <a:off x="658368" y="1965960"/>
+            <a:ext cx="10874959" cy="2377440"/>
+          </a:xfrm>
+          <a:prstGeom prst="rect">
+            <a:avLst/>
+          </a:prstGeom>
+          <a:noFill/>
+        </p:spPr>
+        <p:txBody>
+          <a:bodyPr wrap="square" lIns="0" rIns="0" tIns="0" bIns="0" anchor="t">
+            <a:spAutoFit/>
+          </a:bodyPr>
+          <a:lstStyle/>
+          <a:p>
+            <a:pPr algn="l">
+              <a:lnSpc>
+                <a:spcPct val="118000"/>
+              </a:lnSpc>
+            </a:pPr>
+            <a:r>
+              <a:rPr sz="3400" b="1" i="0">
+                <a:solidFill>
+                  <a:srgbClr val="F7F5F1"/>
+                </a:solidFill>
+                <a:latin typeface="Arial"/>
+              </a:rPr>
+              <a:t>Part A resolves eight times finer</a:t>
+            </a:r>
+          </a:p>
+          <a:p>
+            <a:pPr algn="l">
+              <a:lnSpc>
+                <a:spcPct val="118000"/>
+              </a:lnSpc>
+            </a:pPr>
+            <a:r>
+              <a:rPr sz="3400" b="1" i="0">
+                <a:solidFill>
+                  <a:srgbClr val="F7F5F1"/>
+                </a:solidFill>
+                <a:latin typeface="Arial"/>
+              </a:rPr>
+              <a:t>than Part B — and cannot do the job.</a:t>
+            </a:r>
+          </a:p>
+        </p:txBody>
+      </p:sp>
+      <p:sp>
+        <p:nvSpPr>
+          <p:cNvPr id="7" name="Rectangle 6"/>
+          <p:cNvSpPr/>
+          <p:nvPr/>
+        </p:nvSpPr>
+        <p:spPr>
+          <a:xfrm>
+            <a:off x="658368" y="4617720"/>
+            <a:ext cx="1371600" cy="50800"/>
+          </a:xfrm>
+          <a:prstGeom prst="rect">
+            <a:avLst/>
+          </a:prstGeom>
+          <a:solidFill>
+            <a:srgbClr val="C0392B"/>
+          </a:solidFill>
+          <a:ln>
+            <a:noFill/>
+          </a:ln>
+          <a:effectLst/>
+        </p:spPr>
+        <p:style>
+          <a:lnRef idx="1">
+            <a:schemeClr val="accent1"/>
+          </a:lnRef>
+          <a:fillRef idx="3">
+            <a:schemeClr val="accent1"/>
+          </a:fillRef>
+          <a:effectRef idx="2">
+            <a:schemeClr val="accent1"/>
+          </a:effectRef>
+          <a:fontRef idx="minor">
+            <a:schemeClr val="lt1"/>
+          </a:fontRef>
+        </p:style>
+        <p:txBody>
+          <a:bodyPr rtlCol="0" anchor="ctr"/>
+          <a:lstStyle/>
+          <a:p>
+            <a:pPr algn="ctr"/>
+          </a:p>
+        </p:txBody>
+      </p:sp>
+      <p:sp>
+        <p:nvSpPr>
+          <p:cNvPr id="8" name="TextBox 7"/>
+          <p:cNvSpPr txBox="1"/>
+          <p:nvPr/>
+        </p:nvSpPr>
+        <p:spPr>
+          <a:xfrm>
+            <a:off x="658368" y="4892040"/>
+            <a:ext cx="9960559" cy="1097280"/>
+          </a:xfrm>
+          <a:prstGeom prst="rect">
+            <a:avLst/>
+          </a:prstGeom>
+          <a:noFill/>
+        </p:spPr>
+        <p:txBody>
+          <a:bodyPr wrap="square" lIns="0" rIns="0" tIns="0" bIns="0" anchor="t">
+            <a:spAutoFit/>
+          </a:bodyPr>
+          <a:lstStyle/>
+          <a:p>
+            <a:pPr algn="l">
+              <a:lnSpc>
+                <a:spcPct val="130000"/>
+              </a:lnSpc>
+            </a:pPr>
+            <a:r>
+              <a:rPr sz="1900" b="0" i="0">
+                <a:solidFill>
+                  <a:srgbClr val="B8C0C6"/>
+                </a:solidFill>
+                <a:latin typeface="Arial"/>
+              </a:rPr>
+              <a:t>Part B resolves 0.028° of tilt: eighteen times finer than the ±0.5° we need. Resolution was never the deciding variable. It only looked like it was, because it was the number on the front page.</a:t>
+            </a:r>
+          </a:p>
+        </p:txBody>
+      </p:sp>
+    </p:spTree>
+  </p:cSld>
+  <p:clrMapOvr>
+    <a:masterClrMapping/>
+  </p:clrMapOvr>
+</p:sld>
+</file>
+
+<file path=ppt/slides/slide27.xml><?xml version="1.0" encoding="utf-8"?>
+<p:sld xmlns:a="http://schemas.openxmlformats.org/drawingml/2006/main" xmlns:p="http://schemas.openxmlformats.org/presentationml/2006/main" xmlns:r="http://schemas.openxmlformats.org/officeDocument/2006/relationships">
+  <p:cSld>
+    <p:spTree>
+      <p:nvGrpSpPr>
+        <p:cNvPr id="1" name=""/>
+        <p:cNvGrpSpPr/>
+        <p:nvPr/>
+      </p:nvGrpSpPr>
+      <p:grpSpPr/>
+      <p:sp>
+        <p:nvSpPr>
+          <p:cNvPr id="2" name="Rectangle 1"/>
+          <p:cNvSpPr/>
+          <p:nvPr/>
+        </p:nvSpPr>
+        <p:spPr>
+          <a:xfrm>
+            <a:off x="0" y="0"/>
+            <a:ext cx="12191695" cy="6858000"/>
+          </a:xfrm>
+          <a:prstGeom prst="rect">
+            <a:avLst/>
+          </a:prstGeom>
+          <a:solidFill>
             <a:srgbClr val="F7F5F1"/>
           </a:solidFill>
           <a:ln>
@@ -18903,7 +20252,7 @@
                 </a:solidFill>
                 <a:latin typeface="Arial"/>
               </a:rPr>
-              <a:t>26</a:t>
+              <a:t>27</a:t>
             </a:r>
           </a:p>
         </p:txBody>
@@ -20017,759 +21366,6 @@
 </p:sld>
 </file>
 
-<file path=ppt/slides/slide27.xml><?xml version="1.0" encoding="utf-8"?>
-<p:sld xmlns:a="http://schemas.openxmlformats.org/drawingml/2006/main" xmlns:p="http://schemas.openxmlformats.org/presentationml/2006/main" xmlns:r="http://schemas.openxmlformats.org/officeDocument/2006/relationships">
-  <p:cSld>
-    <p:spTree>
-      <p:nvGrpSpPr>
-        <p:cNvPr id="1" name=""/>
-        <p:cNvGrpSpPr/>
-        <p:nvPr/>
-      </p:nvGrpSpPr>
-      <p:grpSpPr/>
-      <p:sp>
-        <p:nvSpPr>
-          <p:cNvPr id="2" name="Rectangle 1"/>
-          <p:cNvSpPr/>
-          <p:nvPr/>
-        </p:nvSpPr>
-        <p:spPr>
-          <a:xfrm>
-            <a:off x="0" y="0"/>
-            <a:ext cx="12191695" cy="6858000"/>
-          </a:xfrm>
-          <a:prstGeom prst="rect">
-            <a:avLst/>
-          </a:prstGeom>
-          <a:solidFill>
-            <a:srgbClr val="F7F5F1"/>
-          </a:solidFill>
-          <a:ln>
-            <a:noFill/>
-          </a:ln>
-          <a:effectLst/>
-        </p:spPr>
-        <p:style>
-          <a:lnRef idx="1">
-            <a:schemeClr val="accent1"/>
-          </a:lnRef>
-          <a:fillRef idx="3">
-            <a:schemeClr val="accent1"/>
-          </a:fillRef>
-          <a:effectRef idx="2">
-            <a:schemeClr val="accent1"/>
-          </a:effectRef>
-          <a:fontRef idx="minor">
-            <a:schemeClr val="lt1"/>
-          </a:fontRef>
-        </p:style>
-        <p:txBody>
-          <a:bodyPr rtlCol="0" anchor="ctr"/>
-          <a:lstStyle/>
-          <a:p>
-            <a:pPr algn="ctr"/>
-          </a:p>
-        </p:txBody>
-      </p:sp>
-      <p:sp>
-        <p:nvSpPr>
-          <p:cNvPr id="3" name="TextBox 2"/>
-          <p:cNvSpPr txBox="1"/>
-          <p:nvPr/>
-        </p:nvSpPr>
-        <p:spPr>
-          <a:xfrm>
-            <a:off x="658368" y="6400800"/>
-            <a:ext cx="5486400" cy="274320"/>
-          </a:xfrm>
-          <a:prstGeom prst="rect">
-            <a:avLst/>
-          </a:prstGeom>
-          <a:noFill/>
-        </p:spPr>
-        <p:txBody>
-          <a:bodyPr wrap="square" lIns="0" rIns="0" tIns="0" bIns="0" anchor="t">
-            <a:spAutoFit/>
-          </a:bodyPr>
-          <a:lstStyle/>
-          <a:p>
-            <a:pPr algn="l"/>
-            <a:r>
-              <a:rPr sz="1100" b="0" i="0">
-                <a:solidFill>
-                  <a:srgbClr val="6B7680"/>
-                </a:solidFill>
-                <a:latin typeface="Arial"/>
-              </a:rPr>
-              <a:t>MEMS &amp; Sensors  ·  Lecture 2  ·  Specifications and datasheet-based selection</a:t>
-            </a:r>
-          </a:p>
-        </p:txBody>
-      </p:sp>
-      <p:sp>
-        <p:nvSpPr>
-          <p:cNvPr id="4" name="TextBox 3"/>
-          <p:cNvSpPr txBox="1"/>
-          <p:nvPr/>
-        </p:nvSpPr>
-        <p:spPr>
-          <a:xfrm>
-            <a:off x="10618927" y="6400800"/>
-            <a:ext cx="914400" cy="274320"/>
-          </a:xfrm>
-          <a:prstGeom prst="rect">
-            <a:avLst/>
-          </a:prstGeom>
-          <a:noFill/>
-        </p:spPr>
-        <p:txBody>
-          <a:bodyPr wrap="square" lIns="0" rIns="0" tIns="0" bIns="0" anchor="t">
-            <a:spAutoFit/>
-          </a:bodyPr>
-          <a:lstStyle/>
-          <a:p>
-            <a:pPr algn="r"/>
-            <a:r>
-              <a:rPr sz="1100" b="0" i="0">
-                <a:solidFill>
-                  <a:srgbClr val="6B7680"/>
-                </a:solidFill>
-                <a:latin typeface="Arial"/>
-              </a:rPr>
-              <a:t>27</a:t>
-            </a:r>
-          </a:p>
-        </p:txBody>
-      </p:sp>
-      <p:sp>
-        <p:nvSpPr>
-          <p:cNvPr id="5" name="TextBox 4"/>
-          <p:cNvSpPr txBox="1"/>
-          <p:nvPr/>
-        </p:nvSpPr>
-        <p:spPr>
-          <a:xfrm>
-            <a:off x="658368" y="274320"/>
-            <a:ext cx="10874959" cy="274320"/>
-          </a:xfrm>
-          <a:prstGeom prst="rect">
-            <a:avLst/>
-          </a:prstGeom>
-          <a:noFill/>
-        </p:spPr>
-        <p:txBody>
-          <a:bodyPr wrap="square" lIns="0" rIns="0" tIns="0" bIns="0" anchor="t">
-            <a:spAutoFit/>
-          </a:bodyPr>
-          <a:lstStyle/>
-          <a:p>
-            <a:pPr algn="l"/>
-            <a:r>
-              <a:rPr sz="1200" b="1" i="0">
-                <a:solidFill>
-                  <a:srgbClr val="D98324"/>
-                </a:solidFill>
-                <a:latin typeface="Arial"/>
-              </a:rPr>
-              <a:t>POLL 4   ·   MINUTE 72</a:t>
-            </a:r>
-          </a:p>
-        </p:txBody>
-      </p:sp>
-      <p:sp>
-        <p:nvSpPr>
-          <p:cNvPr id="6" name="TextBox 5"/>
-          <p:cNvSpPr txBox="1"/>
-          <p:nvPr/>
-        </p:nvSpPr>
-        <p:spPr>
-          <a:xfrm>
-            <a:off x="658368" y="658368"/>
-            <a:ext cx="10874959" cy="1755648"/>
-          </a:xfrm>
-          <a:prstGeom prst="rect">
-            <a:avLst/>
-          </a:prstGeom>
-          <a:noFill/>
-        </p:spPr>
-        <p:txBody>
-          <a:bodyPr wrap="square" lIns="0" rIns="0" tIns="0" bIns="0" anchor="t">
-            <a:spAutoFit/>
-          </a:bodyPr>
-          <a:lstStyle/>
-          <a:p>
-            <a:pPr algn="l">
-              <a:lnSpc>
-                <a:spcPct val="120000"/>
-              </a:lnSpc>
-            </a:pPr>
-            <a:r>
-              <a:rPr sz="2050" b="1" i="0">
-                <a:solidFill>
-                  <a:srgbClr val="1A1F24"/>
-                </a:solidFill>
-                <a:latin typeface="Arial"/>
-              </a:rPr>
-              <a:t>New problem. Water level in an outdoor tank, 2 m deep (≈20 kPa full scale), to ±20 mm, water 5–35 °C.  P: total error band ±0.25 % FS over 0–50 °C.  Q: ±0.05 % FS at 25 °C, temperature coefficient not specified.</a:t>
-            </a:r>
-          </a:p>
-        </p:txBody>
-      </p:sp>
-      <p:sp>
-        <p:nvSpPr>
-          <p:cNvPr id="7" name="Rounded Rectangle 6"/>
-          <p:cNvSpPr/>
-          <p:nvPr/>
-        </p:nvSpPr>
-        <p:spPr>
-          <a:xfrm>
-            <a:off x="658368" y="2487168"/>
-            <a:ext cx="10874959" cy="658368"/>
-          </a:xfrm>
-          <a:prstGeom prst="roundRect">
-            <a:avLst>
-              <a:gd name="adj" fmla="val 10000"/>
-            </a:avLst>
-          </a:prstGeom>
-          <a:solidFill>
-            <a:srgbClr val="FFFFFF"/>
-          </a:solidFill>
-          <a:ln w="15875">
-            <a:solidFill>
-              <a:srgbClr val="E4E2DE"/>
-            </a:solidFill>
-          </a:ln>
-          <a:effectLst/>
-        </p:spPr>
-        <p:style>
-          <a:lnRef idx="1">
-            <a:schemeClr val="accent1"/>
-          </a:lnRef>
-          <a:fillRef idx="3">
-            <a:schemeClr val="accent1"/>
-          </a:fillRef>
-          <a:effectRef idx="2">
-            <a:schemeClr val="accent1"/>
-          </a:effectRef>
-          <a:fontRef idx="minor">
-            <a:schemeClr val="lt1"/>
-          </a:fontRef>
-        </p:style>
-        <p:txBody>
-          <a:bodyPr rtlCol="0" anchor="ctr" wrap="square" lIns="54864" rIns="54864" tIns="27432" bIns="27432"/>
-          <a:lstStyle/>
-          <a:p>
-            <a:pPr algn="ctr"/>
-            <a:r>
-              <a:rPr sz="1500" b="0">
-                <a:solidFill>
-                  <a:srgbClr val="1A1F24"/>
-                </a:solidFill>
-                <a:latin typeface="Arial"/>
-              </a:rPr>
-              <a:t/>
-            </a:r>
-          </a:p>
-        </p:txBody>
-      </p:sp>
-      <p:sp>
-        <p:nvSpPr>
-          <p:cNvPr id="8" name="TextBox 7"/>
-          <p:cNvSpPr txBox="1"/>
-          <p:nvPr/>
-        </p:nvSpPr>
-        <p:spPr>
-          <a:xfrm>
-            <a:off x="859536" y="2606040"/>
-            <a:ext cx="457200" cy="658368"/>
-          </a:xfrm>
-          <a:prstGeom prst="rect">
-            <a:avLst/>
-          </a:prstGeom>
-          <a:noFill/>
-        </p:spPr>
-        <p:txBody>
-          <a:bodyPr wrap="square" lIns="0" rIns="0" tIns="0" bIns="0" anchor="t">
-            <a:spAutoFit/>
-          </a:bodyPr>
-          <a:lstStyle/>
-          <a:p>
-            <a:pPr algn="l"/>
-            <a:r>
-              <a:rPr sz="2000" b="1" i="0">
-                <a:solidFill>
-                  <a:srgbClr val="6B7680"/>
-                </a:solidFill>
-                <a:latin typeface="Arial"/>
-              </a:rPr>
-              <a:t>A</a:t>
-            </a:r>
-          </a:p>
-        </p:txBody>
-      </p:sp>
-      <p:sp>
-        <p:nvSpPr>
-          <p:cNvPr id="9" name="TextBox 8"/>
-          <p:cNvSpPr txBox="1"/>
-          <p:nvPr/>
-        </p:nvSpPr>
-        <p:spPr>
-          <a:xfrm>
-            <a:off x="1371600" y="2615184"/>
-            <a:ext cx="9869119" cy="658368"/>
-          </a:xfrm>
-          <a:prstGeom prst="rect">
-            <a:avLst/>
-          </a:prstGeom>
-          <a:noFill/>
-        </p:spPr>
-        <p:txBody>
-          <a:bodyPr wrap="square" lIns="0" rIns="0" tIns="0" bIns="0" anchor="t">
-            <a:spAutoFit/>
-          </a:bodyPr>
-          <a:lstStyle/>
-          <a:p>
-            <a:pPr algn="l"/>
-            <a:r>
-              <a:rPr sz="1800" b="0" i="0">
-                <a:solidFill>
-                  <a:srgbClr val="1A1F24"/>
-                </a:solidFill>
-                <a:latin typeface="Arial"/>
-              </a:rPr>
-              <a:t>Sensor Q — five times better accuracy</a:t>
-            </a:r>
-          </a:p>
-        </p:txBody>
-      </p:sp>
-      <p:sp>
-        <p:nvSpPr>
-          <p:cNvPr id="10" name="Rounded Rectangle 9"/>
-          <p:cNvSpPr/>
-          <p:nvPr/>
-        </p:nvSpPr>
-        <p:spPr>
-          <a:xfrm>
-            <a:off x="658368" y="3291840"/>
-            <a:ext cx="10874959" cy="658368"/>
-          </a:xfrm>
-          <a:prstGeom prst="roundRect">
-            <a:avLst>
-              <a:gd name="adj" fmla="val 10000"/>
-            </a:avLst>
-          </a:prstGeom>
-          <a:solidFill>
-            <a:srgbClr val="FFFFFF"/>
-          </a:solidFill>
-          <a:ln w="15875">
-            <a:solidFill>
-              <a:srgbClr val="E4E2DE"/>
-            </a:solidFill>
-          </a:ln>
-          <a:effectLst/>
-        </p:spPr>
-        <p:style>
-          <a:lnRef idx="1">
-            <a:schemeClr val="accent1"/>
-          </a:lnRef>
-          <a:fillRef idx="3">
-            <a:schemeClr val="accent1"/>
-          </a:fillRef>
-          <a:effectRef idx="2">
-            <a:schemeClr val="accent1"/>
-          </a:effectRef>
-          <a:fontRef idx="minor">
-            <a:schemeClr val="lt1"/>
-          </a:fontRef>
-        </p:style>
-        <p:txBody>
-          <a:bodyPr rtlCol="0" anchor="ctr" wrap="square" lIns="54864" rIns="54864" tIns="27432" bIns="27432"/>
-          <a:lstStyle/>
-          <a:p>
-            <a:pPr algn="ctr"/>
-            <a:r>
-              <a:rPr sz="1500" b="0">
-                <a:solidFill>
-                  <a:srgbClr val="1A1F24"/>
-                </a:solidFill>
-                <a:latin typeface="Arial"/>
-              </a:rPr>
-              <a:t/>
-            </a:r>
-          </a:p>
-        </p:txBody>
-      </p:sp>
-      <p:sp>
-        <p:nvSpPr>
-          <p:cNvPr id="11" name="TextBox 10"/>
-          <p:cNvSpPr txBox="1"/>
-          <p:nvPr/>
-        </p:nvSpPr>
-        <p:spPr>
-          <a:xfrm>
-            <a:off x="859536" y="3410712"/>
-            <a:ext cx="457200" cy="658368"/>
-          </a:xfrm>
-          <a:prstGeom prst="rect">
-            <a:avLst/>
-          </a:prstGeom>
-          <a:noFill/>
-        </p:spPr>
-        <p:txBody>
-          <a:bodyPr wrap="square" lIns="0" rIns="0" tIns="0" bIns="0" anchor="t">
-            <a:spAutoFit/>
-          </a:bodyPr>
-          <a:lstStyle/>
-          <a:p>
-            <a:pPr algn="l"/>
-            <a:r>
-              <a:rPr sz="2000" b="1" i="0">
-                <a:solidFill>
-                  <a:srgbClr val="6B7680"/>
-                </a:solidFill>
-                <a:latin typeface="Arial"/>
-              </a:rPr>
-              <a:t>B</a:t>
-            </a:r>
-          </a:p>
-        </p:txBody>
-      </p:sp>
-      <p:sp>
-        <p:nvSpPr>
-          <p:cNvPr id="12" name="TextBox 11"/>
-          <p:cNvSpPr txBox="1"/>
-          <p:nvPr/>
-        </p:nvSpPr>
-        <p:spPr>
-          <a:xfrm>
-            <a:off x="1371600" y="3419856"/>
-            <a:ext cx="9869119" cy="658368"/>
-          </a:xfrm>
-          <a:prstGeom prst="rect">
-            <a:avLst/>
-          </a:prstGeom>
-          <a:noFill/>
-        </p:spPr>
-        <p:txBody>
-          <a:bodyPr wrap="square" lIns="0" rIns="0" tIns="0" bIns="0" anchor="t">
-            <a:spAutoFit/>
-          </a:bodyPr>
-          <a:lstStyle/>
-          <a:p>
-            <a:pPr algn="l"/>
-            <a:r>
-              <a:rPr sz="1800" b="0" i="0">
-                <a:solidFill>
-                  <a:srgbClr val="1A1F24"/>
-                </a:solidFill>
-                <a:latin typeface="Arial"/>
-              </a:rPr>
-              <a:t>Sensor P — its error is bounded over the whole temperature range; Q's is specified at one point only</a:t>
-            </a:r>
-          </a:p>
-        </p:txBody>
-      </p:sp>
-      <p:sp>
-        <p:nvSpPr>
-          <p:cNvPr id="13" name="Rounded Rectangle 12"/>
-          <p:cNvSpPr/>
-          <p:nvPr/>
-        </p:nvSpPr>
-        <p:spPr>
-          <a:xfrm>
-            <a:off x="658368" y="4096512"/>
-            <a:ext cx="10874959" cy="658368"/>
-          </a:xfrm>
-          <a:prstGeom prst="roundRect">
-            <a:avLst>
-              <a:gd name="adj" fmla="val 10000"/>
-            </a:avLst>
-          </a:prstGeom>
-          <a:solidFill>
-            <a:srgbClr val="FFFFFF"/>
-          </a:solidFill>
-          <a:ln w="15875">
-            <a:solidFill>
-              <a:srgbClr val="E4E2DE"/>
-            </a:solidFill>
-          </a:ln>
-          <a:effectLst/>
-        </p:spPr>
-        <p:style>
-          <a:lnRef idx="1">
-            <a:schemeClr val="accent1"/>
-          </a:lnRef>
-          <a:fillRef idx="3">
-            <a:schemeClr val="accent1"/>
-          </a:fillRef>
-          <a:effectRef idx="2">
-            <a:schemeClr val="accent1"/>
-          </a:effectRef>
-          <a:fontRef idx="minor">
-            <a:schemeClr val="lt1"/>
-          </a:fontRef>
-        </p:style>
-        <p:txBody>
-          <a:bodyPr rtlCol="0" anchor="ctr" wrap="square" lIns="54864" rIns="54864" tIns="27432" bIns="27432"/>
-          <a:lstStyle/>
-          <a:p>
-            <a:pPr algn="ctr"/>
-            <a:r>
-              <a:rPr sz="1500" b="0">
-                <a:solidFill>
-                  <a:srgbClr val="1A1F24"/>
-                </a:solidFill>
-                <a:latin typeface="Arial"/>
-              </a:rPr>
-              <a:t/>
-            </a:r>
-          </a:p>
-        </p:txBody>
-      </p:sp>
-      <p:sp>
-        <p:nvSpPr>
-          <p:cNvPr id="14" name="TextBox 13"/>
-          <p:cNvSpPr txBox="1"/>
-          <p:nvPr/>
-        </p:nvSpPr>
-        <p:spPr>
-          <a:xfrm>
-            <a:off x="859536" y="4215384"/>
-            <a:ext cx="457200" cy="658368"/>
-          </a:xfrm>
-          <a:prstGeom prst="rect">
-            <a:avLst/>
-          </a:prstGeom>
-          <a:noFill/>
-        </p:spPr>
-        <p:txBody>
-          <a:bodyPr wrap="square" lIns="0" rIns="0" tIns="0" bIns="0" anchor="t">
-            <a:spAutoFit/>
-          </a:bodyPr>
-          <a:lstStyle/>
-          <a:p>
-            <a:pPr algn="l"/>
-            <a:r>
-              <a:rPr sz="2000" b="1" i="0">
-                <a:solidFill>
-                  <a:srgbClr val="6B7680"/>
-                </a:solidFill>
-                <a:latin typeface="Arial"/>
-              </a:rPr>
-              <a:t>C</a:t>
-            </a:r>
-          </a:p>
-        </p:txBody>
-      </p:sp>
-      <p:sp>
-        <p:nvSpPr>
-          <p:cNvPr id="15" name="TextBox 14"/>
-          <p:cNvSpPr txBox="1"/>
-          <p:nvPr/>
-        </p:nvSpPr>
-        <p:spPr>
-          <a:xfrm>
-            <a:off x="1371600" y="4224528"/>
-            <a:ext cx="9869119" cy="658368"/>
-          </a:xfrm>
-          <a:prstGeom prst="rect">
-            <a:avLst/>
-          </a:prstGeom>
-          <a:noFill/>
-        </p:spPr>
-        <p:txBody>
-          <a:bodyPr wrap="square" lIns="0" rIns="0" tIns="0" bIns="0" anchor="t">
-            <a:spAutoFit/>
-          </a:bodyPr>
-          <a:lstStyle/>
-          <a:p>
-            <a:pPr algn="l"/>
-            <a:r>
-              <a:rPr sz="1800" b="0" i="0">
-                <a:solidFill>
-                  <a:srgbClr val="1A1F24"/>
-                </a:solidFill>
-                <a:latin typeface="Arial"/>
-              </a:rPr>
-              <a:t>Either — the temperature coefficient can be measured later</a:t>
-            </a:r>
-          </a:p>
-        </p:txBody>
-      </p:sp>
-      <p:sp>
-        <p:nvSpPr>
-          <p:cNvPr id="16" name="Rounded Rectangle 15"/>
-          <p:cNvSpPr/>
-          <p:nvPr/>
-        </p:nvSpPr>
-        <p:spPr>
-          <a:xfrm>
-            <a:off x="658368" y="4901184"/>
-            <a:ext cx="10874959" cy="658368"/>
-          </a:xfrm>
-          <a:prstGeom prst="roundRect">
-            <a:avLst>
-              <a:gd name="adj" fmla="val 10000"/>
-            </a:avLst>
-          </a:prstGeom>
-          <a:solidFill>
-            <a:srgbClr val="FFFFFF"/>
-          </a:solidFill>
-          <a:ln w="15875">
-            <a:solidFill>
-              <a:srgbClr val="E4E2DE"/>
-            </a:solidFill>
-          </a:ln>
-          <a:effectLst/>
-        </p:spPr>
-        <p:style>
-          <a:lnRef idx="1">
-            <a:schemeClr val="accent1"/>
-          </a:lnRef>
-          <a:fillRef idx="3">
-            <a:schemeClr val="accent1"/>
-          </a:fillRef>
-          <a:effectRef idx="2">
-            <a:schemeClr val="accent1"/>
-          </a:effectRef>
-          <a:fontRef idx="minor">
-            <a:schemeClr val="lt1"/>
-          </a:fontRef>
-        </p:style>
-        <p:txBody>
-          <a:bodyPr rtlCol="0" anchor="ctr" wrap="square" lIns="54864" rIns="54864" tIns="27432" bIns="27432"/>
-          <a:lstStyle/>
-          <a:p>
-            <a:pPr algn="ctr"/>
-            <a:r>
-              <a:rPr sz="1500" b="0">
-                <a:solidFill>
-                  <a:srgbClr val="1A1F24"/>
-                </a:solidFill>
-                <a:latin typeface="Arial"/>
-              </a:rPr>
-              <a:t/>
-            </a:r>
-          </a:p>
-        </p:txBody>
-      </p:sp>
-      <p:sp>
-        <p:nvSpPr>
-          <p:cNvPr id="17" name="TextBox 16"/>
-          <p:cNvSpPr txBox="1"/>
-          <p:nvPr/>
-        </p:nvSpPr>
-        <p:spPr>
-          <a:xfrm>
-            <a:off x="859536" y="5020056"/>
-            <a:ext cx="457200" cy="658368"/>
-          </a:xfrm>
-          <a:prstGeom prst="rect">
-            <a:avLst/>
-          </a:prstGeom>
-          <a:noFill/>
-        </p:spPr>
-        <p:txBody>
-          <a:bodyPr wrap="square" lIns="0" rIns="0" tIns="0" bIns="0" anchor="t">
-            <a:spAutoFit/>
-          </a:bodyPr>
-          <a:lstStyle/>
-          <a:p>
-            <a:pPr algn="l"/>
-            <a:r>
-              <a:rPr sz="2000" b="1" i="0">
-                <a:solidFill>
-                  <a:srgbClr val="6B7680"/>
-                </a:solidFill>
-                <a:latin typeface="Arial"/>
-              </a:rPr>
-              <a:t>D</a:t>
-            </a:r>
-          </a:p>
-        </p:txBody>
-      </p:sp>
-      <p:sp>
-        <p:nvSpPr>
-          <p:cNvPr id="18" name="TextBox 17"/>
-          <p:cNvSpPr txBox="1"/>
-          <p:nvPr/>
-        </p:nvSpPr>
-        <p:spPr>
-          <a:xfrm>
-            <a:off x="1371600" y="5029200"/>
-            <a:ext cx="9869119" cy="658368"/>
-          </a:xfrm>
-          <a:prstGeom prst="rect">
-            <a:avLst/>
-          </a:prstGeom>
-          <a:noFill/>
-        </p:spPr>
-        <p:txBody>
-          <a:bodyPr wrap="square" lIns="0" rIns="0" tIns="0" bIns="0" anchor="t">
-            <a:spAutoFit/>
-          </a:bodyPr>
-          <a:lstStyle/>
-          <a:p>
-            <a:pPr algn="l"/>
-            <a:r>
-              <a:rPr sz="1800" b="0" i="0">
-                <a:solidFill>
-                  <a:srgbClr val="1A1F24"/>
-                </a:solidFill>
-                <a:latin typeface="Arial"/>
-              </a:rPr>
-              <a:t>Sensor Q, calibrated at 25 °C before installation</a:t>
-            </a:r>
-          </a:p>
-        </p:txBody>
-      </p:sp>
-      <p:sp>
-        <p:nvSpPr>
-          <p:cNvPr id="19" name="TextBox 18"/>
-          <p:cNvSpPr txBox="1"/>
-          <p:nvPr/>
-        </p:nvSpPr>
-        <p:spPr>
-          <a:xfrm>
-            <a:off x="658368" y="5541264"/>
-            <a:ext cx="10874959" cy="713232"/>
-          </a:xfrm>
-          <a:prstGeom prst="rect">
-            <a:avLst/>
-          </a:prstGeom>
-          <a:noFill/>
-        </p:spPr>
-        <p:txBody>
-          <a:bodyPr wrap="square" lIns="0" rIns="0" tIns="0" bIns="0" anchor="t">
-            <a:spAutoFit/>
-          </a:bodyPr>
-          <a:lstStyle/>
-          <a:p>
-            <a:pPr algn="l">
-              <a:lnSpc>
-                <a:spcPct val="125000"/>
-              </a:lnSpc>
-            </a:pPr>
-            <a:r>
-              <a:rPr sz="1500" b="0" i="1">
-                <a:solidFill>
-                  <a:srgbClr val="6B7680"/>
-                </a:solidFill>
-                <a:latin typeface="Arial"/>
-              </a:rPr>
-              <a:t>Different measurand, different error term. Same question underneath.</a:t>
-            </a:r>
-          </a:p>
-        </p:txBody>
-      </p:sp>
-    </p:spTree>
-  </p:cSld>
-  <p:clrMapOvr>
-    <a:masterClrMapping/>
-  </p:clrMapOvr>
-</p:sld>
-</file>
-
 <file path=ppt/slides/slide28.xml><?xml version="1.0" encoding="utf-8"?>
 <p:sld xmlns:a="http://schemas.openxmlformats.org/drawingml/2006/main" xmlns:p="http://schemas.openxmlformats.org/presentationml/2006/main" xmlns:r="http://schemas.openxmlformats.org/officeDocument/2006/relationships">
   <p:cSld>
@@ -20920,11 +21516,11 @@
             <a:r>
               <a:rPr sz="1200" b="1" i="0">
                 <a:solidFill>
-                  <a:srgbClr val="0E7C86"/>
-                </a:solidFill>
-                <a:latin typeface="Arial"/>
-              </a:rPr>
-              <a:t>POLL 4   ·   MINUTE 72   ·   ANSWER</a:t>
+                  <a:srgbClr val="D98324"/>
+                </a:solidFill>
+                <a:latin typeface="Arial"/>
+              </a:rPr>
+              <a:t>POLL 4   ·   MINUTE 72</a:t>
             </a:r>
           </a:p>
         </p:txBody>
@@ -21112,11 +21708,11 @@
             </a:avLst>
           </a:prstGeom>
           <a:solidFill>
-            <a:srgbClr val="DCEDEF"/>
+            <a:srgbClr val="FFFFFF"/>
           </a:solidFill>
-          <a:ln w="31750">
+          <a:ln w="15875">
             <a:solidFill>
-              <a:srgbClr val="0E7C86"/>
+              <a:srgbClr val="E4E2DE"/>
             </a:solidFill>
           </a:ln>
           <a:effectLst/>
@@ -21178,7 +21774,7 @@
             <a:r>
               <a:rPr sz="2000" b="1" i="0">
                 <a:solidFill>
-                  <a:srgbClr val="0E7C86"/>
+                  <a:srgbClr val="6B7680"/>
                 </a:solidFill>
                 <a:latin typeface="Arial"/>
               </a:rPr>
@@ -21211,7 +21807,7 @@
           <a:p>
             <a:pPr algn="l"/>
             <a:r>
-              <a:rPr sz="1800" b="1" i="0">
+              <a:rPr sz="1800" b="0" i="0">
                 <a:solidFill>
                   <a:srgbClr val="1A1F24"/>
                 </a:solidFill>
@@ -21506,11 +22102,11 @@
             <a:r>
               <a:rPr sz="1500" b="0" i="1">
                 <a:solidFill>
-                  <a:srgbClr val="0E7C86"/>
-                </a:solidFill>
-                <a:latin typeface="Arial"/>
-              </a:rPr>
-              <a:t>A total error band over the operating range beats a headline accuracy at one temperature. An unspecified coefficient is not a small error — it is an unbounded one.</a:t>
+                  <a:srgbClr val="6B7680"/>
+                </a:solidFill>
+                <a:latin typeface="Arial"/>
+              </a:rPr>
+              <a:t>Different measurand, different error term. Same question underneath.</a:t>
             </a:r>
           </a:p>
         </p:txBody>
@@ -21655,8 +22251,8 @@
         </p:nvSpPr>
         <p:spPr>
           <a:xfrm>
-            <a:off x="658368" y="475488"/>
-            <a:ext cx="10874959" cy="777240"/>
+            <a:off x="658368" y="274320"/>
+            <a:ext cx="10874959" cy="274320"/>
           </a:xfrm>
           <a:prstGeom prst="rect">
             <a:avLst/>
@@ -21671,36 +22267,79 @@
           <a:p>
             <a:pPr algn="l"/>
             <a:r>
-              <a:rPr sz="3400" b="1" i="0">
+              <a:rPr sz="1200" b="1" i="0">
+                <a:solidFill>
+                  <a:srgbClr val="0E7C86"/>
+                </a:solidFill>
+                <a:latin typeface="Arial"/>
+              </a:rPr>
+              <a:t>POLL 4   ·   MINUTE 72   ·   ANSWER</a:t>
+            </a:r>
+          </a:p>
+        </p:txBody>
+      </p:sp>
+      <p:sp>
+        <p:nvSpPr>
+          <p:cNvPr id="6" name="TextBox 5"/>
+          <p:cNvSpPr txBox="1"/>
+          <p:nvPr/>
+        </p:nvSpPr>
+        <p:spPr>
+          <a:xfrm>
+            <a:off x="658368" y="658368"/>
+            <a:ext cx="10874959" cy="1755648"/>
+          </a:xfrm>
+          <a:prstGeom prst="rect">
+            <a:avLst/>
+          </a:prstGeom>
+          <a:noFill/>
+        </p:spPr>
+        <p:txBody>
+          <a:bodyPr wrap="square" lIns="0" rIns="0" tIns="0" bIns="0" anchor="t">
+            <a:spAutoFit/>
+          </a:bodyPr>
+          <a:lstStyle/>
+          <a:p>
+            <a:pPr algn="l">
+              <a:lnSpc>
+                <a:spcPct val="120000"/>
+              </a:lnSpc>
+            </a:pPr>
+            <a:r>
+              <a:rPr sz="2050" b="1" i="0">
                 <a:solidFill>
                   <a:srgbClr val="1A1F24"/>
                 </a:solidFill>
                 <a:latin typeface="Arial"/>
               </a:rPr>
-              <a:t>The course's selection rule</a:t>
-            </a:r>
-          </a:p>
-        </p:txBody>
-      </p:sp>
-      <p:sp>
-        <p:nvSpPr>
-          <p:cNvPr id="6" name="Rectangle 5"/>
+              <a:t>New problem. Water level in an outdoor tank, 2 m deep (≈20 kPa full scale), to ±20 mm, water 5–35 °C.  P: total error band ±0.25 % FS over 0–50 °C.  Q: ±0.05 % FS at 25 °C, temperature coefficient not specified.</a:t>
+            </a:r>
+          </a:p>
+        </p:txBody>
+      </p:sp>
+      <p:sp>
+        <p:nvSpPr>
+          <p:cNvPr id="7" name="Rounded Rectangle 6"/>
           <p:cNvSpPr/>
           <p:nvPr/>
         </p:nvSpPr>
         <p:spPr>
           <a:xfrm>
-            <a:off x="658368" y="1188720"/>
-            <a:ext cx="1371600" cy="57150"/>
-          </a:xfrm>
-          <a:prstGeom prst="rect">
-            <a:avLst/>
+            <a:off x="658368" y="2487168"/>
+            <a:ext cx="10874959" cy="658368"/>
+          </a:xfrm>
+          <a:prstGeom prst="roundRect">
+            <a:avLst>
+              <a:gd name="adj" fmla="val 10000"/>
+            </a:avLst>
           </a:prstGeom>
           <a:solidFill>
-            <a:srgbClr val="0E7C86"/>
+            <a:srgbClr val="FFFFFF"/>
           </a:solidFill>
-          <a:ln>
-            <a:noFill/>
+          <a:ln w="15875">
+            <a:solidFill>
+              <a:srgbClr val="E4E2DE"/>
+            </a:solidFill>
           </a:ln>
           <a:effectLst/>
         </p:spPr>
@@ -21719,23 +22358,32 @@
           </a:fontRef>
         </p:style>
         <p:txBody>
-          <a:bodyPr rtlCol="0" anchor="ctr"/>
+          <a:bodyPr rtlCol="0" anchor="ctr" wrap="square" lIns="54864" rIns="54864" tIns="27432" bIns="27432"/>
           <a:lstStyle/>
           <a:p>
             <a:pPr algn="ctr"/>
-          </a:p>
-        </p:txBody>
-      </p:sp>
-      <p:sp>
-        <p:nvSpPr>
-          <p:cNvPr id="7" name="TextBox 6"/>
+            <a:r>
+              <a:rPr sz="1500" b="0">
+                <a:solidFill>
+                  <a:srgbClr val="1A1F24"/>
+                </a:solidFill>
+                <a:latin typeface="Arial"/>
+              </a:rPr>
+              <a:t/>
+            </a:r>
+          </a:p>
+        </p:txBody>
+      </p:sp>
+      <p:sp>
+        <p:nvSpPr>
+          <p:cNvPr id="8" name="TextBox 7"/>
           <p:cNvSpPr txBox="1"/>
           <p:nvPr/>
         </p:nvSpPr>
         <p:spPr>
           <a:xfrm>
-            <a:off x="658368" y="1353312"/>
-            <a:ext cx="10874959" cy="365760"/>
+            <a:off x="859536" y="2606040"/>
+            <a:ext cx="457200" cy="658368"/>
           </a:xfrm>
           <a:prstGeom prst="rect">
             <a:avLst/>
@@ -21750,27 +22398,62 @@
           <a:p>
             <a:pPr algn="l"/>
             <a:r>
-              <a:rPr sz="1700" b="0" i="1">
+              <a:rPr sz="2000" b="1" i="0">
                 <a:solidFill>
                   <a:srgbClr val="6B7680"/>
                 </a:solidFill>
                 <a:latin typeface="Arial"/>
               </a:rPr>
-              <a:t>Quoted from your own semester plan</a:t>
-            </a:r>
-          </a:p>
-        </p:txBody>
-      </p:sp>
-      <p:sp>
-        <p:nvSpPr>
-          <p:cNvPr id="8" name="Rounded Rectangle 7"/>
+              <a:t>A</a:t>
+            </a:r>
+          </a:p>
+        </p:txBody>
+      </p:sp>
+      <p:sp>
+        <p:nvSpPr>
+          <p:cNvPr id="9" name="TextBox 8"/>
+          <p:cNvSpPr txBox="1"/>
+          <p:nvPr/>
+        </p:nvSpPr>
+        <p:spPr>
+          <a:xfrm>
+            <a:off x="1371600" y="2615184"/>
+            <a:ext cx="9869119" cy="658368"/>
+          </a:xfrm>
+          <a:prstGeom prst="rect">
+            <a:avLst/>
+          </a:prstGeom>
+          <a:noFill/>
+        </p:spPr>
+        <p:txBody>
+          <a:bodyPr wrap="square" lIns="0" rIns="0" tIns="0" bIns="0" anchor="t">
+            <a:spAutoFit/>
+          </a:bodyPr>
+          <a:lstStyle/>
+          <a:p>
+            <a:pPr algn="l"/>
+            <a:r>
+              <a:rPr sz="1800" b="0" i="0">
+                <a:solidFill>
+                  <a:srgbClr val="1A1F24"/>
+                </a:solidFill>
+                <a:latin typeface="Arial"/>
+              </a:rPr>
+              <a:t>Sensor Q — five times better accuracy</a:t>
+            </a:r>
+          </a:p>
+        </p:txBody>
+      </p:sp>
+      <p:sp>
+        <p:nvSpPr>
+          <p:cNvPr id="10" name="Rounded Rectangle 9"/>
           <p:cNvSpPr/>
           <p:nvPr/>
         </p:nvSpPr>
         <p:spPr>
           <a:xfrm>
-            <a:off x="658368" y="2148840"/>
-            <a:ext cx="10874959" cy="1371600"/>
+            <a:off x="658368" y="3291840"/>
+            <a:ext cx="10874959" cy="658368"/>
           </a:xfrm>
           <a:prstGeom prst="roundRect">
             <a:avLst>
@@ -21778,9 +22461,9 @@
             </a:avLst>
           </a:prstGeom>
           <a:solidFill>
-            <a:srgbClr val="1A1F24"/>
+            <a:srgbClr val="DCEDEF"/>
           </a:solidFill>
-          <a:ln w="38100">
+          <a:ln w="31750">
             <a:solidFill>
               <a:srgbClr val="0E7C86"/>
             </a:solidFill>
@@ -21807,39 +22490,27 @@
           <a:p>
             <a:pPr algn="ctr"/>
             <a:r>
-              <a:rPr sz="2300" b="1">
-                <a:solidFill>
-                  <a:srgbClr val="F7F5F1"/>
-                </a:solidFill>
-                <a:latin typeface="Arial"/>
-              </a:rPr>
-              <a:t>“Avoid selecting a part only because an Arduino library exists;</a:t>
-            </a:r>
-          </a:p>
-          <a:p>
-            <a:pPr algn="ctr"/>
-            <a:r>
-              <a:rPr sz="2300" b="1">
-                <a:solidFill>
-                  <a:srgbClr val="F7F5F1"/>
-                </a:solidFill>
-                <a:latin typeface="Arial"/>
-              </a:rPr>
-              <a:t>students must still see the underlying configuration and data path.”</a:t>
-            </a:r>
-          </a:p>
-        </p:txBody>
-      </p:sp>
-      <p:sp>
-        <p:nvSpPr>
-          <p:cNvPr id="9" name="TextBox 8"/>
+              <a:rPr sz="1500" b="0">
+                <a:solidFill>
+                  <a:srgbClr val="1A1F24"/>
+                </a:solidFill>
+                <a:latin typeface="Arial"/>
+              </a:rPr>
+              <a:t/>
+            </a:r>
+          </a:p>
+        </p:txBody>
+      </p:sp>
+      <p:sp>
+        <p:nvSpPr>
+          <p:cNvPr id="11" name="TextBox 10"/>
           <p:cNvSpPr txBox="1"/>
           <p:nvPr/>
         </p:nvSpPr>
         <p:spPr>
           <a:xfrm>
-            <a:off x="658368" y="3794760"/>
-            <a:ext cx="10874959" cy="457200"/>
+            <a:off x="859536" y="3410712"/>
+            <a:ext cx="457200" cy="658368"/>
           </a:xfrm>
           <a:prstGeom prst="rect">
             <a:avLst/>
@@ -21854,27 +22525,27 @@
           <a:p>
             <a:pPr algn="l"/>
             <a:r>
-              <a:rPr sz="2600" b="1" i="0">
-                <a:solidFill>
-                  <a:srgbClr val="C0392B"/>
-                </a:solidFill>
-                <a:latin typeface="Arial"/>
-              </a:rPr>
-              <a:t>Part A had a library. Part A cannot do the job.</a:t>
-            </a:r>
-          </a:p>
-        </p:txBody>
-      </p:sp>
-      <p:sp>
-        <p:nvSpPr>
-          <p:cNvPr id="10" name="TextBox 9"/>
+              <a:rPr sz="2000" b="1" i="0">
+                <a:solidFill>
+                  <a:srgbClr val="0E7C86"/>
+                </a:solidFill>
+                <a:latin typeface="Arial"/>
+              </a:rPr>
+              <a:t>B</a:t>
+            </a:r>
+          </a:p>
+        </p:txBody>
+      </p:sp>
+      <p:sp>
+        <p:nvSpPr>
+          <p:cNvPr id="12" name="TextBox 11"/>
           <p:cNvSpPr txBox="1"/>
           <p:nvPr/>
         </p:nvSpPr>
         <p:spPr>
           <a:xfrm>
-            <a:off x="658368" y="4526280"/>
-            <a:ext cx="10874959" cy="365760"/>
+            <a:off x="1371600" y="3419856"/>
+            <a:ext cx="9869119" cy="658368"/>
           </a:xfrm>
           <a:prstGeom prst="rect">
             <a:avLst/>
@@ -21895,21 +22566,21 @@
                 </a:solidFill>
                 <a:latin typeface="Arial"/>
               </a:rPr>
-              <a:t>What to choose on instead — parts that expose the engineering:</a:t>
-            </a:r>
-          </a:p>
-        </p:txBody>
-      </p:sp>
-      <p:sp>
-        <p:nvSpPr>
-          <p:cNvPr id="11" name="Rounded Rectangle 10"/>
+              <a:t>Sensor P — its error is bounded over the whole temperature range; Q's is specified at one point only</a:t>
+            </a:r>
+          </a:p>
+        </p:txBody>
+      </p:sp>
+      <p:sp>
+        <p:nvSpPr>
+          <p:cNvPr id="13" name="Rounded Rectangle 12"/>
           <p:cNvSpPr/>
           <p:nvPr/>
         </p:nvSpPr>
         <p:spPr>
           <a:xfrm>
-            <a:off x="658368" y="4983480"/>
-            <a:ext cx="2606040" cy="457200"/>
+            <a:off x="658368" y="4096512"/>
+            <a:ext cx="10874959" cy="658368"/>
           </a:xfrm>
           <a:prstGeom prst="roundRect">
             <a:avLst>
@@ -21917,11 +22588,11 @@
             </a:avLst>
           </a:prstGeom>
           <a:solidFill>
-            <a:srgbClr val="DCEDEF"/>
+            <a:srgbClr val="FFFFFF"/>
           </a:solidFill>
           <a:ln w="15875">
             <a:solidFill>
-              <a:srgbClr val="0E7C86"/>
+              <a:srgbClr val="E4E2DE"/>
             </a:solidFill>
           </a:ln>
           <a:effectLst/>
@@ -21946,27 +22617,97 @@
           <a:p>
             <a:pPr algn="ctr"/>
             <a:r>
-              <a:rPr sz="1350" b="1">
+              <a:rPr sz="1500" b="0">
                 <a:solidFill>
                   <a:srgbClr val="1A1F24"/>
                 </a:solidFill>
                 <a:latin typeface="Arial"/>
               </a:rPr>
-              <a:t>selectable range and ODR</a:t>
-            </a:r>
-          </a:p>
-        </p:txBody>
-      </p:sp>
-      <p:sp>
-        <p:nvSpPr>
-          <p:cNvPr id="12" name="Rounded Rectangle 11"/>
+              <a:t/>
+            </a:r>
+          </a:p>
+        </p:txBody>
+      </p:sp>
+      <p:sp>
+        <p:nvSpPr>
+          <p:cNvPr id="14" name="TextBox 13"/>
+          <p:cNvSpPr txBox="1"/>
+          <p:nvPr/>
+        </p:nvSpPr>
+        <p:spPr>
+          <a:xfrm>
+            <a:off x="859536" y="4215384"/>
+            <a:ext cx="457200" cy="658368"/>
+          </a:xfrm>
+          <a:prstGeom prst="rect">
+            <a:avLst/>
+          </a:prstGeom>
+          <a:noFill/>
+        </p:spPr>
+        <p:txBody>
+          <a:bodyPr wrap="square" lIns="0" rIns="0" tIns="0" bIns="0" anchor="t">
+            <a:spAutoFit/>
+          </a:bodyPr>
+          <a:lstStyle/>
+          <a:p>
+            <a:pPr algn="l"/>
+            <a:r>
+              <a:rPr sz="2000" b="1" i="0">
+                <a:solidFill>
+                  <a:srgbClr val="6B7680"/>
+                </a:solidFill>
+                <a:latin typeface="Arial"/>
+              </a:rPr>
+              <a:t>C</a:t>
+            </a:r>
+          </a:p>
+        </p:txBody>
+      </p:sp>
+      <p:sp>
+        <p:nvSpPr>
+          <p:cNvPr id="15" name="TextBox 14"/>
+          <p:cNvSpPr txBox="1"/>
+          <p:nvPr/>
+        </p:nvSpPr>
+        <p:spPr>
+          <a:xfrm>
+            <a:off x="1371600" y="4224528"/>
+            <a:ext cx="9869119" cy="658368"/>
+          </a:xfrm>
+          <a:prstGeom prst="rect">
+            <a:avLst/>
+          </a:prstGeom>
+          <a:noFill/>
+        </p:spPr>
+        <p:txBody>
+          <a:bodyPr wrap="square" lIns="0" rIns="0" tIns="0" bIns="0" anchor="t">
+            <a:spAutoFit/>
+          </a:bodyPr>
+          <a:lstStyle/>
+          <a:p>
+            <a:pPr algn="l"/>
+            <a:r>
+              <a:rPr sz="1800" b="0" i="0">
+                <a:solidFill>
+                  <a:srgbClr val="1A1F24"/>
+                </a:solidFill>
+                <a:latin typeface="Arial"/>
+              </a:rPr>
+              <a:t>Either — the temperature coefficient can be measured later</a:t>
+            </a:r>
+          </a:p>
+        </p:txBody>
+      </p:sp>
+      <p:sp>
+        <p:nvSpPr>
+          <p:cNvPr id="16" name="Rounded Rectangle 15"/>
           <p:cNvSpPr/>
           <p:nvPr/>
         </p:nvSpPr>
         <p:spPr>
           <a:xfrm>
-            <a:off x="3447288" y="4983480"/>
-            <a:ext cx="2606040" cy="457200"/>
+            <a:off x="658368" y="4901184"/>
+            <a:ext cx="10874959" cy="658368"/>
           </a:xfrm>
           <a:prstGeom prst="roundRect">
             <a:avLst>
@@ -21974,11 +22715,11 @@
             </a:avLst>
           </a:prstGeom>
           <a:solidFill>
-            <a:srgbClr val="DCEDEF"/>
+            <a:srgbClr val="FFFFFF"/>
           </a:solidFill>
           <a:ln w="15875">
             <a:solidFill>
-              <a:srgbClr val="0E7C86"/>
+              <a:srgbClr val="E4E2DE"/>
             </a:solidFill>
           </a:ln>
           <a:effectLst/>
@@ -22003,298 +22744,122 @@
           <a:p>
             <a:pPr algn="ctr"/>
             <a:r>
-              <a:rPr sz="1350" b="1">
+              <a:rPr sz="1500" b="0">
                 <a:solidFill>
                   <a:srgbClr val="1A1F24"/>
                 </a:solidFill>
                 <a:latin typeface="Arial"/>
               </a:rPr>
-              <a:t>documented bandwidth and noise</a:t>
-            </a:r>
-          </a:p>
-        </p:txBody>
-      </p:sp>
-      <p:sp>
-        <p:nvSpPr>
-          <p:cNvPr id="13" name="Rounded Rectangle 12"/>
-          <p:cNvSpPr/>
-          <p:nvPr/>
-        </p:nvSpPr>
-        <p:spPr>
-          <a:xfrm>
-            <a:off x="6236208" y="4983480"/>
-            <a:ext cx="2606040" cy="457200"/>
-          </a:xfrm>
-          <a:prstGeom prst="roundRect">
-            <a:avLst>
-              <a:gd name="adj" fmla="val 10000"/>
-            </a:avLst>
-          </a:prstGeom>
-          <a:solidFill>
-            <a:srgbClr val="DCEDEF"/>
-          </a:solidFill>
-          <a:ln w="15875">
-            <a:solidFill>
-              <a:srgbClr val="0E7C86"/>
-            </a:solidFill>
-          </a:ln>
-          <a:effectLst/>
-        </p:spPr>
-        <p:style>
-          <a:lnRef idx="1">
-            <a:schemeClr val="accent1"/>
-          </a:lnRef>
-          <a:fillRef idx="3">
-            <a:schemeClr val="accent1"/>
-          </a:fillRef>
-          <a:effectRef idx="2">
-            <a:schemeClr val="accent1"/>
-          </a:effectRef>
-          <a:fontRef idx="minor">
-            <a:schemeClr val="lt1"/>
-          </a:fontRef>
-        </p:style>
-        <p:txBody>
-          <a:bodyPr rtlCol="0" anchor="ctr" wrap="square" lIns="54864" rIns="54864" tIns="27432" bIns="27432"/>
-          <a:lstStyle/>
-          <a:p>
-            <a:pPr algn="ctr"/>
-            <a:r>
-              <a:rPr sz="1350" b="1">
+              <a:t/>
+            </a:r>
+          </a:p>
+        </p:txBody>
+      </p:sp>
+      <p:sp>
+        <p:nvSpPr>
+          <p:cNvPr id="17" name="TextBox 16"/>
+          <p:cNvSpPr txBox="1"/>
+          <p:nvPr/>
+        </p:nvSpPr>
+        <p:spPr>
+          <a:xfrm>
+            <a:off x="859536" y="5020056"/>
+            <a:ext cx="457200" cy="658368"/>
+          </a:xfrm>
+          <a:prstGeom prst="rect">
+            <a:avLst/>
+          </a:prstGeom>
+          <a:noFill/>
+        </p:spPr>
+        <p:txBody>
+          <a:bodyPr wrap="square" lIns="0" rIns="0" tIns="0" bIns="0" anchor="t">
+            <a:spAutoFit/>
+          </a:bodyPr>
+          <a:lstStyle/>
+          <a:p>
+            <a:pPr algn="l"/>
+            <a:r>
+              <a:rPr sz="2000" b="1" i="0">
+                <a:solidFill>
+                  <a:srgbClr val="6B7680"/>
+                </a:solidFill>
+                <a:latin typeface="Arial"/>
+              </a:rPr>
+              <a:t>D</a:t>
+            </a:r>
+          </a:p>
+        </p:txBody>
+      </p:sp>
+      <p:sp>
+        <p:nvSpPr>
+          <p:cNvPr id="18" name="TextBox 17"/>
+          <p:cNvSpPr txBox="1"/>
+          <p:nvPr/>
+        </p:nvSpPr>
+        <p:spPr>
+          <a:xfrm>
+            <a:off x="1371600" y="5029200"/>
+            <a:ext cx="9869119" cy="658368"/>
+          </a:xfrm>
+          <a:prstGeom prst="rect">
+            <a:avLst/>
+          </a:prstGeom>
+          <a:noFill/>
+        </p:spPr>
+        <p:txBody>
+          <a:bodyPr wrap="square" lIns="0" rIns="0" tIns="0" bIns="0" anchor="t">
+            <a:spAutoFit/>
+          </a:bodyPr>
+          <a:lstStyle/>
+          <a:p>
+            <a:pPr algn="l"/>
+            <a:r>
+              <a:rPr sz="1800" b="0" i="0">
                 <a:solidFill>
                   <a:srgbClr val="1A1F24"/>
                 </a:solidFill>
                 <a:latin typeface="Arial"/>
               </a:rPr>
-              <a:t>self-test</a:t>
-            </a:r>
-          </a:p>
-        </p:txBody>
-      </p:sp>
-      <p:sp>
-        <p:nvSpPr>
-          <p:cNvPr id="14" name="Rounded Rectangle 13"/>
-          <p:cNvSpPr/>
-          <p:nvPr/>
-        </p:nvSpPr>
-        <p:spPr>
-          <a:xfrm>
-            <a:off x="9025128" y="4983480"/>
-            <a:ext cx="2606040" cy="457200"/>
-          </a:xfrm>
-          <a:prstGeom prst="roundRect">
-            <a:avLst>
-              <a:gd name="adj" fmla="val 10000"/>
-            </a:avLst>
-          </a:prstGeom>
-          <a:solidFill>
-            <a:srgbClr val="DCEDEF"/>
-          </a:solidFill>
-          <a:ln w="15875">
-            <a:solidFill>
-              <a:srgbClr val="0E7C86"/>
-            </a:solidFill>
-          </a:ln>
-          <a:effectLst/>
-        </p:spPr>
-        <p:style>
-          <a:lnRef idx="1">
-            <a:schemeClr val="accent1"/>
-          </a:lnRef>
-          <a:fillRef idx="3">
-            <a:schemeClr val="accent1"/>
-          </a:fillRef>
-          <a:effectRef idx="2">
-            <a:schemeClr val="accent1"/>
-          </a:effectRef>
-          <a:fontRef idx="minor">
-            <a:schemeClr val="lt1"/>
-          </a:fontRef>
-        </p:style>
-        <p:txBody>
-          <a:bodyPr rtlCol="0" anchor="ctr" wrap="square" lIns="54864" rIns="54864" tIns="27432" bIns="27432"/>
-          <a:lstStyle/>
-          <a:p>
-            <a:pPr algn="ctr"/>
-            <a:r>
-              <a:rPr sz="1350" b="1">
-                <a:solidFill>
-                  <a:srgbClr val="1A1F24"/>
-                </a:solidFill>
-                <a:latin typeface="Arial"/>
-              </a:rPr>
-              <a:t>data-ready interrupt</a:t>
-            </a:r>
-          </a:p>
-        </p:txBody>
-      </p:sp>
-      <p:sp>
-        <p:nvSpPr>
-          <p:cNvPr id="15" name="Rounded Rectangle 14"/>
-          <p:cNvSpPr/>
-          <p:nvPr/>
-        </p:nvSpPr>
-        <p:spPr>
-          <a:xfrm>
-            <a:off x="658368" y="5532120"/>
-            <a:ext cx="2606040" cy="457200"/>
-          </a:xfrm>
-          <a:prstGeom prst="roundRect">
-            <a:avLst>
-              <a:gd name="adj" fmla="val 10000"/>
-            </a:avLst>
-          </a:prstGeom>
-          <a:solidFill>
-            <a:srgbClr val="DCEDEF"/>
-          </a:solidFill>
-          <a:ln w="15875">
-            <a:solidFill>
-              <a:srgbClr val="0E7C86"/>
-            </a:solidFill>
-          </a:ln>
-          <a:effectLst/>
-        </p:spPr>
-        <p:style>
-          <a:lnRef idx="1">
-            <a:schemeClr val="accent1"/>
-          </a:lnRef>
-          <a:fillRef idx="3">
-            <a:schemeClr val="accent1"/>
-          </a:fillRef>
-          <a:effectRef idx="2">
-            <a:schemeClr val="accent1"/>
-          </a:effectRef>
-          <a:fontRef idx="minor">
-            <a:schemeClr val="lt1"/>
-          </a:fontRef>
-        </p:style>
-        <p:txBody>
-          <a:bodyPr rtlCol="0" anchor="ctr" wrap="square" lIns="54864" rIns="54864" tIns="27432" bIns="27432"/>
-          <a:lstStyle/>
-          <a:p>
-            <a:pPr algn="ctr"/>
-            <a:r>
-              <a:rPr sz="1350" b="1">
-                <a:solidFill>
-                  <a:srgbClr val="1A1F24"/>
-                </a:solidFill>
-                <a:latin typeface="Arial"/>
-              </a:rPr>
-              <a:t>FIFO where relevant</a:t>
-            </a:r>
-          </a:p>
-        </p:txBody>
-      </p:sp>
-      <p:sp>
-        <p:nvSpPr>
-          <p:cNvPr id="16" name="Rounded Rectangle 15"/>
-          <p:cNvSpPr/>
-          <p:nvPr/>
-        </p:nvSpPr>
-        <p:spPr>
-          <a:xfrm>
-            <a:off x="3447288" y="5532120"/>
-            <a:ext cx="2606040" cy="457200"/>
-          </a:xfrm>
-          <a:prstGeom prst="roundRect">
-            <a:avLst>
-              <a:gd name="adj" fmla="val 10000"/>
-            </a:avLst>
-          </a:prstGeom>
-          <a:solidFill>
-            <a:srgbClr val="DCEDEF"/>
-          </a:solidFill>
-          <a:ln w="15875">
-            <a:solidFill>
-              <a:srgbClr val="0E7C86"/>
-            </a:solidFill>
-          </a:ln>
-          <a:effectLst/>
-        </p:spPr>
-        <p:style>
-          <a:lnRef idx="1">
-            <a:schemeClr val="accent1"/>
-          </a:lnRef>
-          <a:fillRef idx="3">
-            <a:schemeClr val="accent1"/>
-          </a:fillRef>
-          <a:effectRef idx="2">
-            <a:schemeClr val="accent1"/>
-          </a:effectRef>
-          <a:fontRef idx="minor">
-            <a:schemeClr val="lt1"/>
-          </a:fontRef>
-        </p:style>
-        <p:txBody>
-          <a:bodyPr rtlCol="0" anchor="ctr" wrap="square" lIns="54864" rIns="54864" tIns="27432" bIns="27432"/>
-          <a:lstStyle/>
-          <a:p>
-            <a:pPr algn="ctr"/>
-            <a:r>
-              <a:rPr sz="1350" b="1">
-                <a:solidFill>
-                  <a:srgbClr val="1A1F24"/>
-                </a:solidFill>
-                <a:latin typeface="Arial"/>
-              </a:rPr>
-              <a:t>an accessible register map</a:t>
-            </a:r>
-          </a:p>
-        </p:txBody>
-      </p:sp>
-      <p:sp>
-        <p:nvSpPr>
-          <p:cNvPr id="17" name="Rounded Rectangle 16"/>
-          <p:cNvSpPr/>
-          <p:nvPr/>
-        </p:nvSpPr>
-        <p:spPr>
-          <a:xfrm>
-            <a:off x="6236208" y="5532120"/>
-            <a:ext cx="2606040" cy="457200"/>
-          </a:xfrm>
-          <a:prstGeom prst="roundRect">
-            <a:avLst>
-              <a:gd name="adj" fmla="val 10000"/>
-            </a:avLst>
-          </a:prstGeom>
-          <a:solidFill>
-            <a:srgbClr val="DCEDEF"/>
-          </a:solidFill>
-          <a:ln w="15875">
-            <a:solidFill>
-              <a:srgbClr val="0E7C86"/>
-            </a:solidFill>
-          </a:ln>
-          <a:effectLst/>
-        </p:spPr>
-        <p:style>
-          <a:lnRef idx="1">
-            <a:schemeClr val="accent1"/>
-          </a:lnRef>
-          <a:fillRef idx="3">
-            <a:schemeClr val="accent1"/>
-          </a:fillRef>
-          <a:effectRef idx="2">
-            <a:schemeClr val="accent1"/>
-          </a:effectRef>
-          <a:fontRef idx="minor">
-            <a:schemeClr val="lt1"/>
-          </a:fontRef>
-        </p:style>
-        <p:txBody>
-          <a:bodyPr rtlCol="0" anchor="ctr" wrap="square" lIns="54864" rIns="54864" tIns="27432" bIns="27432"/>
-          <a:lstStyle/>
-          <a:p>
-            <a:pPr algn="ctr"/>
-            <a:r>
-              <a:rPr sz="1350" b="1">
-                <a:solidFill>
-                  <a:srgbClr val="1A1F24"/>
-                </a:solidFill>
-                <a:latin typeface="Arial"/>
-              </a:rPr>
-              <a:t>a complete datasheet</a:t>
+              <a:t>Sensor Q, calibrated at 25 °C before installation</a:t>
+            </a:r>
+          </a:p>
+        </p:txBody>
+      </p:sp>
+      <p:sp>
+        <p:nvSpPr>
+          <p:cNvPr id="19" name="TextBox 18"/>
+          <p:cNvSpPr txBox="1"/>
+          <p:nvPr/>
+        </p:nvSpPr>
+        <p:spPr>
+          <a:xfrm>
+            <a:off x="658368" y="5541264"/>
+            <a:ext cx="10874959" cy="713232"/>
+          </a:xfrm>
+          <a:prstGeom prst="rect">
+            <a:avLst/>
+          </a:prstGeom>
+          <a:noFill/>
+        </p:spPr>
+        <p:txBody>
+          <a:bodyPr wrap="square" lIns="0" rIns="0" tIns="0" bIns="0" anchor="t">
+            <a:spAutoFit/>
+          </a:bodyPr>
+          <a:lstStyle/>
+          <a:p>
+            <a:pPr algn="l">
+              <a:lnSpc>
+                <a:spcPct val="125000"/>
+              </a:lnSpc>
+            </a:pPr>
+            <a:r>
+              <a:rPr sz="1500" b="0" i="1">
+                <a:solidFill>
+                  <a:srgbClr val="0E7C86"/>
+                </a:solidFill>
+                <a:latin typeface="Arial"/>
+              </a:rPr>
+              <a:t>A total error band over the operating range beats a headline accuracy at one temperature. An unspecified coefficient is not a small error — it is an unbounded one.</a:t>
             </a:r>
           </a:p>
         </p:txBody>
@@ -23744,7 +24309,7 @@
                 </a:solidFill>
                 <a:latin typeface="Arial"/>
               </a:rPr>
-              <a:t>Four things to keep</a:t>
+              <a:t>The course's selection rule</a:t>
             </a:r>
           </a:p>
         </p:txBody>
@@ -23801,8 +24366,8 @@
         </p:nvSpPr>
         <p:spPr>
           <a:xfrm>
-            <a:off x="658368" y="1874519"/>
-            <a:ext cx="685800" cy="457200"/>
+            <a:off x="658368" y="1353312"/>
+            <a:ext cx="10874959" cy="365760"/>
           </a:xfrm>
           <a:prstGeom prst="rect">
             <a:avLst/>
@@ -23817,27 +24382,96 @@
           <a:p>
             <a:pPr algn="l"/>
             <a:r>
-              <a:rPr sz="2400" b="1" i="0">
-                <a:solidFill>
-                  <a:srgbClr val="DCEDEF"/>
-                </a:solidFill>
-                <a:latin typeface="Courier New"/>
-              </a:rPr>
-              <a:t>01</a:t>
-            </a:r>
-          </a:p>
-        </p:txBody>
-      </p:sp>
-      <p:sp>
-        <p:nvSpPr>
-          <p:cNvPr id="8" name="TextBox 7"/>
+              <a:rPr sz="1700" b="0" i="1">
+                <a:solidFill>
+                  <a:srgbClr val="6B7680"/>
+                </a:solidFill>
+                <a:latin typeface="Arial"/>
+              </a:rPr>
+              <a:t>Quoted from your own semester plan</a:t>
+            </a:r>
+          </a:p>
+        </p:txBody>
+      </p:sp>
+      <p:sp>
+        <p:nvSpPr>
+          <p:cNvPr id="8" name="Rounded Rectangle 7"/>
+          <p:cNvSpPr/>
+          <p:nvPr/>
+        </p:nvSpPr>
+        <p:spPr>
+          <a:xfrm>
+            <a:off x="658368" y="2148840"/>
+            <a:ext cx="10874959" cy="1371600"/>
+          </a:xfrm>
+          <a:prstGeom prst="roundRect">
+            <a:avLst>
+              <a:gd name="adj" fmla="val 10000"/>
+            </a:avLst>
+          </a:prstGeom>
+          <a:solidFill>
+            <a:srgbClr val="1A1F24"/>
+          </a:solidFill>
+          <a:ln w="38100">
+            <a:solidFill>
+              <a:srgbClr val="0E7C86"/>
+            </a:solidFill>
+          </a:ln>
+          <a:effectLst/>
+        </p:spPr>
+        <p:style>
+          <a:lnRef idx="1">
+            <a:schemeClr val="accent1"/>
+          </a:lnRef>
+          <a:fillRef idx="3">
+            <a:schemeClr val="accent1"/>
+          </a:fillRef>
+          <a:effectRef idx="2">
+            <a:schemeClr val="accent1"/>
+          </a:effectRef>
+          <a:fontRef idx="minor">
+            <a:schemeClr val="lt1"/>
+          </a:fontRef>
+        </p:style>
+        <p:txBody>
+          <a:bodyPr rtlCol="0" anchor="ctr" wrap="square" lIns="54864" rIns="54864" tIns="27432" bIns="27432"/>
+          <a:lstStyle/>
+          <a:p>
+            <a:pPr algn="ctr"/>
+            <a:r>
+              <a:rPr sz="2300" b="1">
+                <a:solidFill>
+                  <a:srgbClr val="F7F5F1"/>
+                </a:solidFill>
+                <a:latin typeface="Arial"/>
+              </a:rPr>
+              <a:t>“Avoid selecting a part only because an Arduino library exists;</a:t>
+            </a:r>
+          </a:p>
+          <a:p>
+            <a:pPr algn="ctr"/>
+            <a:r>
+              <a:rPr sz="2300" b="1">
+                <a:solidFill>
+                  <a:srgbClr val="F7F5F1"/>
+                </a:solidFill>
+                <a:latin typeface="Arial"/>
+              </a:rPr>
+              <a:t>students must still see the underlying configuration and data path.”</a:t>
+            </a:r>
+          </a:p>
+        </p:txBody>
+      </p:sp>
+      <p:sp>
+        <p:nvSpPr>
+          <p:cNvPr id="9" name="TextBox 8"/>
           <p:cNvSpPr txBox="1"/>
           <p:nvPr/>
         </p:nvSpPr>
         <p:spPr>
           <a:xfrm>
-            <a:off x="1435608" y="1856231"/>
-            <a:ext cx="10241280" cy="411480"/>
+            <a:off x="658368" y="3794760"/>
+            <a:ext cx="10874959" cy="457200"/>
           </a:xfrm>
           <a:prstGeom prst="rect">
             <a:avLst/>
@@ -23852,27 +24486,27 @@
           <a:p>
             <a:pPr algn="l"/>
             <a:r>
-              <a:rPr sz="2100" b="1" i="0">
-                <a:solidFill>
-                  <a:srgbClr val="1A1F24"/>
-                </a:solidFill>
-                <a:latin typeface="Arial"/>
-              </a:rPr>
-              <a:t>Turn the requirement into a number before you read any datasheet.</a:t>
-            </a:r>
-          </a:p>
-        </p:txBody>
-      </p:sp>
-      <p:sp>
-        <p:nvSpPr>
-          <p:cNvPr id="9" name="TextBox 8"/>
+              <a:rPr sz="2600" b="1" i="0">
+                <a:solidFill>
+                  <a:srgbClr val="C0392B"/>
+                </a:solidFill>
+                <a:latin typeface="Arial"/>
+              </a:rPr>
+              <a:t>Part A had a library. Part A cannot do the job.</a:t>
+            </a:r>
+          </a:p>
+        </p:txBody>
+      </p:sp>
+      <p:sp>
+        <p:nvSpPr>
+          <p:cNvPr id="10" name="TextBox 9"/>
           <p:cNvSpPr txBox="1"/>
           <p:nvPr/>
         </p:nvSpPr>
         <p:spPr>
           <a:xfrm>
-            <a:off x="1435608" y="2258567"/>
-            <a:ext cx="10241280" cy="365760"/>
+            <a:off x="658368" y="4526280"/>
+            <a:ext cx="10874959" cy="365760"/>
           </a:xfrm>
           <a:prstGeom prst="rect">
             <a:avLst/>
@@ -23887,328 +24521,412 @@
           <a:p>
             <a:pPr algn="l"/>
             <a:r>
-              <a:rPr sz="1700" b="0" i="0">
-                <a:solidFill>
-                  <a:srgbClr val="6B7680"/>
-                </a:solidFill>
-                <a:latin typeface="Arial"/>
-              </a:rPr>
-              <a:t>0.5° became 8.73 mg, and 8.73 mg decided everything that followed.</a:t>
-            </a:r>
-          </a:p>
-        </p:txBody>
-      </p:sp>
-      <p:sp>
-        <p:nvSpPr>
-          <p:cNvPr id="10" name="TextBox 9"/>
-          <p:cNvSpPr txBox="1"/>
-          <p:nvPr/>
-        </p:nvSpPr>
-        <p:spPr>
-          <a:xfrm>
-            <a:off x="658368" y="2898647"/>
-            <a:ext cx="685800" cy="457200"/>
-          </a:xfrm>
-          <a:prstGeom prst="rect">
-            <a:avLst/>
-          </a:prstGeom>
-          <a:noFill/>
-        </p:spPr>
-        <p:txBody>
-          <a:bodyPr wrap="square" lIns="0" rIns="0" tIns="0" bIns="0" anchor="t">
-            <a:spAutoFit/>
-          </a:bodyPr>
-          <a:lstStyle/>
-          <a:p>
-            <a:pPr algn="l"/>
-            <a:r>
-              <a:rPr sz="2400" b="1" i="0">
-                <a:solidFill>
-                  <a:srgbClr val="DCEDEF"/>
-                </a:solidFill>
-                <a:latin typeface="Courier New"/>
-              </a:rPr>
-              <a:t>02</a:t>
-            </a:r>
-          </a:p>
-        </p:txBody>
-      </p:sp>
-      <p:sp>
-        <p:nvSpPr>
-          <p:cNvPr id="11" name="TextBox 10"/>
-          <p:cNvSpPr txBox="1"/>
-          <p:nvPr/>
-        </p:nvSpPr>
-        <p:spPr>
-          <a:xfrm>
-            <a:off x="1435608" y="2880359"/>
-            <a:ext cx="10241280" cy="411480"/>
-          </a:xfrm>
-          <a:prstGeom prst="rect">
-            <a:avLst/>
-          </a:prstGeom>
-          <a:noFill/>
-        </p:spPr>
-        <p:txBody>
-          <a:bodyPr wrap="square" lIns="0" rIns="0" tIns="0" bIns="0" anchor="t">
-            <a:spAutoFit/>
-          </a:bodyPr>
-          <a:lstStyle/>
-          <a:p>
-            <a:pPr algn="l"/>
-            <a:r>
-              <a:rPr sz="2100" b="1" i="0">
+              <a:rPr sz="1800" b="1" i="0">
                 <a:solidFill>
                   <a:srgbClr val="1A1F24"/>
                 </a:solidFill>
                 <a:latin typeface="Arial"/>
               </a:rPr>
-              <a:t>Find the dominant term. Everything else is decoration.</a:t>
-            </a:r>
-          </a:p>
-        </p:txBody>
-      </p:sp>
-      <p:sp>
-        <p:nvSpPr>
-          <p:cNvPr id="12" name="TextBox 11"/>
-          <p:cNvSpPr txBox="1"/>
-          <p:nvPr/>
-        </p:nvSpPr>
-        <p:spPr>
-          <a:xfrm>
-            <a:off x="1435608" y="3282695"/>
-            <a:ext cx="10241280" cy="365760"/>
-          </a:xfrm>
-          <a:prstGeom prst="rect">
-            <a:avLst/>
-          </a:prstGeom>
-          <a:noFill/>
-        </p:spPr>
-        <p:txBody>
-          <a:bodyPr wrap="square" lIns="0" rIns="0" tIns="0" bIns="0" anchor="t">
-            <a:spAutoFit/>
-          </a:bodyPr>
-          <a:lstStyle/>
-          <a:p>
-            <a:pPr algn="l"/>
-            <a:r>
-              <a:rPr sz="1700" b="0" i="0">
-                <a:solidFill>
-                  <a:srgbClr val="6B7680"/>
-                </a:solidFill>
-                <a:latin typeface="Arial"/>
-              </a:rPr>
-              <a:t>10 mg and 0.7 mg combine to 10.03 mg. The small term never mattered.</a:t>
-            </a:r>
-          </a:p>
-        </p:txBody>
-      </p:sp>
-      <p:sp>
-        <p:nvSpPr>
-          <p:cNvPr id="13" name="TextBox 12"/>
-          <p:cNvSpPr txBox="1"/>
-          <p:nvPr/>
-        </p:nvSpPr>
-        <p:spPr>
-          <a:xfrm>
-            <a:off x="658368" y="3922775"/>
-            <a:ext cx="685800" cy="457200"/>
-          </a:xfrm>
-          <a:prstGeom prst="rect">
-            <a:avLst/>
-          </a:prstGeom>
-          <a:noFill/>
-        </p:spPr>
-        <p:txBody>
-          <a:bodyPr wrap="square" lIns="0" rIns="0" tIns="0" bIns="0" anchor="t">
-            <a:spAutoFit/>
-          </a:bodyPr>
-          <a:lstStyle/>
-          <a:p>
-            <a:pPr algn="l"/>
-            <a:r>
-              <a:rPr sz="2400" b="1" i="0">
-                <a:solidFill>
-                  <a:srgbClr val="DCEDEF"/>
-                </a:solidFill>
-                <a:latin typeface="Courier New"/>
-              </a:rPr>
-              <a:t>03</a:t>
-            </a:r>
-          </a:p>
-        </p:txBody>
-      </p:sp>
-      <p:sp>
-        <p:nvSpPr>
-          <p:cNvPr id="14" name="TextBox 13"/>
-          <p:cNvSpPr txBox="1"/>
-          <p:nvPr/>
-        </p:nvSpPr>
-        <p:spPr>
-          <a:xfrm>
-            <a:off x="1435608" y="3904487"/>
-            <a:ext cx="10241280" cy="411480"/>
-          </a:xfrm>
-          <a:prstGeom prst="rect">
-            <a:avLst/>
-          </a:prstGeom>
-          <a:noFill/>
-        </p:spPr>
-        <p:txBody>
-          <a:bodyPr wrap="square" lIns="0" rIns="0" tIns="0" bIns="0" anchor="t">
-            <a:spAutoFit/>
-          </a:bodyPr>
-          <a:lstStyle/>
-          <a:p>
-            <a:pPr algn="l"/>
-            <a:r>
-              <a:rPr sz="2100" b="1" i="0">
+              <a:t>What to choose on instead — parts that expose the engineering:</a:t>
+            </a:r>
+          </a:p>
+        </p:txBody>
+      </p:sp>
+      <p:sp>
+        <p:nvSpPr>
+          <p:cNvPr id="11" name="Rounded Rectangle 10"/>
+          <p:cNvSpPr/>
+          <p:nvPr/>
+        </p:nvSpPr>
+        <p:spPr>
+          <a:xfrm>
+            <a:off x="658368" y="4983480"/>
+            <a:ext cx="2606040" cy="457200"/>
+          </a:xfrm>
+          <a:prstGeom prst="roundRect">
+            <a:avLst>
+              <a:gd name="adj" fmla="val 10000"/>
+            </a:avLst>
+          </a:prstGeom>
+          <a:solidFill>
+            <a:srgbClr val="DCEDEF"/>
+          </a:solidFill>
+          <a:ln w="15875">
+            <a:solidFill>
+              <a:srgbClr val="0E7C86"/>
+            </a:solidFill>
+          </a:ln>
+          <a:effectLst/>
+        </p:spPr>
+        <p:style>
+          <a:lnRef idx="1">
+            <a:schemeClr val="accent1"/>
+          </a:lnRef>
+          <a:fillRef idx="3">
+            <a:schemeClr val="accent1"/>
+          </a:fillRef>
+          <a:effectRef idx="2">
+            <a:schemeClr val="accent1"/>
+          </a:effectRef>
+          <a:fontRef idx="minor">
+            <a:schemeClr val="lt1"/>
+          </a:fontRef>
+        </p:style>
+        <p:txBody>
+          <a:bodyPr rtlCol="0" anchor="ctr" wrap="square" lIns="54864" rIns="54864" tIns="27432" bIns="27432"/>
+          <a:lstStyle/>
+          <a:p>
+            <a:pPr algn="ctr"/>
+            <a:r>
+              <a:rPr sz="1350" b="1">
                 <a:solidFill>
                   <a:srgbClr val="1A1F24"/>
                 </a:solidFill>
                 <a:latin typeface="Arial"/>
               </a:rPr>
-              <a:t>Resolution is not accuracy, and neither is precision.</a:t>
-            </a:r>
-          </a:p>
-        </p:txBody>
-      </p:sp>
-      <p:sp>
-        <p:nvSpPr>
-          <p:cNvPr id="15" name="TextBox 14"/>
-          <p:cNvSpPr txBox="1"/>
-          <p:nvPr/>
-        </p:nvSpPr>
-        <p:spPr>
-          <a:xfrm>
-            <a:off x="1435608" y="4306823"/>
-            <a:ext cx="10241280" cy="365760"/>
-          </a:xfrm>
-          <a:prstGeom prst="rect">
-            <a:avLst/>
-          </a:prstGeom>
-          <a:noFill/>
-        </p:spPr>
-        <p:txBody>
-          <a:bodyPr wrap="square" lIns="0" rIns="0" tIns="0" bIns="0" anchor="t">
-            <a:spAutoFit/>
-          </a:bodyPr>
-          <a:lstStyle/>
-          <a:p>
-            <a:pPr algn="l"/>
-            <a:r>
-              <a:rPr sz="1700" b="0" i="0">
-                <a:solidFill>
-                  <a:srgbClr val="6B7680"/>
-                </a:solidFill>
-                <a:latin typeface="Arial"/>
-              </a:rPr>
-              <a:t>Systematic → calibration. Random → bandwidth. Drift → component choice.</a:t>
-            </a:r>
-          </a:p>
-        </p:txBody>
-      </p:sp>
-      <p:sp>
-        <p:nvSpPr>
-          <p:cNvPr id="16" name="TextBox 15"/>
-          <p:cNvSpPr txBox="1"/>
-          <p:nvPr/>
-        </p:nvSpPr>
-        <p:spPr>
-          <a:xfrm>
-            <a:off x="658368" y="4946903"/>
-            <a:ext cx="685800" cy="457200"/>
-          </a:xfrm>
-          <a:prstGeom prst="rect">
-            <a:avLst/>
-          </a:prstGeom>
-          <a:noFill/>
-        </p:spPr>
-        <p:txBody>
-          <a:bodyPr wrap="square" lIns="0" rIns="0" tIns="0" bIns="0" anchor="t">
-            <a:spAutoFit/>
-          </a:bodyPr>
-          <a:lstStyle/>
-          <a:p>
-            <a:pPr algn="l"/>
-            <a:r>
-              <a:rPr sz="2400" b="1" i="0">
-                <a:solidFill>
-                  <a:srgbClr val="DCEDEF"/>
-                </a:solidFill>
-                <a:latin typeface="Courier New"/>
-              </a:rPr>
-              <a:t>04</a:t>
-            </a:r>
-          </a:p>
-        </p:txBody>
-      </p:sp>
-      <p:sp>
-        <p:nvSpPr>
-          <p:cNvPr id="17" name="TextBox 16"/>
-          <p:cNvSpPr txBox="1"/>
-          <p:nvPr/>
-        </p:nvSpPr>
-        <p:spPr>
-          <a:xfrm>
-            <a:off x="1435608" y="4928615"/>
-            <a:ext cx="10241280" cy="411480"/>
-          </a:xfrm>
-          <a:prstGeom prst="rect">
-            <a:avLst/>
-          </a:prstGeom>
-          <a:noFill/>
-        </p:spPr>
-        <p:txBody>
-          <a:bodyPr wrap="square" lIns="0" rIns="0" tIns="0" bIns="0" anchor="t">
-            <a:spAutoFit/>
-          </a:bodyPr>
-          <a:lstStyle/>
-          <a:p>
-            <a:pPr algn="l"/>
-            <a:r>
-              <a:rPr sz="2100" b="1" i="0">
+              <a:t>selectable range and ODR</a:t>
+            </a:r>
+          </a:p>
+        </p:txBody>
+      </p:sp>
+      <p:sp>
+        <p:nvSpPr>
+          <p:cNvPr id="12" name="Rounded Rectangle 11"/>
+          <p:cNvSpPr/>
+          <p:nvPr/>
+        </p:nvSpPr>
+        <p:spPr>
+          <a:xfrm>
+            <a:off x="3447288" y="4983480"/>
+            <a:ext cx="2606040" cy="457200"/>
+          </a:xfrm>
+          <a:prstGeom prst="roundRect">
+            <a:avLst>
+              <a:gd name="adj" fmla="val 10000"/>
+            </a:avLst>
+          </a:prstGeom>
+          <a:solidFill>
+            <a:srgbClr val="DCEDEF"/>
+          </a:solidFill>
+          <a:ln w="15875">
+            <a:solidFill>
+              <a:srgbClr val="0E7C86"/>
+            </a:solidFill>
+          </a:ln>
+          <a:effectLst/>
+        </p:spPr>
+        <p:style>
+          <a:lnRef idx="1">
+            <a:schemeClr val="accent1"/>
+          </a:lnRef>
+          <a:fillRef idx="3">
+            <a:schemeClr val="accent1"/>
+          </a:fillRef>
+          <a:effectRef idx="2">
+            <a:schemeClr val="accent1"/>
+          </a:effectRef>
+          <a:fontRef idx="minor">
+            <a:schemeClr val="lt1"/>
+          </a:fontRef>
+        </p:style>
+        <p:txBody>
+          <a:bodyPr rtlCol="0" anchor="ctr" wrap="square" lIns="54864" rIns="54864" tIns="27432" bIns="27432"/>
+          <a:lstStyle/>
+          <a:p>
+            <a:pPr algn="ctr"/>
+            <a:r>
+              <a:rPr sz="1350" b="1">
                 <a:solidFill>
                   <a:srgbClr val="1A1F24"/>
                 </a:solidFill>
                 <a:latin typeface="Arial"/>
               </a:rPr>
-              <a:t>A number without its conditions is not a number.</a:t>
-            </a:r>
-          </a:p>
-        </p:txBody>
-      </p:sp>
-      <p:sp>
-        <p:nvSpPr>
-          <p:cNvPr id="18" name="TextBox 17"/>
-          <p:cNvSpPr txBox="1"/>
-          <p:nvPr/>
-        </p:nvSpPr>
-        <p:spPr>
-          <a:xfrm>
-            <a:off x="1435608" y="5330951"/>
-            <a:ext cx="10241280" cy="365760"/>
-          </a:xfrm>
-          <a:prstGeom prst="rect">
-            <a:avLst/>
-          </a:prstGeom>
-          <a:noFill/>
-        </p:spPr>
-        <p:txBody>
-          <a:bodyPr wrap="square" lIns="0" rIns="0" tIns="0" bIns="0" anchor="t">
-            <a:spAutoFit/>
-          </a:bodyPr>
-          <a:lstStyle/>
-          <a:p>
-            <a:pPr algn="l"/>
-            <a:r>
-              <a:rPr sz="1700" b="0" i="0">
-                <a:solidFill>
-                  <a:srgbClr val="6B7680"/>
-                </a:solidFill>
-                <a:latin typeface="Arial"/>
-              </a:rPr>
-              <a:t>typ at 25 °C is not a guarantee, and an unspecified coefficient is unbounded.</a:t>
+              <a:t>documented bandwidth and noise</a:t>
+            </a:r>
+          </a:p>
+        </p:txBody>
+      </p:sp>
+      <p:sp>
+        <p:nvSpPr>
+          <p:cNvPr id="13" name="Rounded Rectangle 12"/>
+          <p:cNvSpPr/>
+          <p:nvPr/>
+        </p:nvSpPr>
+        <p:spPr>
+          <a:xfrm>
+            <a:off x="6236208" y="4983480"/>
+            <a:ext cx="2606040" cy="457200"/>
+          </a:xfrm>
+          <a:prstGeom prst="roundRect">
+            <a:avLst>
+              <a:gd name="adj" fmla="val 10000"/>
+            </a:avLst>
+          </a:prstGeom>
+          <a:solidFill>
+            <a:srgbClr val="DCEDEF"/>
+          </a:solidFill>
+          <a:ln w="15875">
+            <a:solidFill>
+              <a:srgbClr val="0E7C86"/>
+            </a:solidFill>
+          </a:ln>
+          <a:effectLst/>
+        </p:spPr>
+        <p:style>
+          <a:lnRef idx="1">
+            <a:schemeClr val="accent1"/>
+          </a:lnRef>
+          <a:fillRef idx="3">
+            <a:schemeClr val="accent1"/>
+          </a:fillRef>
+          <a:effectRef idx="2">
+            <a:schemeClr val="accent1"/>
+          </a:effectRef>
+          <a:fontRef idx="minor">
+            <a:schemeClr val="lt1"/>
+          </a:fontRef>
+        </p:style>
+        <p:txBody>
+          <a:bodyPr rtlCol="0" anchor="ctr" wrap="square" lIns="54864" rIns="54864" tIns="27432" bIns="27432"/>
+          <a:lstStyle/>
+          <a:p>
+            <a:pPr algn="ctr"/>
+            <a:r>
+              <a:rPr sz="1350" b="1">
+                <a:solidFill>
+                  <a:srgbClr val="1A1F24"/>
+                </a:solidFill>
+                <a:latin typeface="Arial"/>
+              </a:rPr>
+              <a:t>self-test</a:t>
+            </a:r>
+          </a:p>
+        </p:txBody>
+      </p:sp>
+      <p:sp>
+        <p:nvSpPr>
+          <p:cNvPr id="14" name="Rounded Rectangle 13"/>
+          <p:cNvSpPr/>
+          <p:nvPr/>
+        </p:nvSpPr>
+        <p:spPr>
+          <a:xfrm>
+            <a:off x="9025128" y="4983480"/>
+            <a:ext cx="2606040" cy="457200"/>
+          </a:xfrm>
+          <a:prstGeom prst="roundRect">
+            <a:avLst>
+              <a:gd name="adj" fmla="val 10000"/>
+            </a:avLst>
+          </a:prstGeom>
+          <a:solidFill>
+            <a:srgbClr val="DCEDEF"/>
+          </a:solidFill>
+          <a:ln w="15875">
+            <a:solidFill>
+              <a:srgbClr val="0E7C86"/>
+            </a:solidFill>
+          </a:ln>
+          <a:effectLst/>
+        </p:spPr>
+        <p:style>
+          <a:lnRef idx="1">
+            <a:schemeClr val="accent1"/>
+          </a:lnRef>
+          <a:fillRef idx="3">
+            <a:schemeClr val="accent1"/>
+          </a:fillRef>
+          <a:effectRef idx="2">
+            <a:schemeClr val="accent1"/>
+          </a:effectRef>
+          <a:fontRef idx="minor">
+            <a:schemeClr val="lt1"/>
+          </a:fontRef>
+        </p:style>
+        <p:txBody>
+          <a:bodyPr rtlCol="0" anchor="ctr" wrap="square" lIns="54864" rIns="54864" tIns="27432" bIns="27432"/>
+          <a:lstStyle/>
+          <a:p>
+            <a:pPr algn="ctr"/>
+            <a:r>
+              <a:rPr sz="1350" b="1">
+                <a:solidFill>
+                  <a:srgbClr val="1A1F24"/>
+                </a:solidFill>
+                <a:latin typeface="Arial"/>
+              </a:rPr>
+              <a:t>data-ready interrupt</a:t>
+            </a:r>
+          </a:p>
+        </p:txBody>
+      </p:sp>
+      <p:sp>
+        <p:nvSpPr>
+          <p:cNvPr id="15" name="Rounded Rectangle 14"/>
+          <p:cNvSpPr/>
+          <p:nvPr/>
+        </p:nvSpPr>
+        <p:spPr>
+          <a:xfrm>
+            <a:off x="658368" y="5532120"/>
+            <a:ext cx="2606040" cy="457200"/>
+          </a:xfrm>
+          <a:prstGeom prst="roundRect">
+            <a:avLst>
+              <a:gd name="adj" fmla="val 10000"/>
+            </a:avLst>
+          </a:prstGeom>
+          <a:solidFill>
+            <a:srgbClr val="DCEDEF"/>
+          </a:solidFill>
+          <a:ln w="15875">
+            <a:solidFill>
+              <a:srgbClr val="0E7C86"/>
+            </a:solidFill>
+          </a:ln>
+          <a:effectLst/>
+        </p:spPr>
+        <p:style>
+          <a:lnRef idx="1">
+            <a:schemeClr val="accent1"/>
+          </a:lnRef>
+          <a:fillRef idx="3">
+            <a:schemeClr val="accent1"/>
+          </a:fillRef>
+          <a:effectRef idx="2">
+            <a:schemeClr val="accent1"/>
+          </a:effectRef>
+          <a:fontRef idx="minor">
+            <a:schemeClr val="lt1"/>
+          </a:fontRef>
+        </p:style>
+        <p:txBody>
+          <a:bodyPr rtlCol="0" anchor="ctr" wrap="square" lIns="54864" rIns="54864" tIns="27432" bIns="27432"/>
+          <a:lstStyle/>
+          <a:p>
+            <a:pPr algn="ctr"/>
+            <a:r>
+              <a:rPr sz="1350" b="1">
+                <a:solidFill>
+                  <a:srgbClr val="1A1F24"/>
+                </a:solidFill>
+                <a:latin typeface="Arial"/>
+              </a:rPr>
+              <a:t>FIFO where relevant</a:t>
+            </a:r>
+          </a:p>
+        </p:txBody>
+      </p:sp>
+      <p:sp>
+        <p:nvSpPr>
+          <p:cNvPr id="16" name="Rounded Rectangle 15"/>
+          <p:cNvSpPr/>
+          <p:nvPr/>
+        </p:nvSpPr>
+        <p:spPr>
+          <a:xfrm>
+            <a:off x="3447288" y="5532120"/>
+            <a:ext cx="2606040" cy="457200"/>
+          </a:xfrm>
+          <a:prstGeom prst="roundRect">
+            <a:avLst>
+              <a:gd name="adj" fmla="val 10000"/>
+            </a:avLst>
+          </a:prstGeom>
+          <a:solidFill>
+            <a:srgbClr val="DCEDEF"/>
+          </a:solidFill>
+          <a:ln w="15875">
+            <a:solidFill>
+              <a:srgbClr val="0E7C86"/>
+            </a:solidFill>
+          </a:ln>
+          <a:effectLst/>
+        </p:spPr>
+        <p:style>
+          <a:lnRef idx="1">
+            <a:schemeClr val="accent1"/>
+          </a:lnRef>
+          <a:fillRef idx="3">
+            <a:schemeClr val="accent1"/>
+          </a:fillRef>
+          <a:effectRef idx="2">
+            <a:schemeClr val="accent1"/>
+          </a:effectRef>
+          <a:fontRef idx="minor">
+            <a:schemeClr val="lt1"/>
+          </a:fontRef>
+        </p:style>
+        <p:txBody>
+          <a:bodyPr rtlCol="0" anchor="ctr" wrap="square" lIns="54864" rIns="54864" tIns="27432" bIns="27432"/>
+          <a:lstStyle/>
+          <a:p>
+            <a:pPr algn="ctr"/>
+            <a:r>
+              <a:rPr sz="1350" b="1">
+                <a:solidFill>
+                  <a:srgbClr val="1A1F24"/>
+                </a:solidFill>
+                <a:latin typeface="Arial"/>
+              </a:rPr>
+              <a:t>an accessible register map</a:t>
+            </a:r>
+          </a:p>
+        </p:txBody>
+      </p:sp>
+      <p:sp>
+        <p:nvSpPr>
+          <p:cNvPr id="17" name="Rounded Rectangle 16"/>
+          <p:cNvSpPr/>
+          <p:nvPr/>
+        </p:nvSpPr>
+        <p:spPr>
+          <a:xfrm>
+            <a:off x="6236208" y="5532120"/>
+            <a:ext cx="2606040" cy="457200"/>
+          </a:xfrm>
+          <a:prstGeom prst="roundRect">
+            <a:avLst>
+              <a:gd name="adj" fmla="val 10000"/>
+            </a:avLst>
+          </a:prstGeom>
+          <a:solidFill>
+            <a:srgbClr val="DCEDEF"/>
+          </a:solidFill>
+          <a:ln w="15875">
+            <a:solidFill>
+              <a:srgbClr val="0E7C86"/>
+            </a:solidFill>
+          </a:ln>
+          <a:effectLst/>
+        </p:spPr>
+        <p:style>
+          <a:lnRef idx="1">
+            <a:schemeClr val="accent1"/>
+          </a:lnRef>
+          <a:fillRef idx="3">
+            <a:schemeClr val="accent1"/>
+          </a:fillRef>
+          <a:effectRef idx="2">
+            <a:schemeClr val="accent1"/>
+          </a:effectRef>
+          <a:fontRef idx="minor">
+            <a:schemeClr val="lt1"/>
+          </a:fontRef>
+        </p:style>
+        <p:txBody>
+          <a:bodyPr rtlCol="0" anchor="ctr" wrap="square" lIns="54864" rIns="54864" tIns="27432" bIns="27432"/>
+          <a:lstStyle/>
+          <a:p>
+            <a:pPr algn="ctr"/>
+            <a:r>
+              <a:rPr sz="1350" b="1">
+                <a:solidFill>
+                  <a:srgbClr val="1A1F24"/>
+                </a:solidFill>
+                <a:latin typeface="Arial"/>
+              </a:rPr>
+              <a:t>a complete datasheet</a:t>
             </a:r>
           </a:p>
         </p:txBody>
@@ -24375,7 +25093,7 @@
                 </a:solidFill>
                 <a:latin typeface="Arial"/>
               </a:rPr>
-              <a:t>Exit ticket</a:t>
+              <a:t>Four things to keep</a:t>
             </a:r>
           </a:p>
         </p:txBody>
@@ -24432,8 +25150,8 @@
         </p:nvSpPr>
         <p:spPr>
           <a:xfrm>
-            <a:off x="658368" y="1353312"/>
-            <a:ext cx="10874959" cy="365760"/>
+            <a:off x="658368" y="1874519"/>
+            <a:ext cx="685800" cy="457200"/>
           </a:xfrm>
           <a:prstGeom prst="rect">
             <a:avLst/>
@@ -24448,84 +25166,27 @@
           <a:p>
             <a:pPr algn="l"/>
             <a:r>
-              <a:rPr sz="1700" b="0" i="1">
-                <a:solidFill>
-                  <a:srgbClr val="6B7680"/>
-                </a:solidFill>
-                <a:latin typeface="Arial"/>
-              </a:rPr>
-              <a:t>Anonymous · hand it in at the door</a:t>
-            </a:r>
-          </a:p>
-        </p:txBody>
-      </p:sp>
-      <p:sp>
-        <p:nvSpPr>
-          <p:cNvPr id="8" name="Rounded Rectangle 7"/>
-          <p:cNvSpPr/>
-          <p:nvPr/>
-        </p:nvSpPr>
-        <p:spPr>
-          <a:xfrm>
-            <a:off x="658368" y="1965960"/>
-            <a:ext cx="3520440" cy="621792"/>
-          </a:xfrm>
-          <a:prstGeom prst="roundRect">
-            <a:avLst>
-              <a:gd name="adj" fmla="val 10000"/>
-            </a:avLst>
-          </a:prstGeom>
-          <a:solidFill>
-            <a:srgbClr val="0E7C86"/>
-          </a:solidFill>
-          <a:ln w="15875">
-            <a:solidFill>
-              <a:srgbClr val="0E7C86"/>
-            </a:solidFill>
-          </a:ln>
-          <a:effectLst/>
-        </p:spPr>
-        <p:style>
-          <a:lnRef idx="1">
-            <a:schemeClr val="accent1"/>
-          </a:lnRef>
-          <a:fillRef idx="3">
-            <a:schemeClr val="accent1"/>
-          </a:fillRef>
-          <a:effectRef idx="2">
-            <a:schemeClr val="accent1"/>
-          </a:effectRef>
-          <a:fontRef idx="minor">
-            <a:schemeClr val="lt1"/>
-          </a:fontRef>
-        </p:style>
-        <p:txBody>
-          <a:bodyPr rtlCol="0" anchor="ctr" wrap="square" lIns="54864" rIns="54864" tIns="27432" bIns="27432"/>
-          <a:lstStyle/>
-          <a:p>
-            <a:pPr algn="ctr"/>
-            <a:r>
-              <a:rPr sz="1650" b="1">
-                <a:solidFill>
-                  <a:srgbClr val="F7F5F1"/>
-                </a:solidFill>
-                <a:latin typeface="Arial"/>
-              </a:rPr>
-              <a:t>1  ·  COMPUTE</a:t>
-            </a:r>
-          </a:p>
-        </p:txBody>
-      </p:sp>
-      <p:sp>
-        <p:nvSpPr>
-          <p:cNvPr id="9" name="TextBox 8"/>
+              <a:rPr sz="2400" b="1" i="0">
+                <a:solidFill>
+                  <a:srgbClr val="DCEDEF"/>
+                </a:solidFill>
+                <a:latin typeface="Courier New"/>
+              </a:rPr>
+              <a:t>01</a:t>
+            </a:r>
+          </a:p>
+        </p:txBody>
+      </p:sp>
+      <p:sp>
+        <p:nvSpPr>
+          <p:cNvPr id="8" name="TextBox 7"/>
           <p:cNvSpPr txBox="1"/>
           <p:nvPr/>
         </p:nvSpPr>
         <p:spPr>
           <a:xfrm>
-            <a:off x="768096" y="2834640"/>
-            <a:ext cx="3337560" cy="2011680"/>
+            <a:off x="1435608" y="1856231"/>
+            <a:ext cx="10241280" cy="411480"/>
           </a:xfrm>
           <a:prstGeom prst="rect">
             <a:avLst/>
@@ -24538,138 +25199,29 @@
           </a:bodyPr>
           <a:lstStyle/>
           <a:p>
-            <a:pPr algn="l">
-              <a:lnSpc>
-                <a:spcPct val="140000"/>
-              </a:lnSpc>
-            </a:pPr>
-            <a:r>
-              <a:rPr sz="1800" b="0" i="0">
+            <a:pPr algn="l"/>
+            <a:r>
+              <a:rPr sz="2100" b="1" i="0">
                 <a:solidFill>
                   <a:srgbClr val="1A1F24"/>
                 </a:solidFill>
                 <a:latin typeface="Arial"/>
               </a:rPr>
-              <a:t>A sensor gives 200 µg/√Hz.</a:t>
-            </a:r>
-          </a:p>
-          <a:p>
-            <a:pPr algn="l">
-              <a:lnSpc>
-                <a:spcPct val="140000"/>
-              </a:lnSpc>
-            </a:pPr>
-            <a:r>
-              <a:rPr sz="1800" b="0" i="0">
-                <a:solidFill>
-                  <a:srgbClr val="1A1F24"/>
-                </a:solidFill>
-                <a:latin typeface="Arial"/>
-              </a:rPr>
-              <a:t>You set a 100 Hz bandwidth.</a:t>
-            </a:r>
-          </a:p>
-          <a:p>
-            <a:pPr algn="l">
-              <a:lnSpc>
-                <a:spcPct val="140000"/>
-              </a:lnSpc>
-            </a:pPr>
-            <a:r>
-              <a:rPr sz="1800" b="0" i="0">
-                <a:solidFill>
-                  <a:srgbClr val="1A1F24"/>
-                </a:solidFill>
-                <a:latin typeface="Arial"/>
-              </a:rPr>
-              <a:t/>
-            </a:r>
-          </a:p>
-          <a:p>
-            <a:pPr algn="l">
-              <a:lnSpc>
-                <a:spcPct val="140000"/>
-              </a:lnSpc>
-            </a:pPr>
-            <a:r>
-              <a:rPr sz="1800" b="0" i="0">
-                <a:solidFill>
-                  <a:srgbClr val="1A1F24"/>
-                </a:solidFill>
-                <a:latin typeface="Arial"/>
-              </a:rPr>
-              <a:t>State the RMS noise.</a:t>
-            </a:r>
-          </a:p>
-        </p:txBody>
-      </p:sp>
-      <p:sp>
-        <p:nvSpPr>
-          <p:cNvPr id="10" name="Rounded Rectangle 9"/>
-          <p:cNvSpPr/>
-          <p:nvPr/>
-        </p:nvSpPr>
-        <p:spPr>
-          <a:xfrm>
-            <a:off x="4315968" y="1965960"/>
-            <a:ext cx="3520440" cy="621792"/>
-          </a:xfrm>
-          <a:prstGeom prst="roundRect">
-            <a:avLst>
-              <a:gd name="adj" fmla="val 10000"/>
-            </a:avLst>
-          </a:prstGeom>
-          <a:solidFill>
-            <a:srgbClr val="D98324"/>
-          </a:solidFill>
-          <a:ln w="15875">
-            <a:solidFill>
-              <a:srgbClr val="D98324"/>
-            </a:solidFill>
-          </a:ln>
-          <a:effectLst/>
-        </p:spPr>
-        <p:style>
-          <a:lnRef idx="1">
-            <a:schemeClr val="accent1"/>
-          </a:lnRef>
-          <a:fillRef idx="3">
-            <a:schemeClr val="accent1"/>
-          </a:fillRef>
-          <a:effectRef idx="2">
-            <a:schemeClr val="accent1"/>
-          </a:effectRef>
-          <a:fontRef idx="minor">
-            <a:schemeClr val="lt1"/>
-          </a:fontRef>
-        </p:style>
-        <p:txBody>
-          <a:bodyPr rtlCol="0" anchor="ctr" wrap="square" lIns="54864" rIns="54864" tIns="27432" bIns="27432"/>
-          <a:lstStyle/>
-          <a:p>
-            <a:pPr algn="ctr"/>
-            <a:r>
-              <a:rPr sz="1650" b="1">
-                <a:solidFill>
-                  <a:srgbClr val="1A1F24"/>
-                </a:solidFill>
-                <a:latin typeface="Arial"/>
-              </a:rPr>
-              <a:t>2  ·  JUDGEMENT</a:t>
-            </a:r>
-          </a:p>
-        </p:txBody>
-      </p:sp>
-      <p:sp>
-        <p:nvSpPr>
-          <p:cNvPr id="11" name="TextBox 10"/>
+              <a:t>Turn the requirement into a number before you read any datasheet.</a:t>
+            </a:r>
+          </a:p>
+        </p:txBody>
+      </p:sp>
+      <p:sp>
+        <p:nvSpPr>
+          <p:cNvPr id="9" name="TextBox 8"/>
           <p:cNvSpPr txBox="1"/>
           <p:nvPr/>
         </p:nvSpPr>
         <p:spPr>
           <a:xfrm>
-            <a:off x="4425696" y="2834640"/>
-            <a:ext cx="3337560" cy="2011680"/>
+            <a:off x="1435608" y="2258567"/>
+            <a:ext cx="10241280" cy="365760"/>
           </a:xfrm>
           <a:prstGeom prst="rect">
             <a:avLst/>
@@ -24682,138 +25234,29 @@
           </a:bodyPr>
           <a:lstStyle/>
           <a:p>
-            <a:pPr algn="l">
-              <a:lnSpc>
-                <a:spcPct val="140000"/>
-              </a:lnSpc>
-            </a:pPr>
-            <a:r>
-              <a:rPr sz="1800" b="0" i="0">
-                <a:solidFill>
-                  <a:srgbClr val="1A1F24"/>
-                </a:solidFill>
-                <a:latin typeface="Arial"/>
-              </a:rPr>
-              <a:t>Name the one specification you</a:t>
-            </a:r>
-          </a:p>
-          <a:p>
-            <a:pPr algn="l">
-              <a:lnSpc>
-                <a:spcPct val="140000"/>
-              </a:lnSpc>
-            </a:pPr>
-            <a:r>
-              <a:rPr sz="1800" b="0" i="0">
-                <a:solidFill>
-                  <a:srgbClr val="1A1F24"/>
-                </a:solidFill>
-                <a:latin typeface="Arial"/>
-              </a:rPr>
-              <a:t>will look for first, for the rest</a:t>
-            </a:r>
-          </a:p>
-          <a:p>
-            <a:pPr algn="l">
-              <a:lnSpc>
-                <a:spcPct val="140000"/>
-              </a:lnSpc>
-            </a:pPr>
-            <a:r>
-              <a:rPr sz="1800" b="0" i="0">
-                <a:solidFill>
-                  <a:srgbClr val="1A1F24"/>
-                </a:solidFill>
-                <a:latin typeface="Arial"/>
-              </a:rPr>
-              <a:t>of your career, before the</a:t>
-            </a:r>
-          </a:p>
-          <a:p>
-            <a:pPr algn="l">
-              <a:lnSpc>
-                <a:spcPct val="140000"/>
-              </a:lnSpc>
-            </a:pPr>
-            <a:r>
-              <a:rPr sz="1800" b="0" i="0">
-                <a:solidFill>
-                  <a:srgbClr val="1A1F24"/>
-                </a:solidFill>
-                <a:latin typeface="Arial"/>
-              </a:rPr>
-              <a:t>headline number.</a:t>
-            </a:r>
-          </a:p>
-        </p:txBody>
-      </p:sp>
-      <p:sp>
-        <p:nvSpPr>
-          <p:cNvPr id="12" name="Rounded Rectangle 11"/>
-          <p:cNvSpPr/>
-          <p:nvPr/>
-        </p:nvSpPr>
-        <p:spPr>
-          <a:xfrm>
-            <a:off x="7973568" y="1965960"/>
-            <a:ext cx="3520440" cy="621792"/>
-          </a:xfrm>
-          <a:prstGeom prst="roundRect">
-            <a:avLst>
-              <a:gd name="adj" fmla="val 10000"/>
-            </a:avLst>
-          </a:prstGeom>
-          <a:solidFill>
-            <a:srgbClr val="6B7680"/>
-          </a:solidFill>
-          <a:ln w="15875">
-            <a:solidFill>
-              <a:srgbClr val="6B7680"/>
-            </a:solidFill>
-          </a:ln>
-          <a:effectLst/>
-        </p:spPr>
-        <p:style>
-          <a:lnRef idx="1">
-            <a:schemeClr val="accent1"/>
-          </a:lnRef>
-          <a:fillRef idx="3">
-            <a:schemeClr val="accent1"/>
-          </a:fillRef>
-          <a:effectRef idx="2">
-            <a:schemeClr val="accent1"/>
-          </a:effectRef>
-          <a:fontRef idx="minor">
-            <a:schemeClr val="lt1"/>
-          </a:fontRef>
-        </p:style>
-        <p:txBody>
-          <a:bodyPr rtlCol="0" anchor="ctr" wrap="square" lIns="54864" rIns="54864" tIns="27432" bIns="27432"/>
-          <a:lstStyle/>
-          <a:p>
-            <a:pPr algn="ctr"/>
-            <a:r>
-              <a:rPr sz="1650" b="1">
-                <a:solidFill>
-                  <a:srgbClr val="F7F5F1"/>
-                </a:solidFill>
-                <a:latin typeface="Arial"/>
-              </a:rPr>
-              <a:t>3  ·  MUDDIEST POINT</a:t>
-            </a:r>
-          </a:p>
-        </p:txBody>
-      </p:sp>
-      <p:sp>
-        <p:nvSpPr>
-          <p:cNvPr id="13" name="TextBox 12"/>
+            <a:pPr algn="l"/>
+            <a:r>
+              <a:rPr sz="1700" b="0" i="0">
+                <a:solidFill>
+                  <a:srgbClr val="6B7680"/>
+                </a:solidFill>
+                <a:latin typeface="Arial"/>
+              </a:rPr>
+              <a:t>0.5° became 8.73 mg, and 8.73 mg decided everything that followed.</a:t>
+            </a:r>
+          </a:p>
+        </p:txBody>
+      </p:sp>
+      <p:sp>
+        <p:nvSpPr>
+          <p:cNvPr id="10" name="TextBox 9"/>
           <p:cNvSpPr txBox="1"/>
           <p:nvPr/>
         </p:nvSpPr>
         <p:spPr>
           <a:xfrm>
-            <a:off x="8083296" y="2834640"/>
-            <a:ext cx="3337560" cy="2011680"/>
+            <a:off x="658368" y="2898647"/>
+            <a:ext cx="685800" cy="457200"/>
           </a:xfrm>
           <a:prstGeom prst="rect">
             <a:avLst/>
@@ -24826,124 +25269,295 @@
           </a:bodyPr>
           <a:lstStyle/>
           <a:p>
-            <a:pPr algn="l">
-              <a:lnSpc>
-                <a:spcPct val="140000"/>
-              </a:lnSpc>
-            </a:pPr>
-            <a:r>
-              <a:rPr sz="1800" b="0" i="0">
+            <a:pPr algn="l"/>
+            <a:r>
+              <a:rPr sz="2400" b="1" i="0">
+                <a:solidFill>
+                  <a:srgbClr val="DCEDEF"/>
+                </a:solidFill>
+                <a:latin typeface="Courier New"/>
+              </a:rPr>
+              <a:t>02</a:t>
+            </a:r>
+          </a:p>
+        </p:txBody>
+      </p:sp>
+      <p:sp>
+        <p:nvSpPr>
+          <p:cNvPr id="11" name="TextBox 10"/>
+          <p:cNvSpPr txBox="1"/>
+          <p:nvPr/>
+        </p:nvSpPr>
+        <p:spPr>
+          <a:xfrm>
+            <a:off x="1435608" y="2880359"/>
+            <a:ext cx="10241280" cy="411480"/>
+          </a:xfrm>
+          <a:prstGeom prst="rect">
+            <a:avLst/>
+          </a:prstGeom>
+          <a:noFill/>
+        </p:spPr>
+        <p:txBody>
+          <a:bodyPr wrap="square" lIns="0" rIns="0" tIns="0" bIns="0" anchor="t">
+            <a:spAutoFit/>
+          </a:bodyPr>
+          <a:lstStyle/>
+          <a:p>
+            <a:pPr algn="l"/>
+            <a:r>
+              <a:rPr sz="2100" b="1" i="0">
                 <a:solidFill>
                   <a:srgbClr val="1A1F24"/>
                 </a:solidFill>
                 <a:latin typeface="Arial"/>
               </a:rPr>
-              <a:t>What is the one thing today</a:t>
-            </a:r>
-          </a:p>
-          <a:p>
-            <a:pPr algn="l">
-              <a:lnSpc>
-                <a:spcPct val="140000"/>
-              </a:lnSpc>
-            </a:pPr>
-            <a:r>
-              <a:rPr sz="1800" b="0" i="0">
+              <a:t>Find the dominant term. Everything else is decoration.</a:t>
+            </a:r>
+          </a:p>
+        </p:txBody>
+      </p:sp>
+      <p:sp>
+        <p:nvSpPr>
+          <p:cNvPr id="12" name="TextBox 11"/>
+          <p:cNvSpPr txBox="1"/>
+          <p:nvPr/>
+        </p:nvSpPr>
+        <p:spPr>
+          <a:xfrm>
+            <a:off x="1435608" y="3282695"/>
+            <a:ext cx="10241280" cy="365760"/>
+          </a:xfrm>
+          <a:prstGeom prst="rect">
+            <a:avLst/>
+          </a:prstGeom>
+          <a:noFill/>
+        </p:spPr>
+        <p:txBody>
+          <a:bodyPr wrap="square" lIns="0" rIns="0" tIns="0" bIns="0" anchor="t">
+            <a:spAutoFit/>
+          </a:bodyPr>
+          <a:lstStyle/>
+          <a:p>
+            <a:pPr algn="l"/>
+            <a:r>
+              <a:rPr sz="1700" b="0" i="0">
+                <a:solidFill>
+                  <a:srgbClr val="6B7680"/>
+                </a:solidFill>
+                <a:latin typeface="Arial"/>
+              </a:rPr>
+              <a:t>10 mg and 0.7 mg combine to 10.02 mg. The small term never mattered.</a:t>
+            </a:r>
+          </a:p>
+        </p:txBody>
+      </p:sp>
+      <p:sp>
+        <p:nvSpPr>
+          <p:cNvPr id="13" name="TextBox 12"/>
+          <p:cNvSpPr txBox="1"/>
+          <p:nvPr/>
+        </p:nvSpPr>
+        <p:spPr>
+          <a:xfrm>
+            <a:off x="658368" y="3922775"/>
+            <a:ext cx="685800" cy="457200"/>
+          </a:xfrm>
+          <a:prstGeom prst="rect">
+            <a:avLst/>
+          </a:prstGeom>
+          <a:noFill/>
+        </p:spPr>
+        <p:txBody>
+          <a:bodyPr wrap="square" lIns="0" rIns="0" tIns="0" bIns="0" anchor="t">
+            <a:spAutoFit/>
+          </a:bodyPr>
+          <a:lstStyle/>
+          <a:p>
+            <a:pPr algn="l"/>
+            <a:r>
+              <a:rPr sz="2400" b="1" i="0">
+                <a:solidFill>
+                  <a:srgbClr val="DCEDEF"/>
+                </a:solidFill>
+                <a:latin typeface="Courier New"/>
+              </a:rPr>
+              <a:t>03</a:t>
+            </a:r>
+          </a:p>
+        </p:txBody>
+      </p:sp>
+      <p:sp>
+        <p:nvSpPr>
+          <p:cNvPr id="14" name="TextBox 13"/>
+          <p:cNvSpPr txBox="1"/>
+          <p:nvPr/>
+        </p:nvSpPr>
+        <p:spPr>
+          <a:xfrm>
+            <a:off x="1435608" y="3904487"/>
+            <a:ext cx="10241280" cy="411480"/>
+          </a:xfrm>
+          <a:prstGeom prst="rect">
+            <a:avLst/>
+          </a:prstGeom>
+          <a:noFill/>
+        </p:spPr>
+        <p:txBody>
+          <a:bodyPr wrap="square" lIns="0" rIns="0" tIns="0" bIns="0" anchor="t">
+            <a:spAutoFit/>
+          </a:bodyPr>
+          <a:lstStyle/>
+          <a:p>
+            <a:pPr algn="l"/>
+            <a:r>
+              <a:rPr sz="2100" b="1" i="0">
                 <a:solidFill>
                   <a:srgbClr val="1A1F24"/>
                 </a:solidFill>
                 <a:latin typeface="Arial"/>
               </a:rPr>
-              <a:t>you are least sure about?</a:t>
-            </a:r>
-          </a:p>
-          <a:p>
-            <a:pPr algn="l">
-              <a:lnSpc>
-                <a:spcPct val="140000"/>
-              </a:lnSpc>
-            </a:pPr>
-            <a:r>
-              <a:rPr sz="1800" b="0" i="0">
+              <a:t>Resolution is not accuracy, and neither is precision.</a:t>
+            </a:r>
+          </a:p>
+        </p:txBody>
+      </p:sp>
+      <p:sp>
+        <p:nvSpPr>
+          <p:cNvPr id="15" name="TextBox 14"/>
+          <p:cNvSpPr txBox="1"/>
+          <p:nvPr/>
+        </p:nvSpPr>
+        <p:spPr>
+          <a:xfrm>
+            <a:off x="1435608" y="4306823"/>
+            <a:ext cx="10241280" cy="365760"/>
+          </a:xfrm>
+          <a:prstGeom prst="rect">
+            <a:avLst/>
+          </a:prstGeom>
+          <a:noFill/>
+        </p:spPr>
+        <p:txBody>
+          <a:bodyPr wrap="square" lIns="0" rIns="0" tIns="0" bIns="0" anchor="t">
+            <a:spAutoFit/>
+          </a:bodyPr>
+          <a:lstStyle/>
+          <a:p>
+            <a:pPr algn="l"/>
+            <a:r>
+              <a:rPr sz="1700" b="0" i="0">
+                <a:solidFill>
+                  <a:srgbClr val="6B7680"/>
+                </a:solidFill>
+                <a:latin typeface="Arial"/>
+              </a:rPr>
+              <a:t>Systematic → calibration. Random → bandwidth. Drift → component choice.</a:t>
+            </a:r>
+          </a:p>
+        </p:txBody>
+      </p:sp>
+      <p:sp>
+        <p:nvSpPr>
+          <p:cNvPr id="16" name="TextBox 15"/>
+          <p:cNvSpPr txBox="1"/>
+          <p:nvPr/>
+        </p:nvSpPr>
+        <p:spPr>
+          <a:xfrm>
+            <a:off x="658368" y="4946903"/>
+            <a:ext cx="685800" cy="457200"/>
+          </a:xfrm>
+          <a:prstGeom prst="rect">
+            <a:avLst/>
+          </a:prstGeom>
+          <a:noFill/>
+        </p:spPr>
+        <p:txBody>
+          <a:bodyPr wrap="square" lIns="0" rIns="0" tIns="0" bIns="0" anchor="t">
+            <a:spAutoFit/>
+          </a:bodyPr>
+          <a:lstStyle/>
+          <a:p>
+            <a:pPr algn="l"/>
+            <a:r>
+              <a:rPr sz="2400" b="1" i="0">
+                <a:solidFill>
+                  <a:srgbClr val="DCEDEF"/>
+                </a:solidFill>
+                <a:latin typeface="Courier New"/>
+              </a:rPr>
+              <a:t>04</a:t>
+            </a:r>
+          </a:p>
+        </p:txBody>
+      </p:sp>
+      <p:sp>
+        <p:nvSpPr>
+          <p:cNvPr id="17" name="TextBox 16"/>
+          <p:cNvSpPr txBox="1"/>
+          <p:nvPr/>
+        </p:nvSpPr>
+        <p:spPr>
+          <a:xfrm>
+            <a:off x="1435608" y="4928615"/>
+            <a:ext cx="10241280" cy="411480"/>
+          </a:xfrm>
+          <a:prstGeom prst="rect">
+            <a:avLst/>
+          </a:prstGeom>
+          <a:noFill/>
+        </p:spPr>
+        <p:txBody>
+          <a:bodyPr wrap="square" lIns="0" rIns="0" tIns="0" bIns="0" anchor="t">
+            <a:spAutoFit/>
+          </a:bodyPr>
+          <a:lstStyle/>
+          <a:p>
+            <a:pPr algn="l"/>
+            <a:r>
+              <a:rPr sz="2100" b="1" i="0">
                 <a:solidFill>
                   <a:srgbClr val="1A1F24"/>
                 </a:solidFill>
                 <a:latin typeface="Arial"/>
               </a:rPr>
-              <a:t/>
-            </a:r>
-          </a:p>
-          <a:p>
-            <a:pPr algn="l">
-              <a:lnSpc>
-                <a:spcPct val="140000"/>
-              </a:lnSpc>
-            </a:pPr>
-            <a:r>
-              <a:rPr sz="1800" b="0" i="0">
-                <a:solidFill>
-                  <a:srgbClr val="1A1F24"/>
-                </a:solidFill>
-                <a:latin typeface="Arial"/>
-              </a:rPr>
-              <a:t>One sentence.</a:t>
-            </a:r>
-          </a:p>
-        </p:txBody>
-      </p:sp>
-      <p:sp>
-        <p:nvSpPr>
-          <p:cNvPr id="14" name="Rounded Rectangle 13"/>
-          <p:cNvSpPr/>
-          <p:nvPr/>
-        </p:nvSpPr>
-        <p:spPr>
-          <a:xfrm>
-            <a:off x="658368" y="5257800"/>
-            <a:ext cx="10874959" cy="685800"/>
-          </a:xfrm>
-          <a:prstGeom prst="roundRect">
-            <a:avLst>
-              <a:gd name="adj" fmla="val 10000"/>
-            </a:avLst>
-          </a:prstGeom>
-          <a:solidFill>
-            <a:srgbClr val="F7F5F1"/>
-          </a:solidFill>
-          <a:ln w="15875">
-            <a:solidFill>
-              <a:srgbClr val="6B7680"/>
-            </a:solidFill>
-          </a:ln>
-          <a:effectLst/>
-        </p:spPr>
-        <p:style>
-          <a:lnRef idx="1">
-            <a:schemeClr val="accent1"/>
-          </a:lnRef>
-          <a:fillRef idx="3">
-            <a:schemeClr val="accent1"/>
-          </a:fillRef>
-          <a:effectRef idx="2">
-            <a:schemeClr val="accent1"/>
-          </a:effectRef>
-          <a:fontRef idx="minor">
-            <a:schemeClr val="lt1"/>
-          </a:fontRef>
-        </p:style>
-        <p:txBody>
-          <a:bodyPr rtlCol="0" anchor="ctr" wrap="square" lIns="54864" rIns="54864" tIns="27432" bIns="27432"/>
-          <a:lstStyle/>
-          <a:p>
-            <a:pPr algn="ctr"/>
-            <a:r>
-              <a:rPr sz="1800" b="1">
-                <a:solidFill>
-                  <a:srgbClr val="1A1F24"/>
-                </a:solidFill>
-                <a:latin typeface="Arial"/>
-              </a:rPr>
-              <a:t>Question 1 is the one I will actually grade myself on. If the room cannot do it, I taught it badly.</a:t>
+              <a:t>A number without its conditions is not a number.</a:t>
+            </a:r>
+          </a:p>
+        </p:txBody>
+      </p:sp>
+      <p:sp>
+        <p:nvSpPr>
+          <p:cNvPr id="18" name="TextBox 17"/>
+          <p:cNvSpPr txBox="1"/>
+          <p:nvPr/>
+        </p:nvSpPr>
+        <p:spPr>
+          <a:xfrm>
+            <a:off x="1435608" y="5330951"/>
+            <a:ext cx="10241280" cy="365760"/>
+          </a:xfrm>
+          <a:prstGeom prst="rect">
+            <a:avLst/>
+          </a:prstGeom>
+          <a:noFill/>
+        </p:spPr>
+        <p:txBody>
+          <a:bodyPr wrap="square" lIns="0" rIns="0" tIns="0" bIns="0" anchor="t">
+            <a:spAutoFit/>
+          </a:bodyPr>
+          <a:lstStyle/>
+          <a:p>
+            <a:pPr algn="l"/>
+            <a:r>
+              <a:rPr sz="1700" b="0" i="0">
+                <a:solidFill>
+                  <a:srgbClr val="6B7680"/>
+                </a:solidFill>
+                <a:latin typeface="Arial"/>
+              </a:rPr>
+              <a:t>typ at 25 °C is not a guarantee, and an unspecified coefficient is unbounded.</a:t>
             </a:r>
           </a:p>
         </p:txBody>
@@ -24981,6 +25595,741 @@
             <a:avLst/>
           </a:prstGeom>
           <a:solidFill>
+            <a:srgbClr val="F7F5F1"/>
+          </a:solidFill>
+          <a:ln>
+            <a:noFill/>
+          </a:ln>
+          <a:effectLst/>
+        </p:spPr>
+        <p:style>
+          <a:lnRef idx="1">
+            <a:schemeClr val="accent1"/>
+          </a:lnRef>
+          <a:fillRef idx="3">
+            <a:schemeClr val="accent1"/>
+          </a:fillRef>
+          <a:effectRef idx="2">
+            <a:schemeClr val="accent1"/>
+          </a:effectRef>
+          <a:fontRef idx="minor">
+            <a:schemeClr val="lt1"/>
+          </a:fontRef>
+        </p:style>
+        <p:txBody>
+          <a:bodyPr rtlCol="0" anchor="ctr"/>
+          <a:lstStyle/>
+          <a:p>
+            <a:pPr algn="ctr"/>
+          </a:p>
+        </p:txBody>
+      </p:sp>
+      <p:sp>
+        <p:nvSpPr>
+          <p:cNvPr id="3" name="TextBox 2"/>
+          <p:cNvSpPr txBox="1"/>
+          <p:nvPr/>
+        </p:nvSpPr>
+        <p:spPr>
+          <a:xfrm>
+            <a:off x="658368" y="6400800"/>
+            <a:ext cx="5486400" cy="274320"/>
+          </a:xfrm>
+          <a:prstGeom prst="rect">
+            <a:avLst/>
+          </a:prstGeom>
+          <a:noFill/>
+        </p:spPr>
+        <p:txBody>
+          <a:bodyPr wrap="square" lIns="0" rIns="0" tIns="0" bIns="0" anchor="t">
+            <a:spAutoFit/>
+          </a:bodyPr>
+          <a:lstStyle/>
+          <a:p>
+            <a:pPr algn="l"/>
+            <a:r>
+              <a:rPr sz="1100" b="0" i="0">
+                <a:solidFill>
+                  <a:srgbClr val="6B7680"/>
+                </a:solidFill>
+                <a:latin typeface="Arial"/>
+              </a:rPr>
+              <a:t>MEMS &amp; Sensors  ·  Lecture 2  ·  Specifications and datasheet-based selection</a:t>
+            </a:r>
+          </a:p>
+        </p:txBody>
+      </p:sp>
+      <p:sp>
+        <p:nvSpPr>
+          <p:cNvPr id="4" name="TextBox 3"/>
+          <p:cNvSpPr txBox="1"/>
+          <p:nvPr/>
+        </p:nvSpPr>
+        <p:spPr>
+          <a:xfrm>
+            <a:off x="10618927" y="6400800"/>
+            <a:ext cx="914400" cy="274320"/>
+          </a:xfrm>
+          <a:prstGeom prst="rect">
+            <a:avLst/>
+          </a:prstGeom>
+          <a:noFill/>
+        </p:spPr>
+        <p:txBody>
+          <a:bodyPr wrap="square" lIns="0" rIns="0" tIns="0" bIns="0" anchor="t">
+            <a:spAutoFit/>
+          </a:bodyPr>
+          <a:lstStyle/>
+          <a:p>
+            <a:pPr algn="r"/>
+            <a:r>
+              <a:rPr sz="1100" b="0" i="0">
+                <a:solidFill>
+                  <a:srgbClr val="6B7680"/>
+                </a:solidFill>
+                <a:latin typeface="Arial"/>
+              </a:rPr>
+              <a:t>32</a:t>
+            </a:r>
+          </a:p>
+        </p:txBody>
+      </p:sp>
+      <p:sp>
+        <p:nvSpPr>
+          <p:cNvPr id="5" name="TextBox 4"/>
+          <p:cNvSpPr txBox="1"/>
+          <p:nvPr/>
+        </p:nvSpPr>
+        <p:spPr>
+          <a:xfrm>
+            <a:off x="658368" y="475488"/>
+            <a:ext cx="10874959" cy="777240"/>
+          </a:xfrm>
+          <a:prstGeom prst="rect">
+            <a:avLst/>
+          </a:prstGeom>
+          <a:noFill/>
+        </p:spPr>
+        <p:txBody>
+          <a:bodyPr wrap="square" lIns="0" rIns="0" tIns="0" bIns="0" anchor="t">
+            <a:spAutoFit/>
+          </a:bodyPr>
+          <a:lstStyle/>
+          <a:p>
+            <a:pPr algn="l"/>
+            <a:r>
+              <a:rPr sz="3400" b="1" i="0">
+                <a:solidFill>
+                  <a:srgbClr val="1A1F24"/>
+                </a:solidFill>
+                <a:latin typeface="Arial"/>
+              </a:rPr>
+              <a:t>Exit ticket</a:t>
+            </a:r>
+          </a:p>
+        </p:txBody>
+      </p:sp>
+      <p:sp>
+        <p:nvSpPr>
+          <p:cNvPr id="6" name="Rectangle 5"/>
+          <p:cNvSpPr/>
+          <p:nvPr/>
+        </p:nvSpPr>
+        <p:spPr>
+          <a:xfrm>
+            <a:off x="658368" y="1188720"/>
+            <a:ext cx="1371600" cy="57150"/>
+          </a:xfrm>
+          <a:prstGeom prst="rect">
+            <a:avLst/>
+          </a:prstGeom>
+          <a:solidFill>
+            <a:srgbClr val="0E7C86"/>
+          </a:solidFill>
+          <a:ln>
+            <a:noFill/>
+          </a:ln>
+          <a:effectLst/>
+        </p:spPr>
+        <p:style>
+          <a:lnRef idx="1">
+            <a:schemeClr val="accent1"/>
+          </a:lnRef>
+          <a:fillRef idx="3">
+            <a:schemeClr val="accent1"/>
+          </a:fillRef>
+          <a:effectRef idx="2">
+            <a:schemeClr val="accent1"/>
+          </a:effectRef>
+          <a:fontRef idx="minor">
+            <a:schemeClr val="lt1"/>
+          </a:fontRef>
+        </p:style>
+        <p:txBody>
+          <a:bodyPr rtlCol="0" anchor="ctr"/>
+          <a:lstStyle/>
+          <a:p>
+            <a:pPr algn="ctr"/>
+          </a:p>
+        </p:txBody>
+      </p:sp>
+      <p:sp>
+        <p:nvSpPr>
+          <p:cNvPr id="7" name="TextBox 6"/>
+          <p:cNvSpPr txBox="1"/>
+          <p:nvPr/>
+        </p:nvSpPr>
+        <p:spPr>
+          <a:xfrm>
+            <a:off x="658368" y="1353312"/>
+            <a:ext cx="10874959" cy="365760"/>
+          </a:xfrm>
+          <a:prstGeom prst="rect">
+            <a:avLst/>
+          </a:prstGeom>
+          <a:noFill/>
+        </p:spPr>
+        <p:txBody>
+          <a:bodyPr wrap="square" lIns="0" rIns="0" tIns="0" bIns="0" anchor="t">
+            <a:spAutoFit/>
+          </a:bodyPr>
+          <a:lstStyle/>
+          <a:p>
+            <a:pPr algn="l"/>
+            <a:r>
+              <a:rPr sz="1700" b="0" i="1">
+                <a:solidFill>
+                  <a:srgbClr val="6B7680"/>
+                </a:solidFill>
+                <a:latin typeface="Arial"/>
+              </a:rPr>
+              <a:t>Anonymous · hand it in at the door</a:t>
+            </a:r>
+          </a:p>
+        </p:txBody>
+      </p:sp>
+      <p:sp>
+        <p:nvSpPr>
+          <p:cNvPr id="8" name="Rounded Rectangle 7"/>
+          <p:cNvSpPr/>
+          <p:nvPr/>
+        </p:nvSpPr>
+        <p:spPr>
+          <a:xfrm>
+            <a:off x="658368" y="1965960"/>
+            <a:ext cx="3520440" cy="621792"/>
+          </a:xfrm>
+          <a:prstGeom prst="roundRect">
+            <a:avLst>
+              <a:gd name="adj" fmla="val 10000"/>
+            </a:avLst>
+          </a:prstGeom>
+          <a:solidFill>
+            <a:srgbClr val="0E7C86"/>
+          </a:solidFill>
+          <a:ln w="15875">
+            <a:solidFill>
+              <a:srgbClr val="0E7C86"/>
+            </a:solidFill>
+          </a:ln>
+          <a:effectLst/>
+        </p:spPr>
+        <p:style>
+          <a:lnRef idx="1">
+            <a:schemeClr val="accent1"/>
+          </a:lnRef>
+          <a:fillRef idx="3">
+            <a:schemeClr val="accent1"/>
+          </a:fillRef>
+          <a:effectRef idx="2">
+            <a:schemeClr val="accent1"/>
+          </a:effectRef>
+          <a:fontRef idx="minor">
+            <a:schemeClr val="lt1"/>
+          </a:fontRef>
+        </p:style>
+        <p:txBody>
+          <a:bodyPr rtlCol="0" anchor="ctr" wrap="square" lIns="54864" rIns="54864" tIns="27432" bIns="27432"/>
+          <a:lstStyle/>
+          <a:p>
+            <a:pPr algn="ctr"/>
+            <a:r>
+              <a:rPr sz="1650" b="1">
+                <a:solidFill>
+                  <a:srgbClr val="F7F5F1"/>
+                </a:solidFill>
+                <a:latin typeface="Arial"/>
+              </a:rPr>
+              <a:t>1  ·  COMPUTE</a:t>
+            </a:r>
+          </a:p>
+        </p:txBody>
+      </p:sp>
+      <p:sp>
+        <p:nvSpPr>
+          <p:cNvPr id="9" name="TextBox 8"/>
+          <p:cNvSpPr txBox="1"/>
+          <p:nvPr/>
+        </p:nvSpPr>
+        <p:spPr>
+          <a:xfrm>
+            <a:off x="768096" y="2834640"/>
+            <a:ext cx="3337560" cy="2011680"/>
+          </a:xfrm>
+          <a:prstGeom prst="rect">
+            <a:avLst/>
+          </a:prstGeom>
+          <a:noFill/>
+        </p:spPr>
+        <p:txBody>
+          <a:bodyPr wrap="square" lIns="0" rIns="0" tIns="0" bIns="0" anchor="t">
+            <a:spAutoFit/>
+          </a:bodyPr>
+          <a:lstStyle/>
+          <a:p>
+            <a:pPr algn="l">
+              <a:lnSpc>
+                <a:spcPct val="140000"/>
+              </a:lnSpc>
+            </a:pPr>
+            <a:r>
+              <a:rPr sz="1800" b="0" i="0">
+                <a:solidFill>
+                  <a:srgbClr val="1A1F24"/>
+                </a:solidFill>
+                <a:latin typeface="Arial"/>
+              </a:rPr>
+              <a:t>A sensor gives 200 µg/√Hz.</a:t>
+            </a:r>
+          </a:p>
+          <a:p>
+            <a:pPr algn="l">
+              <a:lnSpc>
+                <a:spcPct val="140000"/>
+              </a:lnSpc>
+            </a:pPr>
+            <a:r>
+              <a:rPr sz="1800" b="0" i="0">
+                <a:solidFill>
+                  <a:srgbClr val="1A1F24"/>
+                </a:solidFill>
+                <a:latin typeface="Arial"/>
+              </a:rPr>
+              <a:t>You set a 100 Hz bandwidth.</a:t>
+            </a:r>
+          </a:p>
+          <a:p>
+            <a:pPr algn="l">
+              <a:lnSpc>
+                <a:spcPct val="140000"/>
+              </a:lnSpc>
+            </a:pPr>
+            <a:r>
+              <a:rPr sz="1800" b="0" i="0">
+                <a:solidFill>
+                  <a:srgbClr val="1A1F24"/>
+                </a:solidFill>
+                <a:latin typeface="Arial"/>
+              </a:rPr>
+              <a:t/>
+            </a:r>
+          </a:p>
+          <a:p>
+            <a:pPr algn="l">
+              <a:lnSpc>
+                <a:spcPct val="140000"/>
+              </a:lnSpc>
+            </a:pPr>
+            <a:r>
+              <a:rPr sz="1800" b="0" i="0">
+                <a:solidFill>
+                  <a:srgbClr val="1A1F24"/>
+                </a:solidFill>
+                <a:latin typeface="Arial"/>
+              </a:rPr>
+              <a:t>State the RMS noise.</a:t>
+            </a:r>
+          </a:p>
+        </p:txBody>
+      </p:sp>
+      <p:sp>
+        <p:nvSpPr>
+          <p:cNvPr id="10" name="Rounded Rectangle 9"/>
+          <p:cNvSpPr/>
+          <p:nvPr/>
+        </p:nvSpPr>
+        <p:spPr>
+          <a:xfrm>
+            <a:off x="4315968" y="1965960"/>
+            <a:ext cx="3520440" cy="621792"/>
+          </a:xfrm>
+          <a:prstGeom prst="roundRect">
+            <a:avLst>
+              <a:gd name="adj" fmla="val 10000"/>
+            </a:avLst>
+          </a:prstGeom>
+          <a:solidFill>
+            <a:srgbClr val="D98324"/>
+          </a:solidFill>
+          <a:ln w="15875">
+            <a:solidFill>
+              <a:srgbClr val="D98324"/>
+            </a:solidFill>
+          </a:ln>
+          <a:effectLst/>
+        </p:spPr>
+        <p:style>
+          <a:lnRef idx="1">
+            <a:schemeClr val="accent1"/>
+          </a:lnRef>
+          <a:fillRef idx="3">
+            <a:schemeClr val="accent1"/>
+          </a:fillRef>
+          <a:effectRef idx="2">
+            <a:schemeClr val="accent1"/>
+          </a:effectRef>
+          <a:fontRef idx="minor">
+            <a:schemeClr val="lt1"/>
+          </a:fontRef>
+        </p:style>
+        <p:txBody>
+          <a:bodyPr rtlCol="0" anchor="ctr" wrap="square" lIns="54864" rIns="54864" tIns="27432" bIns="27432"/>
+          <a:lstStyle/>
+          <a:p>
+            <a:pPr algn="ctr"/>
+            <a:r>
+              <a:rPr sz="1650" b="1">
+                <a:solidFill>
+                  <a:srgbClr val="1A1F24"/>
+                </a:solidFill>
+                <a:latin typeface="Arial"/>
+              </a:rPr>
+              <a:t>2  ·  JUDGEMENT</a:t>
+            </a:r>
+          </a:p>
+        </p:txBody>
+      </p:sp>
+      <p:sp>
+        <p:nvSpPr>
+          <p:cNvPr id="11" name="TextBox 10"/>
+          <p:cNvSpPr txBox="1"/>
+          <p:nvPr/>
+        </p:nvSpPr>
+        <p:spPr>
+          <a:xfrm>
+            <a:off x="4425696" y="2834640"/>
+            <a:ext cx="3337560" cy="2011680"/>
+          </a:xfrm>
+          <a:prstGeom prst="rect">
+            <a:avLst/>
+          </a:prstGeom>
+          <a:noFill/>
+        </p:spPr>
+        <p:txBody>
+          <a:bodyPr wrap="square" lIns="0" rIns="0" tIns="0" bIns="0" anchor="t">
+            <a:spAutoFit/>
+          </a:bodyPr>
+          <a:lstStyle/>
+          <a:p>
+            <a:pPr algn="l">
+              <a:lnSpc>
+                <a:spcPct val="140000"/>
+              </a:lnSpc>
+            </a:pPr>
+            <a:r>
+              <a:rPr sz="1800" b="0" i="0">
+                <a:solidFill>
+                  <a:srgbClr val="1A1F24"/>
+                </a:solidFill>
+                <a:latin typeface="Arial"/>
+              </a:rPr>
+              <a:t>Name the one specification you</a:t>
+            </a:r>
+          </a:p>
+          <a:p>
+            <a:pPr algn="l">
+              <a:lnSpc>
+                <a:spcPct val="140000"/>
+              </a:lnSpc>
+            </a:pPr>
+            <a:r>
+              <a:rPr sz="1800" b="0" i="0">
+                <a:solidFill>
+                  <a:srgbClr val="1A1F24"/>
+                </a:solidFill>
+                <a:latin typeface="Arial"/>
+              </a:rPr>
+              <a:t>will look for first, for the rest</a:t>
+            </a:r>
+          </a:p>
+          <a:p>
+            <a:pPr algn="l">
+              <a:lnSpc>
+                <a:spcPct val="140000"/>
+              </a:lnSpc>
+            </a:pPr>
+            <a:r>
+              <a:rPr sz="1800" b="0" i="0">
+                <a:solidFill>
+                  <a:srgbClr val="1A1F24"/>
+                </a:solidFill>
+                <a:latin typeface="Arial"/>
+              </a:rPr>
+              <a:t>of your career, before the</a:t>
+            </a:r>
+          </a:p>
+          <a:p>
+            <a:pPr algn="l">
+              <a:lnSpc>
+                <a:spcPct val="140000"/>
+              </a:lnSpc>
+            </a:pPr>
+            <a:r>
+              <a:rPr sz="1800" b="0" i="0">
+                <a:solidFill>
+                  <a:srgbClr val="1A1F24"/>
+                </a:solidFill>
+                <a:latin typeface="Arial"/>
+              </a:rPr>
+              <a:t>headline number.</a:t>
+            </a:r>
+          </a:p>
+        </p:txBody>
+      </p:sp>
+      <p:sp>
+        <p:nvSpPr>
+          <p:cNvPr id="12" name="Rounded Rectangle 11"/>
+          <p:cNvSpPr/>
+          <p:nvPr/>
+        </p:nvSpPr>
+        <p:spPr>
+          <a:xfrm>
+            <a:off x="7973568" y="1965960"/>
+            <a:ext cx="3520440" cy="621792"/>
+          </a:xfrm>
+          <a:prstGeom prst="roundRect">
+            <a:avLst>
+              <a:gd name="adj" fmla="val 10000"/>
+            </a:avLst>
+          </a:prstGeom>
+          <a:solidFill>
+            <a:srgbClr val="6B7680"/>
+          </a:solidFill>
+          <a:ln w="15875">
+            <a:solidFill>
+              <a:srgbClr val="6B7680"/>
+            </a:solidFill>
+          </a:ln>
+          <a:effectLst/>
+        </p:spPr>
+        <p:style>
+          <a:lnRef idx="1">
+            <a:schemeClr val="accent1"/>
+          </a:lnRef>
+          <a:fillRef idx="3">
+            <a:schemeClr val="accent1"/>
+          </a:fillRef>
+          <a:effectRef idx="2">
+            <a:schemeClr val="accent1"/>
+          </a:effectRef>
+          <a:fontRef idx="minor">
+            <a:schemeClr val="lt1"/>
+          </a:fontRef>
+        </p:style>
+        <p:txBody>
+          <a:bodyPr rtlCol="0" anchor="ctr" wrap="square" lIns="54864" rIns="54864" tIns="27432" bIns="27432"/>
+          <a:lstStyle/>
+          <a:p>
+            <a:pPr algn="ctr"/>
+            <a:r>
+              <a:rPr sz="1650" b="1">
+                <a:solidFill>
+                  <a:srgbClr val="F7F5F1"/>
+                </a:solidFill>
+                <a:latin typeface="Arial"/>
+              </a:rPr>
+              <a:t>3  ·  MUDDIEST POINT</a:t>
+            </a:r>
+          </a:p>
+        </p:txBody>
+      </p:sp>
+      <p:sp>
+        <p:nvSpPr>
+          <p:cNvPr id="13" name="TextBox 12"/>
+          <p:cNvSpPr txBox="1"/>
+          <p:nvPr/>
+        </p:nvSpPr>
+        <p:spPr>
+          <a:xfrm>
+            <a:off x="8083296" y="2834640"/>
+            <a:ext cx="3337560" cy="2011680"/>
+          </a:xfrm>
+          <a:prstGeom prst="rect">
+            <a:avLst/>
+          </a:prstGeom>
+          <a:noFill/>
+        </p:spPr>
+        <p:txBody>
+          <a:bodyPr wrap="square" lIns="0" rIns="0" tIns="0" bIns="0" anchor="t">
+            <a:spAutoFit/>
+          </a:bodyPr>
+          <a:lstStyle/>
+          <a:p>
+            <a:pPr algn="l">
+              <a:lnSpc>
+                <a:spcPct val="140000"/>
+              </a:lnSpc>
+            </a:pPr>
+            <a:r>
+              <a:rPr sz="1800" b="0" i="0">
+                <a:solidFill>
+                  <a:srgbClr val="1A1F24"/>
+                </a:solidFill>
+                <a:latin typeface="Arial"/>
+              </a:rPr>
+              <a:t>What is the one thing today</a:t>
+            </a:r>
+          </a:p>
+          <a:p>
+            <a:pPr algn="l">
+              <a:lnSpc>
+                <a:spcPct val="140000"/>
+              </a:lnSpc>
+            </a:pPr>
+            <a:r>
+              <a:rPr sz="1800" b="0" i="0">
+                <a:solidFill>
+                  <a:srgbClr val="1A1F24"/>
+                </a:solidFill>
+                <a:latin typeface="Arial"/>
+              </a:rPr>
+              <a:t>you are least sure about?</a:t>
+            </a:r>
+          </a:p>
+          <a:p>
+            <a:pPr algn="l">
+              <a:lnSpc>
+                <a:spcPct val="140000"/>
+              </a:lnSpc>
+            </a:pPr>
+            <a:r>
+              <a:rPr sz="1800" b="0" i="0">
+                <a:solidFill>
+                  <a:srgbClr val="1A1F24"/>
+                </a:solidFill>
+                <a:latin typeface="Arial"/>
+              </a:rPr>
+              <a:t/>
+            </a:r>
+          </a:p>
+          <a:p>
+            <a:pPr algn="l">
+              <a:lnSpc>
+                <a:spcPct val="140000"/>
+              </a:lnSpc>
+            </a:pPr>
+            <a:r>
+              <a:rPr sz="1800" b="0" i="0">
+                <a:solidFill>
+                  <a:srgbClr val="1A1F24"/>
+                </a:solidFill>
+                <a:latin typeface="Arial"/>
+              </a:rPr>
+              <a:t>One sentence.</a:t>
+            </a:r>
+          </a:p>
+        </p:txBody>
+      </p:sp>
+      <p:sp>
+        <p:nvSpPr>
+          <p:cNvPr id="14" name="Rounded Rectangle 13"/>
+          <p:cNvSpPr/>
+          <p:nvPr/>
+        </p:nvSpPr>
+        <p:spPr>
+          <a:xfrm>
+            <a:off x="658368" y="5257800"/>
+            <a:ext cx="10874959" cy="685800"/>
+          </a:xfrm>
+          <a:prstGeom prst="roundRect">
+            <a:avLst>
+              <a:gd name="adj" fmla="val 10000"/>
+            </a:avLst>
+          </a:prstGeom>
+          <a:solidFill>
+            <a:srgbClr val="F7F5F1"/>
+          </a:solidFill>
+          <a:ln w="15875">
+            <a:solidFill>
+              <a:srgbClr val="6B7680"/>
+            </a:solidFill>
+          </a:ln>
+          <a:effectLst/>
+        </p:spPr>
+        <p:style>
+          <a:lnRef idx="1">
+            <a:schemeClr val="accent1"/>
+          </a:lnRef>
+          <a:fillRef idx="3">
+            <a:schemeClr val="accent1"/>
+          </a:fillRef>
+          <a:effectRef idx="2">
+            <a:schemeClr val="accent1"/>
+          </a:effectRef>
+          <a:fontRef idx="minor">
+            <a:schemeClr val="lt1"/>
+          </a:fontRef>
+        </p:style>
+        <p:txBody>
+          <a:bodyPr rtlCol="0" anchor="ctr" wrap="square" lIns="54864" rIns="54864" tIns="27432" bIns="27432"/>
+          <a:lstStyle/>
+          <a:p>
+            <a:pPr algn="ctr"/>
+            <a:r>
+              <a:rPr sz="1800" b="1">
+                <a:solidFill>
+                  <a:srgbClr val="1A1F24"/>
+                </a:solidFill>
+                <a:latin typeface="Arial"/>
+              </a:rPr>
+              <a:t>Question 1 is the one I will actually grade myself on. If the room cannot do it, I taught it badly.</a:t>
+            </a:r>
+          </a:p>
+        </p:txBody>
+      </p:sp>
+    </p:spTree>
+  </p:cSld>
+  <p:clrMapOvr>
+    <a:masterClrMapping/>
+  </p:clrMapOvr>
+</p:sld>
+</file>
+
+<file path=ppt/slides/slide33.xml><?xml version="1.0" encoding="utf-8"?>
+<p:sld xmlns:a="http://schemas.openxmlformats.org/drawingml/2006/main" xmlns:p="http://schemas.openxmlformats.org/presentationml/2006/main" xmlns:r="http://schemas.openxmlformats.org/officeDocument/2006/relationships">
+  <p:cSld>
+    <p:spTree>
+      <p:nvGrpSpPr>
+        <p:cNvPr id="1" name=""/>
+        <p:cNvGrpSpPr/>
+        <p:nvPr/>
+      </p:nvGrpSpPr>
+      <p:grpSpPr/>
+      <p:sp>
+        <p:nvSpPr>
+          <p:cNvPr id="2" name="Rectangle 1"/>
+          <p:cNvSpPr/>
+          <p:nvPr/>
+        </p:nvSpPr>
+        <p:spPr>
+          <a:xfrm>
+            <a:off x="0" y="0"/>
+            <a:ext cx="12191695" cy="6858000"/>
+          </a:xfrm>
+          <a:prstGeom prst="rect">
+            <a:avLst/>
+          </a:prstGeom>
+          <a:solidFill>
             <a:srgbClr val="1A1F24"/>
           </a:solidFill>
           <a:ln>
@@ -25075,7 +26424,7 @@
                 </a:solidFill>
                 <a:latin typeface="Arial"/>
               </a:rPr>
-              <a:t>32</a:t>
+              <a:t>33</a:t>
             </a:r>
           </a:p>
         </p:txBody>
